--- a/Report/Report_1019.pptx
+++ b/Report/Report_1019.pptx
@@ -10,8 +10,10 @@
   <p:sldIdLst>
     <p:sldId id="298" r:id="rId3"/>
     <p:sldId id="301" r:id="rId5"/>
-    <p:sldId id="300" r:id="rId6"/>
-    <p:sldId id="299" r:id="rId7"/>
+    <p:sldId id="302" r:id="rId6"/>
+    <p:sldId id="300" r:id="rId7"/>
+    <p:sldId id="303" r:id="rId8"/>
+    <p:sldId id="299" r:id="rId9"/>
   </p:sldIdLst>
   <p:sldSz cx="9144000" cy="6858000"/>
   <p:notesSz cx="6858000" cy="9144000"/>
@@ -443,6 +445,134 @@
 </file>
 
 <file path=ppt/notesSlides/notesSlide4.xml><?xml version="1.0" encoding="utf-8"?>
+<p:notes xmlns:a="http://schemas.openxmlformats.org/drawingml/2006/main" xmlns:r="http://schemas.openxmlformats.org/officeDocument/2006/relationships" xmlns:p="http://schemas.openxmlformats.org/presentationml/2006/main">
+  <p:cSld>
+    <p:spTree>
+      <p:nvGrpSpPr>
+        <p:cNvPr id="1" name=""/>
+        <p:cNvGrpSpPr/>
+        <p:nvPr/>
+      </p:nvGrpSpPr>
+      <p:grpSpPr/>
+      <p:sp>
+        <p:nvSpPr>
+          <p:cNvPr id="2" name="Slide Image Placeholder 1"/>
+          <p:cNvSpPr>
+            <a:spLocks noGrp="1"/>
+          </p:cNvSpPr>
+          <p:nvPr>
+            <p:ph type="sldImg"/>
+          </p:nvPr>
+        </p:nvSpPr>
+        <p:spPr/>
+      </p:sp>
+      <p:sp>
+        <p:nvSpPr>
+          <p:cNvPr id="3" name="Notes Placeholder 2"/>
+          <p:cNvSpPr>
+            <a:spLocks noGrp="1"/>
+          </p:cNvSpPr>
+          <p:nvPr>
+            <p:ph type="body" idx="1"/>
+          </p:nvPr>
+        </p:nvSpPr>
+        <p:spPr/>
+        <p:txBody>
+          <a:bodyPr/>
+          <a:lstStyle/>
+          <a:p/>
+        </p:txBody>
+      </p:sp>
+      <p:sp>
+        <p:nvSpPr>
+          <p:cNvPr id="4" name="Slide Number Placeholder 3"/>
+          <p:cNvSpPr>
+            <a:spLocks noGrp="1"/>
+          </p:cNvSpPr>
+          <p:nvPr>
+            <p:ph type="sldNum" idx="5"/>
+          </p:nvPr>
+        </p:nvSpPr>
+        <p:spPr/>
+        <p:txBody>
+          <a:bodyPr/>
+          <a:lstStyle/>
+          <a:p/>
+        </p:txBody>
+      </p:sp>
+    </p:spTree>
+  </p:cSld>
+  <p:clrMapOvr>
+    <a:masterClrMapping/>
+  </p:clrMapOvr>
+</p:notes>
+</file>
+
+<file path=ppt/notesSlides/notesSlide5.xml><?xml version="1.0" encoding="utf-8"?>
+<p:notes xmlns:a="http://schemas.openxmlformats.org/drawingml/2006/main" xmlns:r="http://schemas.openxmlformats.org/officeDocument/2006/relationships" xmlns:p="http://schemas.openxmlformats.org/presentationml/2006/main">
+  <p:cSld>
+    <p:spTree>
+      <p:nvGrpSpPr>
+        <p:cNvPr id="1" name=""/>
+        <p:cNvGrpSpPr/>
+        <p:nvPr/>
+      </p:nvGrpSpPr>
+      <p:grpSpPr/>
+      <p:sp>
+        <p:nvSpPr>
+          <p:cNvPr id="2" name="Slide Image Placeholder 1"/>
+          <p:cNvSpPr>
+            <a:spLocks noGrp="1"/>
+          </p:cNvSpPr>
+          <p:nvPr>
+            <p:ph type="sldImg"/>
+          </p:nvPr>
+        </p:nvSpPr>
+        <p:spPr/>
+      </p:sp>
+      <p:sp>
+        <p:nvSpPr>
+          <p:cNvPr id="3" name="Notes Placeholder 2"/>
+          <p:cNvSpPr>
+            <a:spLocks noGrp="1"/>
+          </p:cNvSpPr>
+          <p:nvPr>
+            <p:ph type="body" idx="1"/>
+          </p:nvPr>
+        </p:nvSpPr>
+        <p:spPr/>
+        <p:txBody>
+          <a:bodyPr/>
+          <a:lstStyle/>
+          <a:p/>
+        </p:txBody>
+      </p:sp>
+      <p:sp>
+        <p:nvSpPr>
+          <p:cNvPr id="4" name="Slide Number Placeholder 3"/>
+          <p:cNvSpPr>
+            <a:spLocks noGrp="1"/>
+          </p:cNvSpPr>
+          <p:nvPr>
+            <p:ph type="sldNum" idx="5"/>
+          </p:nvPr>
+        </p:nvSpPr>
+        <p:spPr/>
+        <p:txBody>
+          <a:bodyPr/>
+          <a:lstStyle/>
+          <a:p/>
+        </p:txBody>
+      </p:sp>
+    </p:spTree>
+  </p:cSld>
+  <p:clrMapOvr>
+    <a:masterClrMapping/>
+  </p:clrMapOvr>
+</p:notes>
+</file>
+
+<file path=ppt/notesSlides/notesSlide6.xml><?xml version="1.0" encoding="utf-8"?>
 <p:notes xmlns:a="http://schemas.openxmlformats.org/drawingml/2006/main" xmlns:r="http://schemas.openxmlformats.org/officeDocument/2006/relationships" xmlns:p="http://schemas.openxmlformats.org/presentationml/2006/main">
   <p:cSld>
     <p:spTree>
@@ -3478,7 +3608,7 @@
         </p:nvGrpSpPr>
         <p:grpSpPr>
           <a:xfrm>
-            <a:off x="1148080" y="1148715"/>
+            <a:off x="1101725" y="1490980"/>
             <a:ext cx="1868170" cy="1159510"/>
             <a:chOff x="4230" y="2456"/>
             <a:chExt cx="2942" cy="1826"/>
@@ -3572,106 +3702,6 @@
           </p:style>
         </p:cxnSp>
       </p:grpSp>
-      <p:grpSp>
-        <p:nvGrpSpPr>
-          <p:cNvPr id="17" name="组合 16"/>
-          <p:cNvGrpSpPr/>
-          <p:nvPr/>
-        </p:nvGrpSpPr>
-        <p:grpSpPr>
-          <a:xfrm>
-            <a:off x="991870" y="1999615"/>
-            <a:ext cx="1906905" cy="1159510"/>
-            <a:chOff x="3630" y="4675"/>
-            <a:chExt cx="3003" cy="1826"/>
-          </a:xfrm>
-        </p:grpSpPr>
-        <p:sp>
-          <p:nvSpPr>
-            <p:cNvPr id="18" name="Google Shape;4859;p44"/>
-            <p:cNvSpPr/>
-            <p:nvPr/>
-          </p:nvSpPr>
-          <p:spPr>
-            <a:xfrm>
-              <a:off x="3630" y="4675"/>
-              <a:ext cx="2107" cy="1826"/>
-            </a:xfrm>
-            <a:prstGeom prst="cube">
-              <a:avLst>
-                <a:gd name="adj" fmla="val 8683"/>
-              </a:avLst>
-            </a:prstGeom>
-            <a:solidFill>
-              <a:schemeClr val="accent6">
-                <a:lumMod val="60000"/>
-                <a:lumOff val="40000"/>
-              </a:schemeClr>
-            </a:solidFill>
-            <a:ln w="9525" cap="flat" cmpd="sng">
-              <a:noFill/>
-              <a:prstDash val="solid"/>
-              <a:round/>
-              <a:headEnd type="none" w="sm" len="sm"/>
-              <a:tailEnd type="none" w="sm" len="sm"/>
-            </a:ln>
-          </p:spPr>
-          <p:txBody>
-            <a:bodyPr spcFirstLastPara="1" wrap="square" lIns="121900" tIns="121900" rIns="121900" bIns="121900" anchor="ctr" anchorCtr="0">
-              <a:noAutofit/>
-            </a:bodyPr>
-            <a:lstStyle/>
-            <a:p>
-              <a:pPr marL="0" lvl="0" indent="0" algn="l" rtl="0">
-                <a:spcBef>
-                  <a:spcPts val="0"/>
-                </a:spcBef>
-                <a:spcAft>
-                  <a:spcPts val="0"/>
-                </a:spcAft>
-                <a:buNone/>
-              </a:pPr>
-              <a:endParaRPr sz="2400"/>
-            </a:p>
-          </p:txBody>
-        </p:sp>
-        <p:cxnSp>
-          <p:nvCxnSpPr>
-            <p:cNvPr id="19" name="直接箭头连接符 18"/>
-            <p:cNvCxnSpPr/>
-            <p:nvPr/>
-          </p:nvCxnSpPr>
-          <p:spPr>
-            <a:xfrm flipV="1">
-              <a:off x="5669" y="5734"/>
-              <a:ext cx="964" cy="12"/>
-            </a:xfrm>
-            <a:prstGeom prst="straightConnector1">
-              <a:avLst/>
-            </a:prstGeom>
-            <a:ln>
-              <a:solidFill>
-                <a:srgbClr val="0E2841"/>
-              </a:solidFill>
-              <a:tailEnd type="arrow"/>
-            </a:ln>
-          </p:spPr>
-          <p:style>
-            <a:lnRef idx="2">
-              <a:schemeClr val="accent1"/>
-            </a:lnRef>
-            <a:fillRef idx="0">
-              <a:schemeClr val="accent1"/>
-            </a:fillRef>
-            <a:effectRef idx="1">
-              <a:schemeClr val="accent1"/>
-            </a:effectRef>
-            <a:fontRef idx="minor">
-              <a:schemeClr val="tx1"/>
-            </a:fontRef>
-          </p:style>
-        </p:cxnSp>
-      </p:grpSp>
       <p:cxnSp>
         <p:nvCxnSpPr>
           <p:cNvPr id="24" name="直接箭头连接符 23"/>
@@ -3710,13 +3740,13 @@
       </p:cxnSp>
       <p:sp>
         <p:nvSpPr>
-          <p:cNvPr id="25" name="文本框 24"/>
+          <p:cNvPr id="27" name="文本框 26"/>
           <p:cNvSpPr txBox="1"/>
           <p:nvPr/>
         </p:nvSpPr>
         <p:spPr>
           <a:xfrm>
-            <a:off x="948055" y="2753360"/>
+            <a:off x="1055370" y="1656715"/>
             <a:ext cx="1338580" cy="337185"/>
           </a:xfrm>
           <a:prstGeom prst="rect">
@@ -3736,45 +3766,7 @@
                 <a:cs typeface="Times New Roman" panose="02020603050405020304" charset="0"/>
                 <a:sym typeface="+mn-ea"/>
               </a:rPr>
-              <a:t>Acceleration</a:t>
-            </a:r>
-            <a:endParaRPr lang="en-US" altLang="zh-CN" sz="1600" b="1">
-              <a:latin typeface="Times New Roman" panose="02020603050405020304" charset="0"/>
-              <a:cs typeface="Times New Roman" panose="02020603050405020304" charset="0"/>
-              <a:sym typeface="+mn-ea"/>
-            </a:endParaRPr>
-          </a:p>
-        </p:txBody>
-      </p:sp>
-      <p:sp>
-        <p:nvSpPr>
-          <p:cNvPr id="27" name="文本框 26"/>
-          <p:cNvSpPr txBox="1"/>
-          <p:nvPr/>
-        </p:nvSpPr>
-        <p:spPr>
-          <a:xfrm>
-            <a:off x="1101725" y="1314450"/>
-            <a:ext cx="1338580" cy="337185"/>
-          </a:xfrm>
-          <a:prstGeom prst="rect">
-            <a:avLst/>
-          </a:prstGeom>
-          <a:noFill/>
-        </p:spPr>
-        <p:txBody>
-          <a:bodyPr wrap="square" rtlCol="0">
-            <a:spAutoFit/>
-          </a:bodyPr>
-          <a:p>
-            <a:pPr algn="ctr"/>
-            <a:r>
-              <a:rPr lang="en-US" altLang="zh-CN" sz="1600" b="1">
-                <a:latin typeface="Times New Roman" panose="02020603050405020304" charset="0"/>
-                <a:cs typeface="Times New Roman" panose="02020603050405020304" charset="0"/>
-                <a:sym typeface="+mn-ea"/>
-              </a:rPr>
-              <a:t>Object Size</a:t>
+              <a:t>Distance</a:t>
             </a:r>
             <a:endParaRPr lang="en-US" altLang="zh-CN" sz="1600" b="1">
               <a:latin typeface="Times New Roman" panose="02020603050405020304" charset="0"/>
@@ -5713,7 +5705,7 @@
         </p:nvSpPr>
         <p:spPr>
           <a:xfrm>
-            <a:off x="3118485" y="5787708"/>
+            <a:off x="4620895" y="5733098"/>
             <a:ext cx="5080000" cy="337185"/>
           </a:xfrm>
           <a:prstGeom prst="rect">
@@ -5757,6 +5749,313 @@
 </file>
 
 <file path=ppt/slides/slide3.xml><?xml version="1.0" encoding="utf-8"?>
+<p:sld xmlns:a="http://schemas.openxmlformats.org/drawingml/2006/main" xmlns:r="http://schemas.openxmlformats.org/officeDocument/2006/relationships" xmlns:p="http://schemas.openxmlformats.org/presentationml/2006/main">
+  <p:cSld>
+    <p:spTree>
+      <p:nvGrpSpPr>
+        <p:cNvPr id="1" name=""/>
+        <p:cNvGrpSpPr/>
+        <p:nvPr/>
+      </p:nvGrpSpPr>
+      <p:grpSpPr/>
+      <p:sp>
+        <p:nvSpPr>
+          <p:cNvPr id="6" name="文本框 5"/>
+          <p:cNvSpPr>
+            <a:spLocks noGrp="1"/>
+          </p:cNvSpPr>
+          <p:nvPr/>
+        </p:nvSpPr>
+        <p:spPr>
+          <a:xfrm>
+            <a:off x="275590" y="226695"/>
+            <a:ext cx="8522970" cy="583565"/>
+          </a:xfrm>
+          <a:prstGeom prst="rect">
+            <a:avLst/>
+          </a:prstGeom>
+          <a:noFill/>
+        </p:spPr>
+        <p:txBody>
+          <a:bodyPr wrap="square">
+            <a:spAutoFit/>
+          </a:bodyPr>
+          <a:lstStyle/>
+          <a:p>
+            <a:r>
+              <a:rPr lang="en-US" altLang="zh-CN" sz="3200" b="1">
+                <a:latin typeface="Times New Roman" panose="02020603050405020304"/>
+                <a:ea typeface="Times New Roman" panose="02020603050405020304"/>
+                <a:cs typeface="Times New Roman" panose="02020603050405020304"/>
+              </a:rPr>
+              <a:t>Trail</a:t>
+            </a:r>
+            <a:endParaRPr lang="en-US" altLang="zh-CN" sz="3200" b="1">
+              <a:latin typeface="Times New Roman" panose="02020603050405020304"/>
+              <a:ea typeface="Times New Roman" panose="02020603050405020304"/>
+              <a:cs typeface="Times New Roman" panose="02020603050405020304"/>
+            </a:endParaRPr>
+          </a:p>
+        </p:txBody>
+      </p:sp>
+      <p:pic>
+        <p:nvPicPr>
+          <p:cNvPr id="10" name="grasp_video">
+            <a:hlinkClick r:id="" action="ppaction://media"/>
+          </p:cNvPr>
+          <p:cNvPicPr/>
+          <p:nvPr>
+            <a:videoFile r:link="rId1"/>
+            <p:extLst>
+              <p:ext uri="{DAA4B4D4-6D71-4841-9C94-3DE7FCFB9230}">
+                <p14:media xmlns:p14="http://schemas.microsoft.com/office/powerpoint/2010/main" r:embed="rId2"/>
+              </p:ext>
+            </p:extLst>
+          </p:nvPr>
+        </p:nvPicPr>
+        <p:blipFill>
+          <a:blip r:embed="rId3"/>
+          <a:stretch>
+            <a:fillRect/>
+          </a:stretch>
+        </p:blipFill>
+        <p:spPr>
+          <a:xfrm>
+            <a:off x="2197100" y="2560320"/>
+            <a:ext cx="4876800" cy="3657600"/>
+          </a:xfrm>
+          <a:prstGeom prst="rect">
+            <a:avLst/>
+          </a:prstGeom>
+        </p:spPr>
+      </p:pic>
+    </p:spTree>
+  </p:cSld>
+  <p:clrMapOvr>
+    <a:masterClrMapping/>
+  </p:clrMapOvr>
+  <p:timing>
+    <p:tnLst>
+      <p:par>
+        <p:cTn id="1" dur="indefinite" restart="never" nodeType="tmRoot">
+          <p:childTnLst>
+            <p:video fullScrn="0">
+              <p:cMediaNode>
+                <p:cTn id="2" fill="hold" display="1">
+                  <p:stCondLst>
+                    <p:cond delay="indefinite"/>
+                  </p:stCondLst>
+                </p:cTn>
+                <p:tgtEl>
+                  <p:spTgt spid="10"/>
+                </p:tgtEl>
+              </p:cMediaNode>
+            </p:video>
+            <p:seq concurrent="1" nextAc="seek">
+              <p:cTn id="3" restart="whenNotActive" fill="hold" evtFilter="cancelBubble" nodeType="interactiveSeq">
+                <p:stCondLst>
+                  <p:cond evt="onClick" delay="0">
+                    <p:tgtEl>
+                      <p:spTgt spid="10"/>
+                    </p:tgtEl>
+                  </p:cond>
+                </p:stCondLst>
+                <p:endSync evt="end" delay="0">
+                  <p:rtn val="all"/>
+                </p:endSync>
+                <p:childTnLst>
+                  <p:par>
+                    <p:cTn id="4" fill="hold">
+                      <p:stCondLst>
+                        <p:cond delay="0"/>
+                      </p:stCondLst>
+                      <p:childTnLst>
+                        <p:par>
+                          <p:cTn id="5" fill="hold">
+                            <p:stCondLst>
+                              <p:cond delay="0"/>
+                            </p:stCondLst>
+                            <p:childTnLst>
+                              <p:par>
+                                <p:cTn id="6" presetID="2" presetClass="mediacall" presetSubtype="0" fill="hold" nodeType="clickEffect">
+                                  <p:stCondLst>
+                                    <p:cond delay="0"/>
+                                  </p:stCondLst>
+                                  <p:childTnLst>
+                                    <p:cmd type="call" cmd="togglePause">
+                                      <p:cBhvr additive="base">
+                                        <p:cTn id="7" dur="1" fill="hold"/>
+                                        <p:tgtEl>
+                                          <p:spTgt spid="10"/>
+                                        </p:tgtEl>
+                                      </p:cBhvr>
+                                    </p:cmd>
+                                  </p:childTnLst>
+                                </p:cTn>
+                              </p:par>
+                            </p:childTnLst>
+                          </p:cTn>
+                        </p:par>
+                      </p:childTnLst>
+                    </p:cTn>
+                  </p:par>
+                </p:childTnLst>
+              </p:cTn>
+              <p:nextCondLst>
+                <p:cond evt="onClick" delay="0">
+                  <p:tgtEl>
+                    <p:spTgt spid="10"/>
+                  </p:tgtEl>
+                </p:cond>
+              </p:nextCondLst>
+            </p:seq>
+          </p:childTnLst>
+        </p:cTn>
+      </p:par>
+    </p:tnLst>
+  </p:timing>
+</p:sld>
+</file>
+
+<file path=ppt/slides/slide4.xml><?xml version="1.0" encoding="utf-8"?>
+<p:sld xmlns:a="http://schemas.openxmlformats.org/drawingml/2006/main" xmlns:r="http://schemas.openxmlformats.org/officeDocument/2006/relationships" xmlns:p="http://schemas.openxmlformats.org/presentationml/2006/main">
+  <p:cSld>
+    <p:spTree>
+      <p:nvGrpSpPr>
+        <p:cNvPr id="1" name=""/>
+        <p:cNvGrpSpPr/>
+        <p:nvPr/>
+      </p:nvGrpSpPr>
+      <p:grpSpPr/>
+      <p:sp>
+        <p:nvSpPr>
+          <p:cNvPr id="6" name="文本框 5"/>
+          <p:cNvSpPr>
+            <a:spLocks noGrp="1"/>
+          </p:cNvSpPr>
+          <p:nvPr/>
+        </p:nvSpPr>
+        <p:spPr>
+          <a:xfrm>
+            <a:off x="275590" y="226695"/>
+            <a:ext cx="8522970" cy="583565"/>
+          </a:xfrm>
+          <a:prstGeom prst="rect">
+            <a:avLst/>
+          </a:prstGeom>
+          <a:noFill/>
+        </p:spPr>
+        <p:txBody>
+          <a:bodyPr wrap="square">
+            <a:spAutoFit/>
+          </a:bodyPr>
+          <a:lstStyle/>
+          <a:p>
+            <a:r>
+              <a:rPr lang="en-US" altLang="zh-CN" sz="3200" b="1">
+                <a:latin typeface="Times New Roman" panose="02020603050405020304"/>
+                <a:ea typeface="Times New Roman" panose="02020603050405020304"/>
+                <a:cs typeface="Times New Roman" panose="02020603050405020304"/>
+                <a:sym typeface="+mn-ea"/>
+              </a:rPr>
+              <a:t>Offline Validation</a:t>
+            </a:r>
+            <a:endParaRPr lang="en-US" altLang="zh-CN" sz="3200" b="1">
+              <a:latin typeface="Times New Roman" panose="02020603050405020304"/>
+              <a:ea typeface="Times New Roman" panose="02020603050405020304"/>
+              <a:cs typeface="Times New Roman" panose="02020603050405020304"/>
+            </a:endParaRPr>
+          </a:p>
+        </p:txBody>
+      </p:sp>
+      <p:pic>
+        <p:nvPicPr>
+          <p:cNvPr id="2" name="图片 1" descr="validation_metrics_chart"/>
+          <p:cNvPicPr>
+            <a:picLocks noChangeAspect="1"/>
+          </p:cNvPicPr>
+          <p:nvPr/>
+        </p:nvPicPr>
+        <p:blipFill>
+          <a:blip r:embed="rId1"/>
+          <a:stretch>
+            <a:fillRect/>
+          </a:stretch>
+        </p:blipFill>
+        <p:spPr>
+          <a:xfrm>
+            <a:off x="0" y="1306195"/>
+            <a:ext cx="9144000" cy="4244975"/>
+          </a:xfrm>
+          <a:prstGeom prst="rect">
+            <a:avLst/>
+          </a:prstGeom>
+        </p:spPr>
+      </p:pic>
+      <p:pic>
+        <p:nvPicPr>
+          <p:cNvPr id="3" name="图片 2" descr="validation_model_comparison"/>
+          <p:cNvPicPr>
+            <a:picLocks noChangeAspect="1"/>
+          </p:cNvPicPr>
+          <p:nvPr/>
+        </p:nvPicPr>
+        <p:blipFill>
+          <a:blip r:embed="rId2"/>
+          <a:stretch>
+            <a:fillRect/>
+          </a:stretch>
+        </p:blipFill>
+        <p:spPr>
+          <a:xfrm>
+            <a:off x="0" y="1799590"/>
+            <a:ext cx="9144000" cy="3429000"/>
+          </a:xfrm>
+          <a:prstGeom prst="rect">
+            <a:avLst/>
+          </a:prstGeom>
+        </p:spPr>
+      </p:pic>
+      <p:pic>
+        <p:nvPicPr>
+          <p:cNvPr id="4" name="图片 3" descr="validation_phase_errors"/>
+          <p:cNvPicPr>
+            <a:picLocks noChangeAspect="1"/>
+          </p:cNvPicPr>
+          <p:nvPr/>
+        </p:nvPicPr>
+        <p:blipFill>
+          <a:blip r:embed="rId3"/>
+          <a:stretch>
+            <a:fillRect/>
+          </a:stretch>
+        </p:blipFill>
+        <p:spPr>
+          <a:xfrm>
+            <a:off x="-3129915" y="3514090"/>
+            <a:ext cx="7315200" cy="5029200"/>
+          </a:xfrm>
+          <a:prstGeom prst="rect">
+            <a:avLst/>
+          </a:prstGeom>
+        </p:spPr>
+      </p:pic>
+    </p:spTree>
+  </p:cSld>
+  <p:clrMapOvr>
+    <a:masterClrMapping/>
+  </p:clrMapOvr>
+  <p:timing>
+    <p:tnLst>
+      <p:par>
+        <p:cTn id="1" dur="indefinite" restart="never" nodeType="tmRoot"/>
+      </p:par>
+    </p:tnLst>
+  </p:timing>
+</p:sld>
+</file>
+
+<file path=ppt/slides/slide5.xml><?xml version="1.0" encoding="utf-8"?>
 <p:sld xmlns:a="http://schemas.openxmlformats.org/drawingml/2006/main" xmlns:r="http://schemas.openxmlformats.org/officeDocument/2006/relationships" xmlns:p="http://schemas.openxmlformats.org/presentationml/2006/main">
   <p:cSld>
     <p:spTree>
@@ -5846,7 +6145,7 @@
 </p:sld>
 </file>
 
-<file path=ppt/slides/slide4.xml><?xml version="1.0" encoding="utf-8"?>
+<file path=ppt/slides/slide6.xml><?xml version="1.0" encoding="utf-8"?>
 <p:sld xmlns:a="http://schemas.openxmlformats.org/drawingml/2006/main" xmlns:r="http://schemas.openxmlformats.org/officeDocument/2006/relationships" xmlns:p="http://schemas.openxmlformats.org/presentationml/2006/main">
   <p:cSld>
     <p:spTree>

--- a/Report/Report_1019.pptx
+++ b/Report/Report_1019.pptx
@@ -9,11 +9,13 @@
   </p:notesMasterIdLst>
   <p:sldIdLst>
     <p:sldId id="298" r:id="rId3"/>
-    <p:sldId id="301" r:id="rId5"/>
-    <p:sldId id="302" r:id="rId6"/>
-    <p:sldId id="300" r:id="rId7"/>
-    <p:sldId id="303" r:id="rId8"/>
-    <p:sldId id="299" r:id="rId9"/>
+    <p:sldId id="304" r:id="rId5"/>
+    <p:sldId id="305" r:id="rId6"/>
+    <p:sldId id="301" r:id="rId7"/>
+    <p:sldId id="302" r:id="rId8"/>
+    <p:sldId id="300" r:id="rId9"/>
+    <p:sldId id="303" r:id="rId10"/>
+    <p:sldId id="299" r:id="rId11"/>
   </p:sldIdLst>
   <p:sldSz cx="9144000" cy="6858000"/>
   <p:notesSz cx="6858000" cy="9144000"/>
@@ -573,6 +575,134 @@
 </file>
 
 <file path=ppt/notesSlides/notesSlide6.xml><?xml version="1.0" encoding="utf-8"?>
+<p:notes xmlns:a="http://schemas.openxmlformats.org/drawingml/2006/main" xmlns:r="http://schemas.openxmlformats.org/officeDocument/2006/relationships" xmlns:p="http://schemas.openxmlformats.org/presentationml/2006/main">
+  <p:cSld>
+    <p:spTree>
+      <p:nvGrpSpPr>
+        <p:cNvPr id="1" name=""/>
+        <p:cNvGrpSpPr/>
+        <p:nvPr/>
+      </p:nvGrpSpPr>
+      <p:grpSpPr/>
+      <p:sp>
+        <p:nvSpPr>
+          <p:cNvPr id="2" name="Slide Image Placeholder 1"/>
+          <p:cNvSpPr>
+            <a:spLocks noGrp="1"/>
+          </p:cNvSpPr>
+          <p:nvPr>
+            <p:ph type="sldImg"/>
+          </p:nvPr>
+        </p:nvSpPr>
+        <p:spPr/>
+      </p:sp>
+      <p:sp>
+        <p:nvSpPr>
+          <p:cNvPr id="3" name="Notes Placeholder 2"/>
+          <p:cNvSpPr>
+            <a:spLocks noGrp="1"/>
+          </p:cNvSpPr>
+          <p:nvPr>
+            <p:ph type="body" idx="1"/>
+          </p:nvPr>
+        </p:nvSpPr>
+        <p:spPr/>
+        <p:txBody>
+          <a:bodyPr/>
+          <a:lstStyle/>
+          <a:p/>
+        </p:txBody>
+      </p:sp>
+      <p:sp>
+        <p:nvSpPr>
+          <p:cNvPr id="4" name="Slide Number Placeholder 3"/>
+          <p:cNvSpPr>
+            <a:spLocks noGrp="1"/>
+          </p:cNvSpPr>
+          <p:nvPr>
+            <p:ph type="sldNum" idx="5"/>
+          </p:nvPr>
+        </p:nvSpPr>
+        <p:spPr/>
+        <p:txBody>
+          <a:bodyPr/>
+          <a:lstStyle/>
+          <a:p/>
+        </p:txBody>
+      </p:sp>
+    </p:spTree>
+  </p:cSld>
+  <p:clrMapOvr>
+    <a:masterClrMapping/>
+  </p:clrMapOvr>
+</p:notes>
+</file>
+
+<file path=ppt/notesSlides/notesSlide7.xml><?xml version="1.0" encoding="utf-8"?>
+<p:notes xmlns:a="http://schemas.openxmlformats.org/drawingml/2006/main" xmlns:r="http://schemas.openxmlformats.org/officeDocument/2006/relationships" xmlns:p="http://schemas.openxmlformats.org/presentationml/2006/main">
+  <p:cSld>
+    <p:spTree>
+      <p:nvGrpSpPr>
+        <p:cNvPr id="1" name=""/>
+        <p:cNvGrpSpPr/>
+        <p:nvPr/>
+      </p:nvGrpSpPr>
+      <p:grpSpPr/>
+      <p:sp>
+        <p:nvSpPr>
+          <p:cNvPr id="2" name="Slide Image Placeholder 1"/>
+          <p:cNvSpPr>
+            <a:spLocks noGrp="1"/>
+          </p:cNvSpPr>
+          <p:nvPr>
+            <p:ph type="sldImg"/>
+          </p:nvPr>
+        </p:nvSpPr>
+        <p:spPr/>
+      </p:sp>
+      <p:sp>
+        <p:nvSpPr>
+          <p:cNvPr id="3" name="Notes Placeholder 2"/>
+          <p:cNvSpPr>
+            <a:spLocks noGrp="1"/>
+          </p:cNvSpPr>
+          <p:nvPr>
+            <p:ph type="body" idx="1"/>
+          </p:nvPr>
+        </p:nvSpPr>
+        <p:spPr/>
+        <p:txBody>
+          <a:bodyPr/>
+          <a:lstStyle/>
+          <a:p/>
+        </p:txBody>
+      </p:sp>
+      <p:sp>
+        <p:nvSpPr>
+          <p:cNvPr id="4" name="Slide Number Placeholder 3"/>
+          <p:cNvSpPr>
+            <a:spLocks noGrp="1"/>
+          </p:cNvSpPr>
+          <p:nvPr>
+            <p:ph type="sldNum" idx="5"/>
+          </p:nvPr>
+        </p:nvSpPr>
+        <p:spPr/>
+        <p:txBody>
+          <a:bodyPr/>
+          <a:lstStyle/>
+          <a:p/>
+        </p:txBody>
+      </p:sp>
+    </p:spTree>
+  </p:cSld>
+  <p:clrMapOvr>
+    <a:masterClrMapping/>
+  </p:clrMapOvr>
+</p:notes>
+</file>
+
+<file path=ppt/notesSlides/notesSlide8.xml><?xml version="1.0" encoding="utf-8"?>
 <p:notes xmlns:a="http://schemas.openxmlformats.org/drawingml/2006/main" xmlns:r="http://schemas.openxmlformats.org/officeDocument/2006/relationships" xmlns:p="http://schemas.openxmlformats.org/presentationml/2006/main">
   <p:cSld>
     <p:spTree>
@@ -3519,18 +3649,190 @@
           <a:lstStyle/>
           <a:p>
             <a:r>
-              <a:rPr lang="en-US" altLang="zh-CN" sz="3200" b="1">
+              <a:rPr lang="zh-CN" altLang="en-US" sz="3200" b="1">
                 <a:latin typeface="Times New Roman" panose="02020603050405020304"/>
-                <a:ea typeface="Times New Roman" panose="02020603050405020304"/>
+                <a:ea typeface="宋体" panose="02010600030101010101" pitchFamily="2" charset="-122"/>
                 <a:cs typeface="Times New Roman" panose="02020603050405020304"/>
                 <a:sym typeface="+mn-ea"/>
               </a:rPr>
-              <a:t>Real-Time Experiment</a:t>
-            </a:r>
-            <a:endParaRPr lang="en-US" altLang="zh-CN" sz="3200" b="1">
+              <a:t>消息</a:t>
+            </a:r>
+            <a:endParaRPr lang="zh-CN" altLang="en-US" sz="3200" b="1">
               <a:latin typeface="Times New Roman" panose="02020603050405020304"/>
-              <a:ea typeface="Times New Roman" panose="02020603050405020304"/>
+              <a:ea typeface="宋体" panose="02010600030101010101" pitchFamily="2" charset="-122"/>
               <a:cs typeface="Times New Roman" panose="02020603050405020304"/>
+              <a:sym typeface="+mn-ea"/>
+            </a:endParaRPr>
+          </a:p>
+        </p:txBody>
+      </p:sp>
+      <p:sp>
+        <p:nvSpPr>
+          <p:cNvPr id="2" name="文本框 1"/>
+          <p:cNvSpPr txBox="1"/>
+          <p:nvPr/>
+        </p:nvSpPr>
+        <p:spPr>
+          <a:xfrm>
+            <a:off x="275590" y="1167130"/>
+            <a:ext cx="8354060" cy="3692525"/>
+          </a:xfrm>
+          <a:prstGeom prst="rect">
+            <a:avLst/>
+          </a:prstGeom>
+          <a:noFill/>
+        </p:spPr>
+        <p:txBody>
+          <a:bodyPr wrap="square" rtlCol="0" anchor="t">
+            <a:spAutoFit/>
+          </a:bodyPr>
+          <a:p>
+            <a:r>
+              <a:rPr lang="zh-CN" altLang="en-US"/>
+              <a:t>老师早上好</a:t>
+            </a:r>
+            <a:endParaRPr lang="zh-CN" altLang="en-US"/>
+          </a:p>
+          <a:p>
+            <a:r>
+              <a:rPr lang="zh-CN" altLang="en-US"/>
+              <a:t>根据老师的建议，我做了一个系统。进行了离线测试和实时测试。预测效果有了很大提升。</a:t>
+            </a:r>
+            <a:endParaRPr lang="zh-CN" altLang="en-US"/>
+          </a:p>
+          <a:p>
+            <a:r>
+              <a:rPr lang="zh-CN" altLang="en-US"/>
+              <a:t>我对3个不同颜色大小的方块（方块目前稳定）进行抓取，训练了三个模型。训练数据使用30组。</a:t>
+            </a:r>
+            <a:endParaRPr lang="zh-CN" altLang="en-US"/>
+          </a:p>
+          <a:p>
+            <a:r>
+              <a:rPr lang="zh-CN" altLang="en-US"/>
+              <a:t>离线测试数据使用9组，平均</a:t>
+            </a:r>
+            <a:r>
+              <a:rPr lang="en-US" altLang="zh-CN"/>
+              <a:t>RMSE</a:t>
+            </a:r>
+            <a:r>
+              <a:rPr lang="zh-CN" altLang="en-US"/>
+              <a:t>是，</a:t>
+            </a:r>
+            <a:r>
+              <a:rPr lang="en-US" altLang="zh-CN"/>
+              <a:t>R2</a:t>
+            </a:r>
+            <a:r>
+              <a:rPr lang="zh-CN" altLang="en-US"/>
+              <a:t>是</a:t>
+            </a:r>
+            <a:endParaRPr lang="zh-CN" altLang="en-US"/>
+          </a:p>
+          <a:p>
+            <a:r>
+              <a:rPr lang="zh-CN" altLang="en-US"/>
+              <a:t>实时测试为三种颜色随机各抓取三次，结果为平均</a:t>
+            </a:r>
+            <a:r>
+              <a:rPr lang="en-US" altLang="zh-CN"/>
+              <a:t>RMSE</a:t>
+            </a:r>
+            <a:r>
+              <a:rPr lang="zh-CN" altLang="en-US"/>
+              <a:t>是，</a:t>
+            </a:r>
+            <a:r>
+              <a:rPr lang="en-US" altLang="zh-CN"/>
+              <a:t>R2</a:t>
+            </a:r>
+            <a:r>
+              <a:rPr lang="zh-CN" altLang="en-US"/>
+              <a:t>是</a:t>
+            </a:r>
+            <a:endParaRPr lang="zh-CN" altLang="en-US"/>
+          </a:p>
+          <a:p>
+            <a:endParaRPr lang="en-US" altLang="zh-CN"/>
+          </a:p>
+          <a:p>
+            <a:r>
+              <a:rPr lang="zh-CN" altLang="en-US"/>
+              <a:t>邀请了另一名参与者，但因为程序</a:t>
+            </a:r>
+            <a:r>
+              <a:rPr lang="en-US" altLang="zh-CN"/>
+              <a:t>Bug</a:t>
+            </a:r>
+            <a:r>
+              <a:rPr lang="zh-CN" altLang="en-US"/>
+              <a:t>没做完完整测试。</a:t>
+            </a:r>
+            <a:endParaRPr lang="zh-CN" altLang="en-US"/>
+          </a:p>
+          <a:p>
+            <a:r>
+              <a:rPr lang="zh-CN" altLang="en-US"/>
+              <a:t>进行了蓝色和黑色两个方块的抓取，训练了两个模型，训练数据使用30组。</a:t>
+            </a:r>
+            <a:endParaRPr lang="zh-CN" altLang="en-US"/>
+          </a:p>
+          <a:p>
+            <a:r>
+              <a:rPr lang="zh-CN" altLang="en-US"/>
+              <a:t>离线测试数据使用9组，</a:t>
+            </a:r>
+            <a:r>
+              <a:rPr lang="en-US" altLang="zh-CN"/>
+              <a:t>MAE</a:t>
+            </a:r>
+            <a:r>
+              <a:rPr lang="zh-CN" altLang="en-US"/>
+              <a:t>是2.38，</a:t>
+            </a:r>
+            <a:r>
+              <a:rPr lang="en-US" altLang="zh-CN"/>
+              <a:t>RMSE</a:t>
+            </a:r>
+            <a:r>
+              <a:rPr lang="zh-CN" altLang="en-US"/>
+              <a:t>是3.15，</a:t>
+            </a:r>
+            <a:r>
+              <a:rPr lang="en-US" altLang="zh-CN"/>
+              <a:t>R2</a:t>
+            </a:r>
+            <a:r>
+              <a:rPr lang="zh-CN" altLang="en-US"/>
+              <a:t>是0.921</a:t>
+            </a:r>
+            <a:endParaRPr lang="zh-CN" altLang="en-US"/>
+          </a:p>
+          <a:p>
+            <a:endParaRPr lang="zh-CN" altLang="en-US"/>
+          </a:p>
+          <a:p>
+            <a:r>
+              <a:rPr lang="zh-CN" altLang="en-US">
+                <a:ea typeface="宋体" panose="02010600030101010101" pitchFamily="2" charset="-122"/>
+              </a:rPr>
+              <a:t>这是报告，请原谅</a:t>
+            </a:r>
+            <a:r>
+              <a:rPr lang="en-US" altLang="zh-CN">
+                <a:ea typeface="宋体" panose="02010600030101010101" pitchFamily="2" charset="-122"/>
+              </a:rPr>
+              <a:t>Slide</a:t>
+            </a:r>
+            <a:r>
+              <a:rPr lang="zh-CN" altLang="en-US">
+                <a:ea typeface="宋体" panose="02010600030101010101" pitchFamily="2" charset="-122"/>
+              </a:rPr>
+              <a:t>如此简陋。</a:t>
+            </a:r>
+            <a:endParaRPr lang="zh-CN" altLang="en-US">
+              <a:ea typeface="宋体" panose="02010600030101010101" pitchFamily="2" charset="-122"/>
             </a:endParaRPr>
           </a:p>
         </p:txBody>
@@ -3551,6 +3853,831 @@
 </file>
 
 <file path=ppt/slides/slide2.xml><?xml version="1.0" encoding="utf-8"?>
+<p:sld xmlns:a="http://schemas.openxmlformats.org/drawingml/2006/main" xmlns:r="http://schemas.openxmlformats.org/officeDocument/2006/relationships" xmlns:p="http://schemas.openxmlformats.org/presentationml/2006/main">
+  <p:cSld>
+    <p:spTree>
+      <p:nvGrpSpPr>
+        <p:cNvPr id="1" name=""/>
+        <p:cNvGrpSpPr/>
+        <p:nvPr/>
+      </p:nvGrpSpPr>
+      <p:grpSpPr/>
+      <p:sp>
+        <p:nvSpPr>
+          <p:cNvPr id="6" name="文本框 5"/>
+          <p:cNvSpPr>
+            <a:spLocks noGrp="1"/>
+          </p:cNvSpPr>
+          <p:nvPr/>
+        </p:nvSpPr>
+        <p:spPr>
+          <a:xfrm>
+            <a:off x="275590" y="226695"/>
+            <a:ext cx="8522970" cy="583565"/>
+          </a:xfrm>
+          <a:prstGeom prst="rect">
+            <a:avLst/>
+          </a:prstGeom>
+          <a:noFill/>
+        </p:spPr>
+        <p:txBody>
+          <a:bodyPr wrap="square">
+            <a:spAutoFit/>
+          </a:bodyPr>
+          <a:lstStyle/>
+          <a:p>
+            <a:r>
+              <a:rPr lang="zh-CN" altLang="en-US" sz="3200" b="1">
+                <a:latin typeface="Times New Roman" panose="02020603050405020304"/>
+                <a:ea typeface="宋体" panose="02010600030101010101" pitchFamily="2" charset="-122"/>
+                <a:cs typeface="Times New Roman" panose="02020603050405020304"/>
+                <a:sym typeface="+mn-ea"/>
+              </a:rPr>
+              <a:t>实验环境</a:t>
+            </a:r>
+            <a:endParaRPr lang="zh-CN" altLang="en-US" sz="3200" b="1">
+              <a:latin typeface="Times New Roman" panose="02020603050405020304"/>
+              <a:ea typeface="宋体" panose="02010600030101010101" pitchFamily="2" charset="-122"/>
+              <a:cs typeface="Times New Roman" panose="02020603050405020304"/>
+              <a:sym typeface="+mn-ea"/>
+            </a:endParaRPr>
+          </a:p>
+        </p:txBody>
+      </p:sp>
+      <p:pic>
+        <p:nvPicPr>
+          <p:cNvPr id="4" name="图片 3"/>
+          <p:cNvPicPr>
+            <a:picLocks noChangeAspect="1"/>
+          </p:cNvPicPr>
+          <p:nvPr/>
+        </p:nvPicPr>
+        <p:blipFill>
+          <a:blip r:embed="rId1"/>
+          <a:srcRect l="2579" t="15949" b="21628"/>
+          <a:stretch>
+            <a:fillRect/>
+          </a:stretch>
+        </p:blipFill>
+        <p:spPr>
+          <a:xfrm>
+            <a:off x="1751965" y="1661160"/>
+            <a:ext cx="4189095" cy="4771390"/>
+          </a:xfrm>
+          <a:prstGeom prst="rect">
+            <a:avLst/>
+          </a:prstGeom>
+        </p:spPr>
+      </p:pic>
+      <p:sp>
+        <p:nvSpPr>
+          <p:cNvPr id="8" name="任意多边形 7"/>
+          <p:cNvSpPr/>
+          <p:nvPr/>
+        </p:nvSpPr>
+        <p:spPr>
+          <a:xfrm>
+            <a:off x="981075" y="5373370"/>
+            <a:ext cx="2232000" cy="10795"/>
+          </a:xfrm>
+          <a:custGeom>
+            <a:avLst/>
+            <a:gdLst>
+              <a:gd name="connisteX0" fmla="*/ 2532380 w 2532380"/>
+              <a:gd name="connsiteY0" fmla="*/ 0 h 10795"/>
+              <a:gd name="connisteX1" fmla="*/ 0 w 2532380"/>
+              <a:gd name="connsiteY1" fmla="*/ 10795 h 10795"/>
+            </a:gdLst>
+            <a:ahLst/>
+            <a:cxnLst>
+              <a:cxn ang="0">
+                <a:pos x="connisteX0" y="connsiteY0"/>
+              </a:cxn>
+              <a:cxn ang="0">
+                <a:pos x="connisteX1" y="connsiteY1"/>
+              </a:cxn>
+            </a:cxnLst>
+            <a:rect l="l" t="t" r="r" b="b"/>
+            <a:pathLst>
+              <a:path w="2532380" h="10795">
+                <a:moveTo>
+                  <a:pt x="2532380" y="0"/>
+                </a:moveTo>
+                <a:lnTo>
+                  <a:pt x="0" y="10795"/>
+                </a:lnTo>
+              </a:path>
+            </a:pathLst>
+          </a:custGeom>
+          <a:noFill/>
+          <a:ln>
+            <a:solidFill>
+              <a:schemeClr val="tx1">
+                <a:lumMod val="85000"/>
+                <a:lumOff val="15000"/>
+              </a:schemeClr>
+            </a:solidFill>
+            <a:tailEnd type="oval"/>
+          </a:ln>
+        </p:spPr>
+        <p:style>
+          <a:lnRef idx="2">
+            <a:schemeClr val="accent1">
+              <a:lumMod val="75000"/>
+            </a:schemeClr>
+          </a:lnRef>
+          <a:fillRef idx="1">
+            <a:schemeClr val="accent1"/>
+          </a:fillRef>
+          <a:effectRef idx="0">
+            <a:srgbClr val="FFFFFF"/>
+          </a:effectRef>
+          <a:fontRef idx="minor">
+            <a:schemeClr val="lt1"/>
+          </a:fontRef>
+        </p:style>
+        <p:txBody>
+          <a:bodyPr rtlCol="0" anchor="ctr"/>
+          <a:p>
+            <a:pPr algn="ctr"/>
+            <a:endParaRPr lang="zh-CN" altLang="en-US"/>
+          </a:p>
+        </p:txBody>
+      </p:sp>
+      <p:sp>
+        <p:nvSpPr>
+          <p:cNvPr id="9" name="任意多边形 8"/>
+          <p:cNvSpPr/>
+          <p:nvPr/>
+        </p:nvSpPr>
+        <p:spPr>
+          <a:xfrm>
+            <a:off x="981075" y="2761615"/>
+            <a:ext cx="2232000" cy="10795"/>
+          </a:xfrm>
+          <a:custGeom>
+            <a:avLst/>
+            <a:gdLst>
+              <a:gd name="connisteX0" fmla="*/ 2532380 w 2532380"/>
+              <a:gd name="connsiteY0" fmla="*/ 0 h 10795"/>
+              <a:gd name="connisteX1" fmla="*/ 0 w 2532380"/>
+              <a:gd name="connsiteY1" fmla="*/ 10795 h 10795"/>
+            </a:gdLst>
+            <a:ahLst/>
+            <a:cxnLst>
+              <a:cxn ang="0">
+                <a:pos x="connisteX0" y="connsiteY0"/>
+              </a:cxn>
+              <a:cxn ang="0">
+                <a:pos x="connisteX1" y="connsiteY1"/>
+              </a:cxn>
+            </a:cxnLst>
+            <a:rect l="l" t="t" r="r" b="b"/>
+            <a:pathLst>
+              <a:path w="2532380" h="10795">
+                <a:moveTo>
+                  <a:pt x="2532380" y="0"/>
+                </a:moveTo>
+                <a:lnTo>
+                  <a:pt x="0" y="10795"/>
+                </a:lnTo>
+              </a:path>
+            </a:pathLst>
+          </a:custGeom>
+          <a:noFill/>
+          <a:ln>
+            <a:solidFill>
+              <a:schemeClr val="tx1">
+                <a:lumMod val="85000"/>
+                <a:lumOff val="15000"/>
+              </a:schemeClr>
+            </a:solidFill>
+            <a:tailEnd type="oval"/>
+          </a:ln>
+        </p:spPr>
+        <p:style>
+          <a:lnRef idx="2">
+            <a:schemeClr val="accent1">
+              <a:lumMod val="75000"/>
+            </a:schemeClr>
+          </a:lnRef>
+          <a:fillRef idx="1">
+            <a:schemeClr val="accent1"/>
+          </a:fillRef>
+          <a:effectRef idx="0">
+            <a:srgbClr val="FFFFFF"/>
+          </a:effectRef>
+          <a:fontRef idx="minor">
+            <a:schemeClr val="lt1"/>
+          </a:fontRef>
+        </p:style>
+        <p:txBody>
+          <a:bodyPr rtlCol="0" anchor="ctr"/>
+          <a:p>
+            <a:pPr algn="ctr"/>
+            <a:endParaRPr lang="zh-CN" altLang="en-US"/>
+          </a:p>
+        </p:txBody>
+      </p:sp>
+      <p:sp>
+        <p:nvSpPr>
+          <p:cNvPr id="10" name="任意多边形 9"/>
+          <p:cNvSpPr/>
+          <p:nvPr/>
+        </p:nvSpPr>
+        <p:spPr>
+          <a:xfrm>
+            <a:off x="960755" y="2873375"/>
+            <a:ext cx="22225" cy="2347595"/>
+          </a:xfrm>
+          <a:custGeom>
+            <a:avLst/>
+            <a:gdLst>
+              <a:gd name="connisteX0" fmla="*/ 0 w 22225"/>
+              <a:gd name="connsiteY0" fmla="*/ 0 h 2347595"/>
+              <a:gd name="connisteX1" fmla="*/ 22225 w 22225"/>
+              <a:gd name="connsiteY1" fmla="*/ 2347595 h 2347595"/>
+            </a:gdLst>
+            <a:ahLst/>
+            <a:cxnLst>
+              <a:cxn ang="0">
+                <a:pos x="connisteX0" y="connsiteY0"/>
+              </a:cxn>
+              <a:cxn ang="0">
+                <a:pos x="connisteX1" y="connsiteY1"/>
+              </a:cxn>
+            </a:cxnLst>
+            <a:rect l="l" t="t" r="r" b="b"/>
+            <a:pathLst>
+              <a:path w="22225" h="2347595">
+                <a:moveTo>
+                  <a:pt x="0" y="0"/>
+                </a:moveTo>
+                <a:lnTo>
+                  <a:pt x="22225" y="2347595"/>
+                </a:lnTo>
+              </a:path>
+            </a:pathLst>
+          </a:custGeom>
+          <a:noFill/>
+          <a:ln w="12700" cmpd="sng">
+            <a:solidFill>
+              <a:schemeClr val="accent1">
+                <a:shade val="50000"/>
+              </a:schemeClr>
+            </a:solidFill>
+            <a:prstDash val="lgDash"/>
+            <a:tailEnd type="none"/>
+          </a:ln>
+        </p:spPr>
+        <p:style>
+          <a:lnRef idx="2">
+            <a:schemeClr val="accent1">
+              <a:lumMod val="75000"/>
+            </a:schemeClr>
+          </a:lnRef>
+          <a:fillRef idx="1">
+            <a:schemeClr val="accent1"/>
+          </a:fillRef>
+          <a:effectRef idx="0">
+            <a:srgbClr val="FFFFFF"/>
+          </a:effectRef>
+          <a:fontRef idx="minor">
+            <a:schemeClr val="lt1"/>
+          </a:fontRef>
+        </p:style>
+        <p:txBody>
+          <a:bodyPr rtlCol="0" anchor="ctr"/>
+          <a:p>
+            <a:pPr algn="ctr"/>
+            <a:endParaRPr lang="zh-CN" altLang="en-US"/>
+          </a:p>
+        </p:txBody>
+      </p:sp>
+      <p:sp>
+        <p:nvSpPr>
+          <p:cNvPr id="12" name="文本框 11"/>
+          <p:cNvSpPr txBox="1"/>
+          <p:nvPr/>
+        </p:nvSpPr>
+        <p:spPr>
+          <a:xfrm>
+            <a:off x="59690" y="3733165"/>
+            <a:ext cx="1341755" cy="412115"/>
+          </a:xfrm>
+          <a:prstGeom prst="rect">
+            <a:avLst/>
+          </a:prstGeom>
+          <a:noFill/>
+        </p:spPr>
+        <p:txBody>
+          <a:bodyPr wrap="square" rtlCol="0">
+            <a:noAutofit/>
+          </a:bodyPr>
+          <a:p>
+            <a:r>
+              <a:rPr lang="en-US" altLang="zh-CN" sz="2000"/>
+              <a:t>7.5cm</a:t>
+            </a:r>
+            <a:endParaRPr lang="en-US" altLang="zh-CN" sz="2000"/>
+          </a:p>
+        </p:txBody>
+      </p:sp>
+      <p:sp>
+        <p:nvSpPr>
+          <p:cNvPr id="14" name="任意多边形 13"/>
+          <p:cNvSpPr/>
+          <p:nvPr/>
+        </p:nvSpPr>
+        <p:spPr>
+          <a:xfrm>
+            <a:off x="2119630" y="1508125"/>
+            <a:ext cx="1379855" cy="1152525"/>
+          </a:xfrm>
+          <a:custGeom>
+            <a:avLst/>
+            <a:gdLst>
+              <a:gd name="connisteX0" fmla="*/ 1369060 w 1379855"/>
+              <a:gd name="connsiteY0" fmla="*/ 1152525 h 1152525"/>
+              <a:gd name="connisteX1" fmla="*/ 1379855 w 1379855"/>
+              <a:gd name="connsiteY1" fmla="*/ 21590 h 1152525"/>
+              <a:gd name="connisteX2" fmla="*/ 0 w 1379855"/>
+              <a:gd name="connsiteY2" fmla="*/ 0 h 1152525"/>
+            </a:gdLst>
+            <a:ahLst/>
+            <a:cxnLst>
+              <a:cxn ang="0">
+                <a:pos x="connisteX0" y="connsiteY0"/>
+              </a:cxn>
+              <a:cxn ang="0">
+                <a:pos x="connisteX1" y="connsiteY1"/>
+              </a:cxn>
+              <a:cxn ang="0">
+                <a:pos x="connisteX2" y="connsiteY2"/>
+              </a:cxn>
+            </a:cxnLst>
+            <a:rect l="l" t="t" r="r" b="b"/>
+            <a:pathLst>
+              <a:path w="1379855" h="1152525">
+                <a:moveTo>
+                  <a:pt x="1369060" y="1152525"/>
+                </a:moveTo>
+                <a:lnTo>
+                  <a:pt x="1379855" y="21590"/>
+                </a:lnTo>
+                <a:lnTo>
+                  <a:pt x="0" y="0"/>
+                </a:lnTo>
+              </a:path>
+            </a:pathLst>
+          </a:custGeom>
+          <a:noFill/>
+          <a:ln>
+            <a:solidFill>
+              <a:schemeClr val="tx1">
+                <a:lumMod val="85000"/>
+                <a:lumOff val="15000"/>
+              </a:schemeClr>
+            </a:solidFill>
+            <a:tailEnd type="oval"/>
+          </a:ln>
+        </p:spPr>
+        <p:style>
+          <a:lnRef idx="2">
+            <a:schemeClr val="accent1">
+              <a:lumMod val="75000"/>
+            </a:schemeClr>
+          </a:lnRef>
+          <a:fillRef idx="1">
+            <a:schemeClr val="accent1"/>
+          </a:fillRef>
+          <a:effectRef idx="0">
+            <a:srgbClr val="FFFFFF"/>
+          </a:effectRef>
+          <a:fontRef idx="minor">
+            <a:schemeClr val="lt1"/>
+          </a:fontRef>
+        </p:style>
+        <p:txBody>
+          <a:bodyPr rtlCol="0" anchor="ctr"/>
+          <a:p>
+            <a:pPr algn="ctr"/>
+            <a:endParaRPr lang="zh-CN" altLang="en-US"/>
+          </a:p>
+        </p:txBody>
+      </p:sp>
+      <p:sp>
+        <p:nvSpPr>
+          <p:cNvPr id="16" name="文本框 15"/>
+          <p:cNvSpPr txBox="1"/>
+          <p:nvPr/>
+        </p:nvSpPr>
+        <p:spPr>
+          <a:xfrm>
+            <a:off x="316230" y="862965"/>
+            <a:ext cx="3048000" cy="645160"/>
+          </a:xfrm>
+          <a:prstGeom prst="rect">
+            <a:avLst/>
+          </a:prstGeom>
+          <a:noFill/>
+        </p:spPr>
+        <p:txBody>
+          <a:bodyPr wrap="square" rtlCol="0">
+            <a:spAutoFit/>
+          </a:bodyPr>
+          <a:p>
+            <a:r>
+              <a:rPr lang="en-US" altLang="zh-CN"/>
+              <a:t>Web Camera </a:t>
+            </a:r>
+            <a:r>
+              <a:rPr lang="zh-CN" altLang="en-US">
+                <a:ea typeface="宋体" panose="02010600030101010101" pitchFamily="2" charset="-122"/>
+              </a:rPr>
+              <a:t>俯视视角，收集视觉信息</a:t>
+            </a:r>
+            <a:endParaRPr lang="zh-CN" altLang="en-US">
+              <a:ea typeface="宋体" panose="02010600030101010101" pitchFamily="2" charset="-122"/>
+            </a:endParaRPr>
+          </a:p>
+        </p:txBody>
+      </p:sp>
+      <p:sp>
+        <p:nvSpPr>
+          <p:cNvPr id="18" name="任意多边形 17"/>
+          <p:cNvSpPr/>
+          <p:nvPr/>
+        </p:nvSpPr>
+        <p:spPr>
+          <a:xfrm>
+            <a:off x="3582035" y="5965825"/>
+            <a:ext cx="3412490" cy="21590"/>
+          </a:xfrm>
+          <a:custGeom>
+            <a:avLst/>
+            <a:gdLst>
+              <a:gd name="connisteX0" fmla="*/ 0 w 3412490"/>
+              <a:gd name="connsiteY0" fmla="*/ 0 h 21590"/>
+              <a:gd name="connisteX1" fmla="*/ 3412490 w 3412490"/>
+              <a:gd name="connsiteY1" fmla="*/ 21590 h 21590"/>
+            </a:gdLst>
+            <a:ahLst/>
+            <a:cxnLst>
+              <a:cxn ang="0">
+                <a:pos x="connisteX0" y="connsiteY0"/>
+              </a:cxn>
+              <a:cxn ang="0">
+                <a:pos x="connisteX1" y="connsiteY1"/>
+              </a:cxn>
+            </a:cxnLst>
+            <a:rect l="l" t="t" r="r" b="b"/>
+            <a:pathLst>
+              <a:path w="3412490" h="21590">
+                <a:moveTo>
+                  <a:pt x="0" y="0"/>
+                </a:moveTo>
+                <a:lnTo>
+                  <a:pt x="3412490" y="21590"/>
+                </a:lnTo>
+              </a:path>
+            </a:pathLst>
+          </a:custGeom>
+          <a:noFill/>
+          <a:ln>
+            <a:solidFill>
+              <a:schemeClr val="tx1">
+                <a:lumMod val="85000"/>
+                <a:lumOff val="15000"/>
+              </a:schemeClr>
+            </a:solidFill>
+            <a:tailEnd type="oval"/>
+          </a:ln>
+        </p:spPr>
+        <p:style>
+          <a:lnRef idx="2">
+            <a:schemeClr val="accent1">
+              <a:lumMod val="75000"/>
+            </a:schemeClr>
+          </a:lnRef>
+          <a:fillRef idx="1">
+            <a:schemeClr val="accent1"/>
+          </a:fillRef>
+          <a:effectRef idx="0">
+            <a:srgbClr val="FFFFFF"/>
+          </a:effectRef>
+          <a:fontRef idx="minor">
+            <a:schemeClr val="lt1"/>
+          </a:fontRef>
+        </p:style>
+        <p:txBody>
+          <a:bodyPr rtlCol="0" anchor="ctr"/>
+          <a:p>
+            <a:pPr algn="ctr"/>
+            <a:endParaRPr lang="zh-CN" altLang="en-US"/>
+          </a:p>
+        </p:txBody>
+      </p:sp>
+      <p:cxnSp>
+        <p:nvCxnSpPr>
+          <p:cNvPr id="19" name="直接箭头连接符 18"/>
+          <p:cNvCxnSpPr>
+            <a:endCxn id="18" idx="0"/>
+          </p:cNvCxnSpPr>
+          <p:nvPr/>
+        </p:nvCxnSpPr>
+        <p:spPr>
+          <a:xfrm>
+            <a:off x="3571240" y="5477510"/>
+            <a:ext cx="10795" cy="488315"/>
+          </a:xfrm>
+          <a:prstGeom prst="straightConnector1">
+            <a:avLst/>
+          </a:prstGeom>
+          <a:ln w="12700">
+            <a:solidFill>
+              <a:schemeClr val="tx1">
+                <a:lumMod val="95000"/>
+                <a:lumOff val="5000"/>
+              </a:schemeClr>
+            </a:solidFill>
+            <a:prstDash val="dash"/>
+            <a:headEnd type="arrow"/>
+            <a:tailEnd type="arrow"/>
+          </a:ln>
+        </p:spPr>
+        <p:style>
+          <a:lnRef idx="0">
+            <a:schemeClr val="accent1"/>
+          </a:lnRef>
+          <a:fillRef idx="0">
+            <a:srgbClr val="FFFFFF"/>
+          </a:fillRef>
+          <a:effectRef idx="0">
+            <a:srgbClr val="FFFFFF"/>
+          </a:effectRef>
+          <a:fontRef idx="minor">
+            <a:schemeClr val="tx1"/>
+          </a:fontRef>
+        </p:style>
+      </p:cxnSp>
+      <p:sp>
+        <p:nvSpPr>
+          <p:cNvPr id="21" name="文本框 20"/>
+          <p:cNvSpPr txBox="1"/>
+          <p:nvPr/>
+        </p:nvSpPr>
+        <p:spPr>
+          <a:xfrm>
+            <a:off x="6710045" y="5220970"/>
+            <a:ext cx="2059305" cy="645160"/>
+          </a:xfrm>
+          <a:prstGeom prst="rect">
+            <a:avLst/>
+          </a:prstGeom>
+          <a:noFill/>
+        </p:spPr>
+        <p:txBody>
+          <a:bodyPr wrap="square" rtlCol="0">
+            <a:spAutoFit/>
+          </a:bodyPr>
+          <a:p>
+            <a:r>
+              <a:rPr lang="zh-CN" altLang="en-US"/>
+              <a:t>手部放置位置，正对物体</a:t>
+            </a:r>
+            <a:r>
+              <a:rPr lang="en-US" altLang="zh-CN"/>
+              <a:t>30mm</a:t>
+            </a:r>
+            <a:r>
+              <a:rPr lang="zh-CN" altLang="en-US">
+                <a:ea typeface="宋体" panose="02010600030101010101" pitchFamily="2" charset="-122"/>
+              </a:rPr>
+              <a:t>。</a:t>
+            </a:r>
+            <a:endParaRPr lang="zh-CN" altLang="en-US">
+              <a:ea typeface="宋体" panose="02010600030101010101" pitchFamily="2" charset="-122"/>
+            </a:endParaRPr>
+          </a:p>
+        </p:txBody>
+      </p:sp>
+      <p:sp>
+        <p:nvSpPr>
+          <p:cNvPr id="22" name="文本框 21"/>
+          <p:cNvSpPr txBox="1"/>
+          <p:nvPr/>
+        </p:nvSpPr>
+        <p:spPr>
+          <a:xfrm>
+            <a:off x="3582035" y="5554980"/>
+            <a:ext cx="2986405" cy="410845"/>
+          </a:xfrm>
+          <a:prstGeom prst="rect">
+            <a:avLst/>
+          </a:prstGeom>
+          <a:noFill/>
+        </p:spPr>
+        <p:txBody>
+          <a:bodyPr wrap="square" rtlCol="0">
+            <a:noAutofit/>
+          </a:bodyPr>
+          <a:p>
+            <a:r>
+              <a:rPr lang="en-US" altLang="zh-CN"/>
+              <a:t>30mm</a:t>
+            </a:r>
+            <a:endParaRPr lang="en-US" altLang="zh-CN"/>
+          </a:p>
+        </p:txBody>
+      </p:sp>
+    </p:spTree>
+  </p:cSld>
+  <p:clrMapOvr>
+    <a:masterClrMapping/>
+  </p:clrMapOvr>
+  <p:timing>
+    <p:tnLst>
+      <p:par>
+        <p:cTn id="1" dur="indefinite" restart="never" nodeType="tmRoot"/>
+      </p:par>
+    </p:tnLst>
+  </p:timing>
+</p:sld>
+</file>
+
+<file path=ppt/slides/slide3.xml><?xml version="1.0" encoding="utf-8"?>
+<p:sld xmlns:a="http://schemas.openxmlformats.org/drawingml/2006/main" xmlns:r="http://schemas.openxmlformats.org/officeDocument/2006/relationships" xmlns:p="http://schemas.openxmlformats.org/presentationml/2006/main">
+  <p:cSld>
+    <p:spTree>
+      <p:nvGrpSpPr>
+        <p:cNvPr id="1" name=""/>
+        <p:cNvGrpSpPr/>
+        <p:nvPr/>
+      </p:nvGrpSpPr>
+      <p:grpSpPr/>
+      <p:sp>
+        <p:nvSpPr>
+          <p:cNvPr id="6" name="文本框 5"/>
+          <p:cNvSpPr>
+            <a:spLocks noGrp="1"/>
+          </p:cNvSpPr>
+          <p:nvPr/>
+        </p:nvSpPr>
+        <p:spPr>
+          <a:xfrm>
+            <a:off x="275590" y="226695"/>
+            <a:ext cx="8522970" cy="583565"/>
+          </a:xfrm>
+          <a:prstGeom prst="rect">
+            <a:avLst/>
+          </a:prstGeom>
+          <a:noFill/>
+        </p:spPr>
+        <p:txBody>
+          <a:bodyPr wrap="square">
+            <a:spAutoFit/>
+          </a:bodyPr>
+          <a:lstStyle/>
+          <a:p>
+            <a:r>
+              <a:rPr lang="zh-CN" altLang="en-US" sz="3200" b="1">
+                <a:latin typeface="Times New Roman" panose="02020603050405020304"/>
+                <a:ea typeface="宋体" panose="02010600030101010101" pitchFamily="2" charset="-122"/>
+                <a:cs typeface="Times New Roman" panose="02020603050405020304"/>
+                <a:sym typeface="+mn-ea"/>
+              </a:rPr>
+              <a:t>实验环境</a:t>
+            </a:r>
+            <a:endParaRPr lang="zh-CN" altLang="en-US" sz="3200" b="1">
+              <a:latin typeface="Times New Roman" panose="02020603050405020304"/>
+              <a:ea typeface="宋体" panose="02010600030101010101" pitchFamily="2" charset="-122"/>
+              <a:cs typeface="Times New Roman" panose="02020603050405020304"/>
+              <a:sym typeface="+mn-ea"/>
+            </a:endParaRPr>
+          </a:p>
+        </p:txBody>
+      </p:sp>
+      <p:pic>
+        <p:nvPicPr>
+          <p:cNvPr id="13" name="grasp_video">
+            <a:hlinkClick r:id="" action="ppaction://media"/>
+          </p:cNvPr>
+          <p:cNvPicPr/>
+          <p:nvPr>
+            <a:videoFile r:link="rId1"/>
+            <p:extLst>
+              <p:ext uri="{DAA4B4D4-6D71-4841-9C94-3DE7FCFB9230}">
+                <p14:media xmlns:p14="http://schemas.microsoft.com/office/powerpoint/2010/main" r:embed="rId2"/>
+              </p:ext>
+            </p:extLst>
+          </p:nvPr>
+        </p:nvPicPr>
+        <p:blipFill>
+          <a:blip r:embed="rId3"/>
+          <a:stretch>
+            <a:fillRect/>
+          </a:stretch>
+        </p:blipFill>
+        <p:spPr>
+          <a:xfrm>
+            <a:off x="1163955" y="1711960"/>
+            <a:ext cx="6745605" cy="4613910"/>
+          </a:xfrm>
+          <a:prstGeom prst="rect">
+            <a:avLst/>
+          </a:prstGeom>
+        </p:spPr>
+      </p:pic>
+    </p:spTree>
+  </p:cSld>
+  <p:clrMapOvr>
+    <a:masterClrMapping/>
+  </p:clrMapOvr>
+  <p:timing>
+    <p:tnLst>
+      <p:par>
+        <p:cTn id="1" dur="indefinite" restart="never" nodeType="tmRoot">
+          <p:childTnLst>
+            <p:video fullScrn="0">
+              <p:cMediaNode>
+                <p:cTn id="2" fill="hold" display="1">
+                  <p:stCondLst>
+                    <p:cond delay="indefinite"/>
+                  </p:stCondLst>
+                </p:cTn>
+                <p:tgtEl>
+                  <p:spTgt spid="13"/>
+                </p:tgtEl>
+              </p:cMediaNode>
+            </p:video>
+            <p:seq concurrent="1" nextAc="seek">
+              <p:cTn id="3" restart="whenNotActive" fill="hold" evtFilter="cancelBubble" nodeType="interactiveSeq">
+                <p:stCondLst>
+                  <p:cond evt="onClick" delay="0">
+                    <p:tgtEl>
+                      <p:spTgt spid="13"/>
+                    </p:tgtEl>
+                  </p:cond>
+                </p:stCondLst>
+                <p:endSync evt="end" delay="0">
+                  <p:rtn val="all"/>
+                </p:endSync>
+                <p:childTnLst>
+                  <p:par>
+                    <p:cTn id="4" fill="hold">
+                      <p:stCondLst>
+                        <p:cond delay="0"/>
+                      </p:stCondLst>
+                      <p:childTnLst>
+                        <p:par>
+                          <p:cTn id="5" fill="hold">
+                            <p:stCondLst>
+                              <p:cond delay="0"/>
+                            </p:stCondLst>
+                            <p:childTnLst>
+                              <p:par>
+                                <p:cTn id="6" presetID="2" presetClass="mediacall" presetSubtype="0" fill="hold" nodeType="clickEffect">
+                                  <p:stCondLst>
+                                    <p:cond delay="0"/>
+                                  </p:stCondLst>
+                                  <p:childTnLst>
+                                    <p:cmd type="call" cmd="togglePause">
+                                      <p:cBhvr additive="base">
+                                        <p:cTn id="7" dur="1" fill="hold"/>
+                                        <p:tgtEl>
+                                          <p:spTgt spid="13"/>
+                                        </p:tgtEl>
+                                      </p:cBhvr>
+                                    </p:cmd>
+                                  </p:childTnLst>
+                                </p:cTn>
+                              </p:par>
+                            </p:childTnLst>
+                          </p:cTn>
+                        </p:par>
+                      </p:childTnLst>
+                    </p:cTn>
+                  </p:par>
+                </p:childTnLst>
+              </p:cTn>
+              <p:nextCondLst>
+                <p:cond evt="onClick" delay="0">
+                  <p:tgtEl>
+                    <p:spTgt spid="13"/>
+                  </p:tgtEl>
+                </p:cond>
+              </p:nextCondLst>
+            </p:seq>
+          </p:childTnLst>
+        </p:cTn>
+      </p:par>
+    </p:tnLst>
+  </p:timing>
+</p:sld>
+</file>
+
+<file path=ppt/slides/slide4.xml><?xml version="1.0" encoding="utf-8"?>
 <p:sld xmlns:a="http://schemas.openxmlformats.org/drawingml/2006/main" xmlns:r="http://schemas.openxmlformats.org/officeDocument/2006/relationships" xmlns:p="http://schemas.openxmlformats.org/presentationml/2006/main">
   <p:cSld>
     <p:spTree>
@@ -5723,12 +6850,12 @@
             </a:r>
             <a:r>
               <a:rPr lang="zh-CN" sz="1600">
-                <a:ea typeface="SimSun" panose="02010600030101010101" pitchFamily="2" charset="-122"/>
+                <a:ea typeface="宋体" panose="02010600030101010101" pitchFamily="2" charset="-122"/>
               </a:rPr>
               <a:t>进行了归一化</a:t>
             </a:r>
             <a:endParaRPr lang="zh-CN" sz="1600">
-              <a:ea typeface="SimSun" panose="02010600030101010101" pitchFamily="2" charset="-122"/>
+              <a:ea typeface="宋体" panose="02010600030101010101" pitchFamily="2" charset="-122"/>
             </a:endParaRPr>
           </a:p>
         </p:txBody>
@@ -5748,7 +6875,7 @@
 </p:sld>
 </file>
 
-<file path=ppt/slides/slide3.xml><?xml version="1.0" encoding="utf-8"?>
+<file path=ppt/slides/slide5.xml><?xml version="1.0" encoding="utf-8"?>
 <p:sld xmlns:a="http://schemas.openxmlformats.org/drawingml/2006/main" xmlns:r="http://schemas.openxmlformats.org/officeDocument/2006/relationships" xmlns:p="http://schemas.openxmlformats.org/presentationml/2006/main">
   <p:cSld>
     <p:spTree>
@@ -5917,7 +7044,7 @@
 </p:sld>
 </file>
 
-<file path=ppt/slides/slide4.xml><?xml version="1.0" encoding="utf-8"?>
+<file path=ppt/slides/slide6.xml><?xml version="1.0" encoding="utf-8"?>
 <p:sld xmlns:a="http://schemas.openxmlformats.org/drawingml/2006/main" xmlns:r="http://schemas.openxmlformats.org/officeDocument/2006/relationships" xmlns:p="http://schemas.openxmlformats.org/presentationml/2006/main">
   <p:cSld>
     <p:spTree>
@@ -6055,7 +7182,7 @@
 </p:sld>
 </file>
 
-<file path=ppt/slides/slide5.xml><?xml version="1.0" encoding="utf-8"?>
+<file path=ppt/slides/slide7.xml><?xml version="1.0" encoding="utf-8"?>
 <p:sld xmlns:a="http://schemas.openxmlformats.org/drawingml/2006/main" xmlns:r="http://schemas.openxmlformats.org/officeDocument/2006/relationships" xmlns:p="http://schemas.openxmlformats.org/presentationml/2006/main">
   <p:cSld>
     <p:spTree>
@@ -6145,7 +7272,7 @@
 </p:sld>
 </file>
 
-<file path=ppt/slides/slide6.xml><?xml version="1.0" encoding="utf-8"?>
+<file path=ppt/slides/slide8.xml><?xml version="1.0" encoding="utf-8"?>
 <p:sld xmlns:a="http://schemas.openxmlformats.org/drawingml/2006/main" xmlns:r="http://schemas.openxmlformats.org/officeDocument/2006/relationships" xmlns:p="http://schemas.openxmlformats.org/presentationml/2006/main">
   <p:cSld>
     <p:spTree>

--- a/Report/Report_1019.pptx
+++ b/Report/Report_1019.pptx
@@ -8,14 +8,20 @@
     <p:notesMasterId r:id="rId4"/>
   </p:notesMasterIdLst>
   <p:sldIdLst>
-    <p:sldId id="298" r:id="rId3"/>
-    <p:sldId id="304" r:id="rId5"/>
-    <p:sldId id="305" r:id="rId6"/>
-    <p:sldId id="301" r:id="rId7"/>
-    <p:sldId id="302" r:id="rId8"/>
-    <p:sldId id="300" r:id="rId9"/>
-    <p:sldId id="303" r:id="rId10"/>
-    <p:sldId id="299" r:id="rId11"/>
+    <p:sldId id="304" r:id="rId3"/>
+    <p:sldId id="305" r:id="rId5"/>
+    <p:sldId id="301" r:id="rId6"/>
+    <p:sldId id="306" r:id="rId7"/>
+    <p:sldId id="300" r:id="rId8"/>
+    <p:sldId id="314" r:id="rId9"/>
+    <p:sldId id="315" r:id="rId10"/>
+    <p:sldId id="317" r:id="rId11"/>
+    <p:sldId id="316" r:id="rId12"/>
+    <p:sldId id="318" r:id="rId13"/>
+    <p:sldId id="319" r:id="rId14"/>
+    <p:sldId id="320" r:id="rId15"/>
+    <p:sldId id="321" r:id="rId16"/>
+    <p:sldId id="322" r:id="rId17"/>
   </p:sldIdLst>
   <p:sldSz cx="9144000" cy="6858000"/>
   <p:notesSz cx="6858000" cy="9144000"/>
@@ -318,6 +324,326 @@
 </p:notes>
 </file>
 
+<file path=ppt/notesSlides/notesSlide10.xml><?xml version="1.0" encoding="utf-8"?>
+<p:notes xmlns:a="http://schemas.openxmlformats.org/drawingml/2006/main" xmlns:r="http://schemas.openxmlformats.org/officeDocument/2006/relationships" xmlns:p="http://schemas.openxmlformats.org/presentationml/2006/main">
+  <p:cSld>
+    <p:spTree>
+      <p:nvGrpSpPr>
+        <p:cNvPr id="1" name=""/>
+        <p:cNvGrpSpPr/>
+        <p:nvPr/>
+      </p:nvGrpSpPr>
+      <p:grpSpPr/>
+      <p:sp>
+        <p:nvSpPr>
+          <p:cNvPr id="2" name="Slide Image Placeholder 1"/>
+          <p:cNvSpPr>
+            <a:spLocks noGrp="1"/>
+          </p:cNvSpPr>
+          <p:nvPr>
+            <p:ph type="sldImg"/>
+          </p:nvPr>
+        </p:nvSpPr>
+        <p:spPr/>
+      </p:sp>
+      <p:sp>
+        <p:nvSpPr>
+          <p:cNvPr id="3" name="Notes Placeholder 2"/>
+          <p:cNvSpPr>
+            <a:spLocks noGrp="1"/>
+          </p:cNvSpPr>
+          <p:nvPr>
+            <p:ph type="body" idx="1"/>
+          </p:nvPr>
+        </p:nvSpPr>
+        <p:spPr/>
+        <p:txBody>
+          <a:bodyPr/>
+          <a:lstStyle/>
+          <a:p/>
+        </p:txBody>
+      </p:sp>
+      <p:sp>
+        <p:nvSpPr>
+          <p:cNvPr id="4" name="Slide Number Placeholder 3"/>
+          <p:cNvSpPr>
+            <a:spLocks noGrp="1"/>
+          </p:cNvSpPr>
+          <p:nvPr>
+            <p:ph type="sldNum" idx="5"/>
+          </p:nvPr>
+        </p:nvSpPr>
+        <p:spPr/>
+        <p:txBody>
+          <a:bodyPr/>
+          <a:lstStyle/>
+          <a:p/>
+        </p:txBody>
+      </p:sp>
+    </p:spTree>
+  </p:cSld>
+  <p:clrMapOvr>
+    <a:masterClrMapping/>
+  </p:clrMapOvr>
+</p:notes>
+</file>
+
+<file path=ppt/notesSlides/notesSlide11.xml><?xml version="1.0" encoding="utf-8"?>
+<p:notes xmlns:a="http://schemas.openxmlformats.org/drawingml/2006/main" xmlns:r="http://schemas.openxmlformats.org/officeDocument/2006/relationships" xmlns:p="http://schemas.openxmlformats.org/presentationml/2006/main">
+  <p:cSld>
+    <p:spTree>
+      <p:nvGrpSpPr>
+        <p:cNvPr id="1" name=""/>
+        <p:cNvGrpSpPr/>
+        <p:nvPr/>
+      </p:nvGrpSpPr>
+      <p:grpSpPr/>
+      <p:sp>
+        <p:nvSpPr>
+          <p:cNvPr id="2" name="Slide Image Placeholder 1"/>
+          <p:cNvSpPr>
+            <a:spLocks noGrp="1"/>
+          </p:cNvSpPr>
+          <p:nvPr>
+            <p:ph type="sldImg"/>
+          </p:nvPr>
+        </p:nvSpPr>
+        <p:spPr/>
+      </p:sp>
+      <p:sp>
+        <p:nvSpPr>
+          <p:cNvPr id="3" name="Notes Placeholder 2"/>
+          <p:cNvSpPr>
+            <a:spLocks noGrp="1"/>
+          </p:cNvSpPr>
+          <p:nvPr>
+            <p:ph type="body" idx="1"/>
+          </p:nvPr>
+        </p:nvSpPr>
+        <p:spPr/>
+        <p:txBody>
+          <a:bodyPr/>
+          <a:lstStyle/>
+          <a:p/>
+        </p:txBody>
+      </p:sp>
+      <p:sp>
+        <p:nvSpPr>
+          <p:cNvPr id="4" name="Slide Number Placeholder 3"/>
+          <p:cNvSpPr>
+            <a:spLocks noGrp="1"/>
+          </p:cNvSpPr>
+          <p:nvPr>
+            <p:ph type="sldNum" idx="5"/>
+          </p:nvPr>
+        </p:nvSpPr>
+        <p:spPr/>
+        <p:txBody>
+          <a:bodyPr/>
+          <a:lstStyle/>
+          <a:p/>
+        </p:txBody>
+      </p:sp>
+    </p:spTree>
+  </p:cSld>
+  <p:clrMapOvr>
+    <a:masterClrMapping/>
+  </p:clrMapOvr>
+</p:notes>
+</file>
+
+<file path=ppt/notesSlides/notesSlide12.xml><?xml version="1.0" encoding="utf-8"?>
+<p:notes xmlns:a="http://schemas.openxmlformats.org/drawingml/2006/main" xmlns:r="http://schemas.openxmlformats.org/officeDocument/2006/relationships" xmlns:p="http://schemas.openxmlformats.org/presentationml/2006/main">
+  <p:cSld>
+    <p:spTree>
+      <p:nvGrpSpPr>
+        <p:cNvPr id="1" name=""/>
+        <p:cNvGrpSpPr/>
+        <p:nvPr/>
+      </p:nvGrpSpPr>
+      <p:grpSpPr/>
+      <p:sp>
+        <p:nvSpPr>
+          <p:cNvPr id="2" name="Slide Image Placeholder 1"/>
+          <p:cNvSpPr>
+            <a:spLocks noGrp="1"/>
+          </p:cNvSpPr>
+          <p:nvPr>
+            <p:ph type="sldImg"/>
+          </p:nvPr>
+        </p:nvSpPr>
+        <p:spPr/>
+      </p:sp>
+      <p:sp>
+        <p:nvSpPr>
+          <p:cNvPr id="3" name="Notes Placeholder 2"/>
+          <p:cNvSpPr>
+            <a:spLocks noGrp="1"/>
+          </p:cNvSpPr>
+          <p:nvPr>
+            <p:ph type="body" idx="1"/>
+          </p:nvPr>
+        </p:nvSpPr>
+        <p:spPr/>
+        <p:txBody>
+          <a:bodyPr/>
+          <a:lstStyle/>
+          <a:p/>
+        </p:txBody>
+      </p:sp>
+      <p:sp>
+        <p:nvSpPr>
+          <p:cNvPr id="4" name="Slide Number Placeholder 3"/>
+          <p:cNvSpPr>
+            <a:spLocks noGrp="1"/>
+          </p:cNvSpPr>
+          <p:nvPr>
+            <p:ph type="sldNum" idx="5"/>
+          </p:nvPr>
+        </p:nvSpPr>
+        <p:spPr/>
+        <p:txBody>
+          <a:bodyPr/>
+          <a:lstStyle/>
+          <a:p/>
+        </p:txBody>
+      </p:sp>
+    </p:spTree>
+  </p:cSld>
+  <p:clrMapOvr>
+    <a:masterClrMapping/>
+  </p:clrMapOvr>
+</p:notes>
+</file>
+
+<file path=ppt/notesSlides/notesSlide13.xml><?xml version="1.0" encoding="utf-8"?>
+<p:notes xmlns:a="http://schemas.openxmlformats.org/drawingml/2006/main" xmlns:r="http://schemas.openxmlformats.org/officeDocument/2006/relationships" xmlns:p="http://schemas.openxmlformats.org/presentationml/2006/main">
+  <p:cSld>
+    <p:spTree>
+      <p:nvGrpSpPr>
+        <p:cNvPr id="1" name=""/>
+        <p:cNvGrpSpPr/>
+        <p:nvPr/>
+      </p:nvGrpSpPr>
+      <p:grpSpPr/>
+      <p:sp>
+        <p:nvSpPr>
+          <p:cNvPr id="2" name="Slide Image Placeholder 1"/>
+          <p:cNvSpPr>
+            <a:spLocks noGrp="1"/>
+          </p:cNvSpPr>
+          <p:nvPr>
+            <p:ph type="sldImg"/>
+          </p:nvPr>
+        </p:nvSpPr>
+        <p:spPr/>
+      </p:sp>
+      <p:sp>
+        <p:nvSpPr>
+          <p:cNvPr id="3" name="Notes Placeholder 2"/>
+          <p:cNvSpPr>
+            <a:spLocks noGrp="1"/>
+          </p:cNvSpPr>
+          <p:nvPr>
+            <p:ph type="body" idx="1"/>
+          </p:nvPr>
+        </p:nvSpPr>
+        <p:spPr/>
+        <p:txBody>
+          <a:bodyPr/>
+          <a:lstStyle/>
+          <a:p/>
+        </p:txBody>
+      </p:sp>
+      <p:sp>
+        <p:nvSpPr>
+          <p:cNvPr id="4" name="Slide Number Placeholder 3"/>
+          <p:cNvSpPr>
+            <a:spLocks noGrp="1"/>
+          </p:cNvSpPr>
+          <p:nvPr>
+            <p:ph type="sldNum" idx="5"/>
+          </p:nvPr>
+        </p:nvSpPr>
+        <p:spPr/>
+        <p:txBody>
+          <a:bodyPr/>
+          <a:lstStyle/>
+          <a:p/>
+        </p:txBody>
+      </p:sp>
+    </p:spTree>
+  </p:cSld>
+  <p:clrMapOvr>
+    <a:masterClrMapping/>
+  </p:clrMapOvr>
+</p:notes>
+</file>
+
+<file path=ppt/notesSlides/notesSlide14.xml><?xml version="1.0" encoding="utf-8"?>
+<p:notes xmlns:a="http://schemas.openxmlformats.org/drawingml/2006/main" xmlns:r="http://schemas.openxmlformats.org/officeDocument/2006/relationships" xmlns:p="http://schemas.openxmlformats.org/presentationml/2006/main">
+  <p:cSld>
+    <p:spTree>
+      <p:nvGrpSpPr>
+        <p:cNvPr id="1" name=""/>
+        <p:cNvGrpSpPr/>
+        <p:nvPr/>
+      </p:nvGrpSpPr>
+      <p:grpSpPr/>
+      <p:sp>
+        <p:nvSpPr>
+          <p:cNvPr id="2" name="Slide Image Placeholder 1"/>
+          <p:cNvSpPr>
+            <a:spLocks noGrp="1"/>
+          </p:cNvSpPr>
+          <p:nvPr>
+            <p:ph type="sldImg"/>
+          </p:nvPr>
+        </p:nvSpPr>
+        <p:spPr/>
+      </p:sp>
+      <p:sp>
+        <p:nvSpPr>
+          <p:cNvPr id="3" name="Notes Placeholder 2"/>
+          <p:cNvSpPr>
+            <a:spLocks noGrp="1"/>
+          </p:cNvSpPr>
+          <p:nvPr>
+            <p:ph type="body" idx="1"/>
+          </p:nvPr>
+        </p:nvSpPr>
+        <p:spPr/>
+        <p:txBody>
+          <a:bodyPr/>
+          <a:lstStyle/>
+          <a:p/>
+        </p:txBody>
+      </p:sp>
+      <p:sp>
+        <p:nvSpPr>
+          <p:cNvPr id="4" name="Slide Number Placeholder 3"/>
+          <p:cNvSpPr>
+            <a:spLocks noGrp="1"/>
+          </p:cNvSpPr>
+          <p:nvPr>
+            <p:ph type="sldNum" idx="5"/>
+          </p:nvPr>
+        </p:nvSpPr>
+        <p:spPr/>
+        <p:txBody>
+          <a:bodyPr/>
+          <a:lstStyle/>
+          <a:p/>
+        </p:txBody>
+      </p:sp>
+    </p:spTree>
+  </p:cSld>
+  <p:clrMapOvr>
+    <a:masterClrMapping/>
+  </p:clrMapOvr>
+</p:notes>
+</file>
+
 <file path=ppt/notesSlides/notesSlide2.xml><?xml version="1.0" encoding="utf-8"?>
 <p:notes xmlns:a="http://schemas.openxmlformats.org/drawingml/2006/main" xmlns:r="http://schemas.openxmlformats.org/officeDocument/2006/relationships" xmlns:p="http://schemas.openxmlformats.org/presentationml/2006/main">
   <p:cSld>
@@ -703,6 +1029,70 @@
 </file>
 
 <file path=ppt/notesSlides/notesSlide8.xml><?xml version="1.0" encoding="utf-8"?>
+<p:notes xmlns:a="http://schemas.openxmlformats.org/drawingml/2006/main" xmlns:r="http://schemas.openxmlformats.org/officeDocument/2006/relationships" xmlns:p="http://schemas.openxmlformats.org/presentationml/2006/main">
+  <p:cSld>
+    <p:spTree>
+      <p:nvGrpSpPr>
+        <p:cNvPr id="1" name=""/>
+        <p:cNvGrpSpPr/>
+        <p:nvPr/>
+      </p:nvGrpSpPr>
+      <p:grpSpPr/>
+      <p:sp>
+        <p:nvSpPr>
+          <p:cNvPr id="2" name="Slide Image Placeholder 1"/>
+          <p:cNvSpPr>
+            <a:spLocks noGrp="1"/>
+          </p:cNvSpPr>
+          <p:nvPr>
+            <p:ph type="sldImg"/>
+          </p:nvPr>
+        </p:nvSpPr>
+        <p:spPr/>
+      </p:sp>
+      <p:sp>
+        <p:nvSpPr>
+          <p:cNvPr id="3" name="Notes Placeholder 2"/>
+          <p:cNvSpPr>
+            <a:spLocks noGrp="1"/>
+          </p:cNvSpPr>
+          <p:nvPr>
+            <p:ph type="body" idx="1"/>
+          </p:nvPr>
+        </p:nvSpPr>
+        <p:spPr/>
+        <p:txBody>
+          <a:bodyPr/>
+          <a:lstStyle/>
+          <a:p/>
+        </p:txBody>
+      </p:sp>
+      <p:sp>
+        <p:nvSpPr>
+          <p:cNvPr id="4" name="Slide Number Placeholder 3"/>
+          <p:cNvSpPr>
+            <a:spLocks noGrp="1"/>
+          </p:cNvSpPr>
+          <p:nvPr>
+            <p:ph type="sldNum" idx="5"/>
+          </p:nvPr>
+        </p:nvSpPr>
+        <p:spPr/>
+        <p:txBody>
+          <a:bodyPr/>
+          <a:lstStyle/>
+          <a:p/>
+        </p:txBody>
+      </p:sp>
+    </p:spTree>
+  </p:cSld>
+  <p:clrMapOvr>
+    <a:masterClrMapping/>
+  </p:clrMapOvr>
+</p:notes>
+</file>
+
+<file path=ppt/notesSlides/notesSlide9.xml><?xml version="1.0" encoding="utf-8"?>
 <p:notes xmlns:a="http://schemas.openxmlformats.org/drawingml/2006/main" xmlns:r="http://schemas.openxmlformats.org/officeDocument/2006/relationships" xmlns:p="http://schemas.openxmlformats.org/presentationml/2006/main">
   <p:cSld>
     <p:spTree>
@@ -3649,255 +4039,17 @@
           <a:lstStyle/>
           <a:p>
             <a:r>
-              <a:rPr lang="zh-CN" altLang="en-US" sz="3200" b="1">
+              <a:rPr lang="en-US" altLang="zh-CN" sz="3200" b="1">
                 <a:latin typeface="Times New Roman" panose="02020603050405020304"/>
-                <a:ea typeface="宋体" panose="02010600030101010101" pitchFamily="2" charset="-122"/>
+                <a:ea typeface="SimSun" panose="02010600030101010101" pitchFamily="2" charset="-122"/>
                 <a:cs typeface="Times New Roman" panose="02020603050405020304"/>
                 <a:sym typeface="+mn-ea"/>
               </a:rPr>
-              <a:t>消息</a:t>
-            </a:r>
-            <a:endParaRPr lang="zh-CN" altLang="en-US" sz="3200" b="1">
+              <a:t>Experimental Setup</a:t>
+            </a:r>
+            <a:endParaRPr lang="en-US" altLang="zh-CN" sz="3200" b="1">
               <a:latin typeface="Times New Roman" panose="02020603050405020304"/>
-              <a:ea typeface="宋体" panose="02010600030101010101" pitchFamily="2" charset="-122"/>
-              <a:cs typeface="Times New Roman" panose="02020603050405020304"/>
-              <a:sym typeface="+mn-ea"/>
-            </a:endParaRPr>
-          </a:p>
-        </p:txBody>
-      </p:sp>
-      <p:sp>
-        <p:nvSpPr>
-          <p:cNvPr id="2" name="文本框 1"/>
-          <p:cNvSpPr txBox="1"/>
-          <p:nvPr/>
-        </p:nvSpPr>
-        <p:spPr>
-          <a:xfrm>
-            <a:off x="275590" y="1167130"/>
-            <a:ext cx="8354060" cy="3692525"/>
-          </a:xfrm>
-          <a:prstGeom prst="rect">
-            <a:avLst/>
-          </a:prstGeom>
-          <a:noFill/>
-        </p:spPr>
-        <p:txBody>
-          <a:bodyPr wrap="square" rtlCol="0" anchor="t">
-            <a:spAutoFit/>
-          </a:bodyPr>
-          <a:p>
-            <a:r>
-              <a:rPr lang="zh-CN" altLang="en-US"/>
-              <a:t>老师早上好</a:t>
-            </a:r>
-            <a:endParaRPr lang="zh-CN" altLang="en-US"/>
-          </a:p>
-          <a:p>
-            <a:r>
-              <a:rPr lang="zh-CN" altLang="en-US"/>
-              <a:t>根据老师的建议，我做了一个系统。进行了离线测试和实时测试。预测效果有了很大提升。</a:t>
-            </a:r>
-            <a:endParaRPr lang="zh-CN" altLang="en-US"/>
-          </a:p>
-          <a:p>
-            <a:r>
-              <a:rPr lang="zh-CN" altLang="en-US"/>
-              <a:t>我对3个不同颜色大小的方块（方块目前稳定）进行抓取，训练了三个模型。训练数据使用30组。</a:t>
-            </a:r>
-            <a:endParaRPr lang="zh-CN" altLang="en-US"/>
-          </a:p>
-          <a:p>
-            <a:r>
-              <a:rPr lang="zh-CN" altLang="en-US"/>
-              <a:t>离线测试数据使用9组，平均</a:t>
-            </a:r>
-            <a:r>
-              <a:rPr lang="en-US" altLang="zh-CN"/>
-              <a:t>RMSE</a:t>
-            </a:r>
-            <a:r>
-              <a:rPr lang="zh-CN" altLang="en-US"/>
-              <a:t>是，</a:t>
-            </a:r>
-            <a:r>
-              <a:rPr lang="en-US" altLang="zh-CN"/>
-              <a:t>R2</a:t>
-            </a:r>
-            <a:r>
-              <a:rPr lang="zh-CN" altLang="en-US"/>
-              <a:t>是</a:t>
-            </a:r>
-            <a:endParaRPr lang="zh-CN" altLang="en-US"/>
-          </a:p>
-          <a:p>
-            <a:r>
-              <a:rPr lang="zh-CN" altLang="en-US"/>
-              <a:t>实时测试为三种颜色随机各抓取三次，结果为平均</a:t>
-            </a:r>
-            <a:r>
-              <a:rPr lang="en-US" altLang="zh-CN"/>
-              <a:t>RMSE</a:t>
-            </a:r>
-            <a:r>
-              <a:rPr lang="zh-CN" altLang="en-US"/>
-              <a:t>是，</a:t>
-            </a:r>
-            <a:r>
-              <a:rPr lang="en-US" altLang="zh-CN"/>
-              <a:t>R2</a:t>
-            </a:r>
-            <a:r>
-              <a:rPr lang="zh-CN" altLang="en-US"/>
-              <a:t>是</a:t>
-            </a:r>
-            <a:endParaRPr lang="zh-CN" altLang="en-US"/>
-          </a:p>
-          <a:p>
-            <a:endParaRPr lang="en-US" altLang="zh-CN"/>
-          </a:p>
-          <a:p>
-            <a:r>
-              <a:rPr lang="zh-CN" altLang="en-US"/>
-              <a:t>邀请了另一名参与者，但因为程序</a:t>
-            </a:r>
-            <a:r>
-              <a:rPr lang="en-US" altLang="zh-CN"/>
-              <a:t>Bug</a:t>
-            </a:r>
-            <a:r>
-              <a:rPr lang="zh-CN" altLang="en-US"/>
-              <a:t>没做完完整测试。</a:t>
-            </a:r>
-            <a:endParaRPr lang="zh-CN" altLang="en-US"/>
-          </a:p>
-          <a:p>
-            <a:r>
-              <a:rPr lang="zh-CN" altLang="en-US"/>
-              <a:t>进行了蓝色和黑色两个方块的抓取，训练了两个模型，训练数据使用30组。</a:t>
-            </a:r>
-            <a:endParaRPr lang="zh-CN" altLang="en-US"/>
-          </a:p>
-          <a:p>
-            <a:r>
-              <a:rPr lang="zh-CN" altLang="en-US"/>
-              <a:t>离线测试数据使用9组，</a:t>
-            </a:r>
-            <a:r>
-              <a:rPr lang="en-US" altLang="zh-CN"/>
-              <a:t>MAE</a:t>
-            </a:r>
-            <a:r>
-              <a:rPr lang="zh-CN" altLang="en-US"/>
-              <a:t>是2.38，</a:t>
-            </a:r>
-            <a:r>
-              <a:rPr lang="en-US" altLang="zh-CN"/>
-              <a:t>RMSE</a:t>
-            </a:r>
-            <a:r>
-              <a:rPr lang="zh-CN" altLang="en-US"/>
-              <a:t>是3.15，</a:t>
-            </a:r>
-            <a:r>
-              <a:rPr lang="en-US" altLang="zh-CN"/>
-              <a:t>R2</a:t>
-            </a:r>
-            <a:r>
-              <a:rPr lang="zh-CN" altLang="en-US"/>
-              <a:t>是0.921</a:t>
-            </a:r>
-            <a:endParaRPr lang="zh-CN" altLang="en-US"/>
-          </a:p>
-          <a:p>
-            <a:endParaRPr lang="zh-CN" altLang="en-US"/>
-          </a:p>
-          <a:p>
-            <a:r>
-              <a:rPr lang="zh-CN" altLang="en-US">
-                <a:ea typeface="宋体" panose="02010600030101010101" pitchFamily="2" charset="-122"/>
-              </a:rPr>
-              <a:t>这是报告，请原谅</a:t>
-            </a:r>
-            <a:r>
-              <a:rPr lang="en-US" altLang="zh-CN">
-                <a:ea typeface="宋体" panose="02010600030101010101" pitchFamily="2" charset="-122"/>
-              </a:rPr>
-              <a:t>Slide</a:t>
-            </a:r>
-            <a:r>
-              <a:rPr lang="zh-CN" altLang="en-US">
-                <a:ea typeface="宋体" panose="02010600030101010101" pitchFamily="2" charset="-122"/>
-              </a:rPr>
-              <a:t>如此简陋。</a:t>
-            </a:r>
-            <a:endParaRPr lang="zh-CN" altLang="en-US">
-              <a:ea typeface="宋体" panose="02010600030101010101" pitchFamily="2" charset="-122"/>
-            </a:endParaRPr>
-          </a:p>
-        </p:txBody>
-      </p:sp>
-    </p:spTree>
-  </p:cSld>
-  <p:clrMapOvr>
-    <a:masterClrMapping/>
-  </p:clrMapOvr>
-  <p:timing>
-    <p:tnLst>
-      <p:par>
-        <p:cTn id="1" dur="indefinite" restart="never" nodeType="tmRoot"/>
-      </p:par>
-    </p:tnLst>
-  </p:timing>
-</p:sld>
-</file>
-
-<file path=ppt/slides/slide2.xml><?xml version="1.0" encoding="utf-8"?>
-<p:sld xmlns:a="http://schemas.openxmlformats.org/drawingml/2006/main" xmlns:r="http://schemas.openxmlformats.org/officeDocument/2006/relationships" xmlns:p="http://schemas.openxmlformats.org/presentationml/2006/main">
-  <p:cSld>
-    <p:spTree>
-      <p:nvGrpSpPr>
-        <p:cNvPr id="1" name=""/>
-        <p:cNvGrpSpPr/>
-        <p:nvPr/>
-      </p:nvGrpSpPr>
-      <p:grpSpPr/>
-      <p:sp>
-        <p:nvSpPr>
-          <p:cNvPr id="6" name="文本框 5"/>
-          <p:cNvSpPr>
-            <a:spLocks noGrp="1"/>
-          </p:cNvSpPr>
-          <p:nvPr/>
-        </p:nvSpPr>
-        <p:spPr>
-          <a:xfrm>
-            <a:off x="275590" y="226695"/>
-            <a:ext cx="8522970" cy="583565"/>
-          </a:xfrm>
-          <a:prstGeom prst="rect">
-            <a:avLst/>
-          </a:prstGeom>
-          <a:noFill/>
-        </p:spPr>
-        <p:txBody>
-          <a:bodyPr wrap="square">
-            <a:spAutoFit/>
-          </a:bodyPr>
-          <a:lstStyle/>
-          <a:p>
-            <a:r>
-              <a:rPr lang="zh-CN" altLang="en-US" sz="3200" b="1">
-                <a:latin typeface="Times New Roman" panose="02020603050405020304"/>
-                <a:ea typeface="宋体" panose="02010600030101010101" pitchFamily="2" charset="-122"/>
-                <a:cs typeface="Times New Roman" panose="02020603050405020304"/>
-                <a:sym typeface="+mn-ea"/>
-              </a:rPr>
-              <a:t>实验环境</a:t>
-            </a:r>
-            <a:endParaRPr lang="zh-CN" altLang="en-US" sz="3200" b="1">
-              <a:latin typeface="Times New Roman" panose="02020603050405020304"/>
-              <a:ea typeface="宋体" panose="02010600030101010101" pitchFamily="2" charset="-122"/>
+              <a:ea typeface="SimSun" panose="02010600030101010101" pitchFamily="2" charset="-122"/>
               <a:cs typeface="Times New Roman" panose="02020603050405020304"/>
               <a:sym typeface="+mn-ea"/>
             </a:endParaRPr>
@@ -3937,8 +4089,8 @@
         </p:nvSpPr>
         <p:spPr>
           <a:xfrm>
-            <a:off x="981075" y="5373370"/>
-            <a:ext cx="2232000" cy="10795"/>
+            <a:off x="972000" y="5724000"/>
+            <a:ext cx="1044000" cy="10795"/>
           </a:xfrm>
           <a:custGeom>
             <a:avLst/>
@@ -4012,8 +4164,8 @@
         </p:nvSpPr>
         <p:spPr>
           <a:xfrm>
-            <a:off x="981075" y="2761615"/>
-            <a:ext cx="2232000" cy="10795"/>
+            <a:off x="972000" y="1836000"/>
+            <a:ext cx="1044000" cy="10795"/>
           </a:xfrm>
           <a:custGeom>
             <a:avLst/>
@@ -4087,8 +4239,8 @@
         </p:nvSpPr>
         <p:spPr>
           <a:xfrm>
-            <a:off x="960755" y="2873375"/>
-            <a:ext cx="22225" cy="2347595"/>
+            <a:off x="948690" y="1846580"/>
+            <a:ext cx="22225" cy="3852000"/>
           </a:xfrm>
           <a:custGeom>
             <a:avLst/>
@@ -4162,7 +4314,7 @@
         </p:nvSpPr>
         <p:spPr>
           <a:xfrm>
-            <a:off x="59690" y="3733165"/>
+            <a:off x="115570" y="3473450"/>
             <a:ext cx="1341755" cy="412115"/>
           </a:xfrm>
           <a:prstGeom prst="rect">
@@ -4176,93 +4328,10 @@
           </a:bodyPr>
           <a:p>
             <a:r>
-              <a:rPr lang="en-US" altLang="zh-CN" sz="2000"/>
-              <a:t>7.5cm</a:t>
-            </a:r>
-            <a:endParaRPr lang="en-US" altLang="zh-CN" sz="2000"/>
-          </a:p>
-        </p:txBody>
-      </p:sp>
-      <p:sp>
-        <p:nvSpPr>
-          <p:cNvPr id="14" name="任意多边形 13"/>
-          <p:cNvSpPr/>
-          <p:nvPr/>
-        </p:nvSpPr>
-        <p:spPr>
-          <a:xfrm>
-            <a:off x="2119630" y="1508125"/>
-            <a:ext cx="1379855" cy="1152525"/>
-          </a:xfrm>
-          <a:custGeom>
-            <a:avLst/>
-            <a:gdLst>
-              <a:gd name="connisteX0" fmla="*/ 1369060 w 1379855"/>
-              <a:gd name="connsiteY0" fmla="*/ 1152525 h 1152525"/>
-              <a:gd name="connisteX1" fmla="*/ 1379855 w 1379855"/>
-              <a:gd name="connsiteY1" fmla="*/ 21590 h 1152525"/>
-              <a:gd name="connisteX2" fmla="*/ 0 w 1379855"/>
-              <a:gd name="connsiteY2" fmla="*/ 0 h 1152525"/>
-            </a:gdLst>
-            <a:ahLst/>
-            <a:cxnLst>
-              <a:cxn ang="0">
-                <a:pos x="connisteX0" y="connsiteY0"/>
-              </a:cxn>
-              <a:cxn ang="0">
-                <a:pos x="connisteX1" y="connsiteY1"/>
-              </a:cxn>
-              <a:cxn ang="0">
-                <a:pos x="connisteX2" y="connsiteY2"/>
-              </a:cxn>
-            </a:cxnLst>
-            <a:rect l="l" t="t" r="r" b="b"/>
-            <a:pathLst>
-              <a:path w="1379855" h="1152525">
-                <a:moveTo>
-                  <a:pt x="1369060" y="1152525"/>
-                </a:moveTo>
-                <a:lnTo>
-                  <a:pt x="1379855" y="21590"/>
-                </a:lnTo>
-                <a:lnTo>
-                  <a:pt x="0" y="0"/>
-                </a:lnTo>
-              </a:path>
-            </a:pathLst>
-          </a:custGeom>
-          <a:noFill/>
-          <a:ln>
-            <a:solidFill>
-              <a:schemeClr val="tx1">
-                <a:lumMod val="85000"/>
-                <a:lumOff val="15000"/>
-              </a:schemeClr>
-            </a:solidFill>
-            <a:tailEnd type="oval"/>
-          </a:ln>
-        </p:spPr>
-        <p:style>
-          <a:lnRef idx="2">
-            <a:schemeClr val="accent1">
-              <a:lumMod val="75000"/>
-            </a:schemeClr>
-          </a:lnRef>
-          <a:fillRef idx="1">
-            <a:schemeClr val="accent1"/>
-          </a:fillRef>
-          <a:effectRef idx="0">
-            <a:srgbClr val="FFFFFF"/>
-          </a:effectRef>
-          <a:fontRef idx="minor">
-            <a:schemeClr val="lt1"/>
-          </a:fontRef>
-        </p:style>
-        <p:txBody>
-          <a:bodyPr rtlCol="0" anchor="ctr"/>
-          <a:p>
-            <a:pPr algn="ctr"/>
-            <a:endParaRPr lang="zh-CN" altLang="en-US"/>
+              <a:rPr lang="en-US" altLang="zh-CN"/>
+              <a:t>750mm</a:t>
+            </a:r>
+            <a:endParaRPr lang="en-US" altLang="zh-CN"/>
           </a:p>
         </p:txBody>
       </p:sp>
@@ -4274,8 +4343,8 @@
         </p:nvSpPr>
         <p:spPr>
           <a:xfrm>
-            <a:off x="316230" y="862965"/>
-            <a:ext cx="3048000" cy="645160"/>
+            <a:off x="316865" y="810260"/>
+            <a:ext cx="8481695" cy="368300"/>
           </a:xfrm>
           <a:prstGeom prst="rect">
             <a:avLst/>
@@ -4289,17 +4358,13 @@
           <a:p>
             <a:r>
               <a:rPr lang="en-US" altLang="zh-CN"/>
-              <a:t>Web Camera </a:t>
-            </a:r>
-            <a:r>
-              <a:rPr lang="zh-CN" altLang="en-US">
-                <a:ea typeface="宋体" panose="02010600030101010101" pitchFamily="2" charset="-122"/>
-              </a:rPr>
-              <a:t>俯视视角，收集视觉信息</a:t>
-            </a:r>
-            <a:endParaRPr lang="zh-CN" altLang="en-US">
-              <a:ea typeface="宋体" panose="02010600030101010101" pitchFamily="2" charset="-122"/>
-            </a:endParaRPr>
+              <a:t>An overhead web camera</a:t>
+            </a:r>
+            <a:r>
+              <a:rPr lang="en-US" altLang="zh-CN"/>
+              <a:t> captures visual data.</a:t>
+            </a:r>
+            <a:endParaRPr lang="en-US" altLang="zh-CN"/>
           </a:p>
         </p:txBody>
       </p:sp>
@@ -4312,7 +4377,7 @@
         <p:spPr>
           <a:xfrm>
             <a:off x="3582035" y="5965825"/>
-            <a:ext cx="3412490" cy="21590"/>
+            <a:ext cx="3060000" cy="21590"/>
           </a:xfrm>
           <a:custGeom>
             <a:avLst/>
@@ -4378,18 +4443,78 @@
           </a:p>
         </p:txBody>
       </p:sp>
+      <p:sp>
+        <p:nvSpPr>
+          <p:cNvPr id="21" name="文本框 20"/>
+          <p:cNvSpPr txBox="1"/>
+          <p:nvPr/>
+        </p:nvSpPr>
+        <p:spPr>
+          <a:xfrm>
+            <a:off x="6772910" y="5654040"/>
+            <a:ext cx="2157095" cy="645160"/>
+          </a:xfrm>
+          <a:prstGeom prst="rect">
+            <a:avLst/>
+          </a:prstGeom>
+          <a:noFill/>
+        </p:spPr>
+        <p:txBody>
+          <a:bodyPr wrap="square" rtlCol="0">
+            <a:spAutoFit/>
+          </a:bodyPr>
+          <a:p>
+            <a:r>
+              <a:rPr lang="en-US" altLang="zh-CN">
+                <a:ea typeface="SimSun" panose="02010600030101010101" pitchFamily="2" charset="-122"/>
+              </a:rPr>
+              <a:t>Initial hand-to-object distance: 30 mm</a:t>
+            </a:r>
+            <a:endParaRPr lang="en-US" altLang="zh-CN">
+              <a:ea typeface="SimSun" panose="02010600030101010101" pitchFamily="2" charset="-122"/>
+            </a:endParaRPr>
+          </a:p>
+        </p:txBody>
+      </p:sp>
+      <p:sp>
+        <p:nvSpPr>
+          <p:cNvPr id="22" name="文本框 21"/>
+          <p:cNvSpPr txBox="1"/>
+          <p:nvPr/>
+        </p:nvSpPr>
+        <p:spPr>
+          <a:xfrm>
+            <a:off x="3309620" y="5498465"/>
+            <a:ext cx="2986405" cy="410845"/>
+          </a:xfrm>
+          <a:prstGeom prst="rect">
+            <a:avLst/>
+          </a:prstGeom>
+          <a:noFill/>
+        </p:spPr>
+        <p:txBody>
+          <a:bodyPr wrap="square" rtlCol="0">
+            <a:noAutofit/>
+          </a:bodyPr>
+          <a:p>
+            <a:r>
+              <a:rPr lang="en-US" altLang="zh-CN"/>
+              <a:t>30mm</a:t>
+            </a:r>
+            <a:endParaRPr lang="en-US" altLang="zh-CN"/>
+          </a:p>
+        </p:txBody>
+      </p:sp>
       <p:cxnSp>
         <p:nvCxnSpPr>
-          <p:cNvPr id="19" name="直接箭头连接符 18"/>
-          <p:cNvCxnSpPr>
-            <a:endCxn id="18" idx="0"/>
-          </p:cNvCxnSpPr>
+          <p:cNvPr id="2" name="直接箭头连接符 1"/>
+          <p:cNvCxnSpPr/>
           <p:nvPr/>
         </p:nvCxnSpPr>
         <p:spPr>
-          <a:xfrm>
-            <a:off x="3571240" y="5477510"/>
-            <a:ext cx="10795" cy="488315"/>
+          <a:xfrm flipV="1">
+            <a:off x="3223260" y="5498465"/>
+            <a:ext cx="144780" cy="344170"/>
           </a:xfrm>
           <a:prstGeom prst="straightConnector1">
             <a:avLst/>
@@ -4423,71 +4548,76 @@
       </p:cxnSp>
       <p:sp>
         <p:nvSpPr>
-          <p:cNvPr id="21" name="文本框 20"/>
-          <p:cNvSpPr txBox="1"/>
+          <p:cNvPr id="3" name="任意多边形 2"/>
+          <p:cNvSpPr/>
           <p:nvPr/>
         </p:nvSpPr>
         <p:spPr>
           <a:xfrm>
-            <a:off x="6710045" y="5220970"/>
-            <a:ext cx="2059305" cy="645160"/>
+            <a:off x="2181225" y="1206500"/>
+            <a:ext cx="11430" cy="576000"/>
           </a:xfrm>
-          <a:prstGeom prst="rect">
+          <a:custGeom>
             <a:avLst/>
-          </a:prstGeom>
+            <a:gdLst>
+              <a:gd name="connisteX0" fmla="*/ 11430 w 11430"/>
+              <a:gd name="connsiteY0" fmla="*/ 427355 h 427355"/>
+              <a:gd name="connisteX1" fmla="*/ 0 w 11430"/>
+              <a:gd name="connsiteY1" fmla="*/ 0 h 427355"/>
+            </a:gdLst>
+            <a:ahLst/>
+            <a:cxnLst>
+              <a:cxn ang="0">
+                <a:pos x="connisteX0" y="connsiteY0"/>
+              </a:cxn>
+              <a:cxn ang="0">
+                <a:pos x="connisteX1" y="connsiteY1"/>
+              </a:cxn>
+            </a:cxnLst>
+            <a:rect l="l" t="t" r="r" b="b"/>
+            <a:pathLst>
+              <a:path w="11430" h="427355">
+                <a:moveTo>
+                  <a:pt x="11430" y="427355"/>
+                </a:moveTo>
+                <a:lnTo>
+                  <a:pt x="0" y="0"/>
+                </a:lnTo>
+              </a:path>
+            </a:pathLst>
+          </a:custGeom>
           <a:noFill/>
+          <a:ln>
+            <a:solidFill>
+              <a:schemeClr val="tx1">
+                <a:lumMod val="85000"/>
+                <a:lumOff val="15000"/>
+              </a:schemeClr>
+            </a:solidFill>
+            <a:tailEnd type="oval"/>
+          </a:ln>
         </p:spPr>
-        <p:txBody>
-          <a:bodyPr wrap="square" rtlCol="0">
-            <a:spAutoFit/>
-          </a:bodyPr>
-          <a:p>
-            <a:r>
-              <a:rPr lang="zh-CN" altLang="en-US"/>
-              <a:t>手部放置位置，正对物体</a:t>
-            </a:r>
-            <a:r>
-              <a:rPr lang="en-US" altLang="zh-CN"/>
-              <a:t>30mm</a:t>
-            </a:r>
-            <a:r>
-              <a:rPr lang="zh-CN" altLang="en-US">
-                <a:ea typeface="宋体" panose="02010600030101010101" pitchFamily="2" charset="-122"/>
-              </a:rPr>
-              <a:t>。</a:t>
-            </a:r>
-            <a:endParaRPr lang="zh-CN" altLang="en-US">
-              <a:ea typeface="宋体" panose="02010600030101010101" pitchFamily="2" charset="-122"/>
-            </a:endParaRPr>
-          </a:p>
-        </p:txBody>
-      </p:sp>
-      <p:sp>
-        <p:nvSpPr>
-          <p:cNvPr id="22" name="文本框 21"/>
-          <p:cNvSpPr txBox="1"/>
-          <p:nvPr/>
-        </p:nvSpPr>
-        <p:spPr>
-          <a:xfrm>
-            <a:off x="3582035" y="5554980"/>
-            <a:ext cx="2986405" cy="410845"/>
-          </a:xfrm>
-          <a:prstGeom prst="rect">
-            <a:avLst/>
-          </a:prstGeom>
-          <a:noFill/>
-        </p:spPr>
-        <p:txBody>
-          <a:bodyPr wrap="square" rtlCol="0">
-            <a:noAutofit/>
-          </a:bodyPr>
-          <a:p>
-            <a:r>
-              <a:rPr lang="en-US" altLang="zh-CN"/>
-              <a:t>30mm</a:t>
-            </a:r>
-            <a:endParaRPr lang="en-US" altLang="zh-CN"/>
+        <p:style>
+          <a:lnRef idx="2">
+            <a:schemeClr val="accent1">
+              <a:lumMod val="75000"/>
+            </a:schemeClr>
+          </a:lnRef>
+          <a:fillRef idx="1">
+            <a:schemeClr val="accent1"/>
+          </a:fillRef>
+          <a:effectRef idx="0">
+            <a:srgbClr val="FFFFFF"/>
+          </a:effectRef>
+          <a:fontRef idx="minor">
+            <a:schemeClr val="lt1"/>
+          </a:fontRef>
+        </p:style>
+        <p:txBody>
+          <a:bodyPr rtlCol="0" anchor="ctr"/>
+          <a:p>
+            <a:pPr algn="ctr"/>
+            <a:endParaRPr lang="zh-CN" altLang="en-US"/>
           </a:p>
         </p:txBody>
       </p:sp>
@@ -4506,7 +4636,99 @@
 </p:sld>
 </file>
 
-<file path=ppt/slides/slide3.xml><?xml version="1.0" encoding="utf-8"?>
+<file path=ppt/slides/slide10.xml><?xml version="1.0" encoding="utf-8"?>
+<p:sld xmlns:a="http://schemas.openxmlformats.org/drawingml/2006/main" xmlns:r="http://schemas.openxmlformats.org/officeDocument/2006/relationships" xmlns:p="http://schemas.openxmlformats.org/presentationml/2006/main">
+  <p:cSld>
+    <p:spTree>
+      <p:nvGrpSpPr>
+        <p:cNvPr id="1" name=""/>
+        <p:cNvGrpSpPr/>
+        <p:nvPr/>
+      </p:nvGrpSpPr>
+      <p:grpSpPr/>
+      <p:sp>
+        <p:nvSpPr>
+          <p:cNvPr id="2" name="文本框 1"/>
+          <p:cNvSpPr txBox="1"/>
+          <p:nvPr/>
+        </p:nvSpPr>
+        <p:spPr>
+          <a:xfrm>
+            <a:off x="0" y="279083"/>
+            <a:ext cx="5080000" cy="521970"/>
+          </a:xfrm>
+          <a:prstGeom prst="rect">
+            <a:avLst/>
+          </a:prstGeom>
+        </p:spPr>
+        <p:txBody>
+          <a:bodyPr>
+            <a:spAutoFit/>
+          </a:bodyPr>
+          <a:p>
+            <a:pPr algn="ctr"/>
+            <a:r>
+              <a:rPr lang="en-US" altLang="zh-CN" sz="2800" b="1"/>
+              <a:t>Experimental Participant 2</a:t>
+            </a:r>
+            <a:endParaRPr lang="en-US" altLang="zh-CN" sz="2800" b="1"/>
+          </a:p>
+        </p:txBody>
+      </p:sp>
+      <p:sp>
+        <p:nvSpPr>
+          <p:cNvPr id="5" name="文本框 4"/>
+          <p:cNvSpPr txBox="1"/>
+          <p:nvPr/>
+        </p:nvSpPr>
+        <p:spPr>
+          <a:xfrm>
+            <a:off x="450215" y="966470"/>
+            <a:ext cx="8335010" cy="1198880"/>
+          </a:xfrm>
+          <a:prstGeom prst="rect">
+            <a:avLst/>
+          </a:prstGeom>
+        </p:spPr>
+        <p:txBody>
+          <a:bodyPr wrap="square">
+            <a:spAutoFit/>
+          </a:bodyPr>
+          <a:p>
+            <a:r>
+              <a:rPr lang="en-US" altLang="zh-CN"/>
+              <a:t>To evaluate the system's performance on other participants, I recruited additional participants for testing.</a:t>
+            </a:r>
+            <a:endParaRPr lang="en-US" altLang="zh-CN"/>
+          </a:p>
+          <a:p>
+            <a:endParaRPr lang="en-US" altLang="zh-CN"/>
+          </a:p>
+          <a:p>
+            <a:r>
+              <a:rPr lang="en-US" altLang="zh-CN"/>
+              <a:t>Due to the program issue during the experiment, only two cube sizes were tested.</a:t>
+            </a:r>
+            <a:endParaRPr lang="en-US" altLang="zh-CN"/>
+          </a:p>
+        </p:txBody>
+      </p:sp>
+    </p:spTree>
+  </p:cSld>
+  <p:clrMapOvr>
+    <a:masterClrMapping/>
+  </p:clrMapOvr>
+  <p:timing>
+    <p:tnLst>
+      <p:par>
+        <p:cTn id="1" dur="indefinite" restart="never" nodeType="tmRoot"/>
+      </p:par>
+    </p:tnLst>
+  </p:timing>
+</p:sld>
+</file>
+
+<file path=ppt/slides/slide11.xml><?xml version="1.0" encoding="utf-8"?>
 <p:sld xmlns:a="http://schemas.openxmlformats.org/drawingml/2006/main" xmlns:r="http://schemas.openxmlformats.org/officeDocument/2006/relationships" xmlns:p="http://schemas.openxmlformats.org/presentationml/2006/main">
   <p:cSld>
     <p:spTree>
@@ -4541,17 +4763,613 @@
           <a:lstStyle/>
           <a:p>
             <a:r>
-              <a:rPr lang="zh-CN" altLang="en-US" sz="3200" b="1">
+              <a:rPr lang="en-US" altLang="zh-CN" sz="3200" b="1">
                 <a:latin typeface="Times New Roman" panose="02020603050405020304"/>
-                <a:ea typeface="宋体" panose="02010600030101010101" pitchFamily="2" charset="-122"/>
+                <a:ea typeface="Times New Roman" panose="02020603050405020304"/>
                 <a:cs typeface="Times New Roman" panose="02020603050405020304"/>
                 <a:sym typeface="+mn-ea"/>
               </a:rPr>
-              <a:t>实验环境</a:t>
-            </a:r>
-            <a:endParaRPr lang="zh-CN" altLang="en-US" sz="3200" b="1">
+              <a:t>Offline Validation</a:t>
+            </a:r>
+            <a:endParaRPr lang="en-US" altLang="zh-CN" sz="3200" b="1">
               <a:latin typeface="Times New Roman" panose="02020603050405020304"/>
-              <a:ea typeface="宋体" panose="02010600030101010101" pitchFamily="2" charset="-122"/>
+              <a:ea typeface="Times New Roman" panose="02020603050405020304"/>
+              <a:cs typeface="Times New Roman" panose="02020603050405020304"/>
+            </a:endParaRPr>
+          </a:p>
+        </p:txBody>
+      </p:sp>
+      <p:sp>
+        <p:nvSpPr>
+          <p:cNvPr id="16" name="文本框 15"/>
+          <p:cNvSpPr txBox="1"/>
+          <p:nvPr/>
+        </p:nvSpPr>
+        <p:spPr>
+          <a:xfrm>
+            <a:off x="275590" y="810260"/>
+            <a:ext cx="8523605" cy="645160"/>
+          </a:xfrm>
+          <a:prstGeom prst="rect">
+            <a:avLst/>
+          </a:prstGeom>
+          <a:noFill/>
+        </p:spPr>
+        <p:txBody>
+          <a:bodyPr wrap="square" rtlCol="0">
+            <a:spAutoFit/>
+          </a:bodyPr>
+          <a:p>
+            <a:r>
+              <a:rPr lang="en-US" altLang="zh-CN"/>
+              <a:t>9 trials were used to validation 2 type of cube size. Overall validation across 18 trials for three cube sizes.</a:t>
+            </a:r>
+            <a:endParaRPr lang="en-US" altLang="zh-CN"/>
+          </a:p>
+        </p:txBody>
+      </p:sp>
+      <p:grpSp>
+        <p:nvGrpSpPr>
+          <p:cNvPr id="19" name="组合 18"/>
+          <p:cNvGrpSpPr/>
+          <p:nvPr/>
+        </p:nvGrpSpPr>
+        <p:grpSpPr>
+          <a:xfrm>
+            <a:off x="0" y="2799080"/>
+            <a:ext cx="9144000" cy="3797300"/>
+            <a:chOff x="0" y="3354"/>
+            <a:chExt cx="14400" cy="5980"/>
+          </a:xfrm>
+        </p:grpSpPr>
+        <p:pic>
+          <p:nvPicPr>
+            <p:cNvPr id="17" name="图片 16" descr="C:/Users/Di/Desktop/ChatGPT 图像 2026年10月19日 13_41_40.pngChatGPT 图像 2026年10月19日 13_41_40"/>
+            <p:cNvPicPr>
+              <a:picLocks noChangeAspect="1"/>
+            </p:cNvPicPr>
+            <p:nvPr/>
+          </p:nvPicPr>
+          <p:blipFill>
+            <a:blip r:embed="rId1"/>
+            <a:srcRect t="7"/>
+            <a:stretch>
+              <a:fillRect/>
+            </a:stretch>
+          </p:blipFill>
+          <p:spPr>
+            <a:xfrm>
+              <a:off x="0" y="3354"/>
+              <a:ext cx="14400" cy="5400"/>
+            </a:xfrm>
+            <a:prstGeom prst="rect">
+              <a:avLst/>
+            </a:prstGeom>
+          </p:spPr>
+        </p:pic>
+        <p:sp>
+          <p:nvSpPr>
+            <p:cNvPr id="18" name="文本框 17"/>
+            <p:cNvSpPr txBox="1"/>
+            <p:nvPr/>
+          </p:nvSpPr>
+          <p:spPr>
+            <a:xfrm>
+              <a:off x="3600" y="8754"/>
+              <a:ext cx="7200" cy="580"/>
+            </a:xfrm>
+            <a:prstGeom prst="rect">
+              <a:avLst/>
+            </a:prstGeom>
+            <a:noFill/>
+          </p:spPr>
+          <p:txBody>
+            <a:bodyPr wrap="square" rtlCol="0" anchor="t">
+              <a:spAutoFit/>
+            </a:bodyPr>
+            <a:p>
+              <a:pPr algn="ctr"/>
+              <a:r>
+                <a:rPr lang="en-US" altLang="zh-CN"/>
+                <a:t>Overall validation performance</a:t>
+              </a:r>
+              <a:endParaRPr lang="en-US" altLang="zh-CN"/>
+            </a:p>
+          </p:txBody>
+        </p:sp>
+      </p:grpSp>
+      <p:sp>
+        <p:nvSpPr>
+          <p:cNvPr id="20" name="文本框 19"/>
+          <p:cNvSpPr txBox="1"/>
+          <p:nvPr/>
+        </p:nvSpPr>
+        <p:spPr>
+          <a:xfrm>
+            <a:off x="633730" y="1455420"/>
+            <a:ext cx="4572000" cy="1170305"/>
+          </a:xfrm>
+          <a:prstGeom prst="rect">
+            <a:avLst/>
+          </a:prstGeom>
+          <a:noFill/>
+        </p:spPr>
+        <p:txBody>
+          <a:bodyPr wrap="square" rtlCol="0" anchor="t">
+            <a:spAutoFit/>
+          </a:bodyPr>
+          <a:p>
+            <a:pPr marL="285750" indent="-285750">
+              <a:lnSpc>
+                <a:spcPct val="130000"/>
+              </a:lnSpc>
+              <a:buFont typeface="Wingdings" panose="05000000000000000000" charset="0"/>
+              <a:buChar char="l"/>
+            </a:pPr>
+            <a:r>
+              <a:rPr lang="en-US" altLang="zh-CN">
+                <a:sym typeface="+mn-ea"/>
+              </a:rPr>
+              <a:t>MAE : 2.89</a:t>
+            </a:r>
+            <a:endParaRPr lang="en-US" altLang="zh-CN">
+              <a:sym typeface="+mn-ea"/>
+            </a:endParaRPr>
+          </a:p>
+          <a:p>
+            <a:pPr marL="285750" indent="-285750">
+              <a:lnSpc>
+                <a:spcPct val="130000"/>
+              </a:lnSpc>
+              <a:buFont typeface="Wingdings" panose="05000000000000000000" charset="0"/>
+              <a:buChar char="l"/>
+            </a:pPr>
+            <a:r>
+              <a:rPr lang="en-US" altLang="zh-CN">
+                <a:sym typeface="+mn-ea"/>
+              </a:rPr>
+              <a:t>RMSE : 4.17</a:t>
+            </a:r>
+            <a:endParaRPr lang="en-US" altLang="zh-CN">
+              <a:sym typeface="+mn-ea"/>
+            </a:endParaRPr>
+          </a:p>
+          <a:p>
+            <a:pPr marL="285750" indent="-285750">
+              <a:lnSpc>
+                <a:spcPct val="130000"/>
+              </a:lnSpc>
+              <a:buFont typeface="Wingdings" panose="05000000000000000000" charset="0"/>
+              <a:buChar char="l"/>
+            </a:pPr>
+            <a:r>
+              <a:rPr lang="en-US" altLang="zh-CN">
+                <a:sym typeface="+mn-ea"/>
+              </a:rPr>
+              <a:t>R² : 0.928</a:t>
+            </a:r>
+            <a:endParaRPr lang="en-US" altLang="zh-CN">
+              <a:sym typeface="+mn-ea"/>
+            </a:endParaRPr>
+          </a:p>
+        </p:txBody>
+      </p:sp>
+    </p:spTree>
+  </p:cSld>
+  <p:clrMapOvr>
+    <a:masterClrMapping/>
+  </p:clrMapOvr>
+  <p:timing>
+    <p:tnLst>
+      <p:par>
+        <p:cTn id="1" dur="indefinite" restart="never" nodeType="tmRoot"/>
+      </p:par>
+    </p:tnLst>
+  </p:timing>
+</p:sld>
+</file>
+
+<file path=ppt/slides/slide12.xml><?xml version="1.0" encoding="utf-8"?>
+<p:sld xmlns:a="http://schemas.openxmlformats.org/drawingml/2006/main" xmlns:r="http://schemas.openxmlformats.org/officeDocument/2006/relationships" xmlns:p="http://schemas.openxmlformats.org/presentationml/2006/main">
+  <p:cSld>
+    <p:spTree>
+      <p:nvGrpSpPr>
+        <p:cNvPr id="1" name=""/>
+        <p:cNvGrpSpPr/>
+        <p:nvPr/>
+      </p:nvGrpSpPr>
+      <p:grpSpPr/>
+      <p:pic>
+        <p:nvPicPr>
+          <p:cNvPr id="2" name="图片 1" descr="C:/Users/Di/Desktop/03_overall_phase_comparison.png03_overall_phase_comparison"/>
+          <p:cNvPicPr>
+            <a:picLocks noChangeAspect="1"/>
+          </p:cNvPicPr>
+          <p:nvPr/>
+        </p:nvPicPr>
+        <p:blipFill>
+          <a:blip r:embed="rId1"/>
+          <a:srcRect/>
+          <a:stretch>
+            <a:fillRect/>
+          </a:stretch>
+        </p:blipFill>
+        <p:spPr>
+          <a:xfrm>
+            <a:off x="1041400" y="1819275"/>
+            <a:ext cx="7061200" cy="4854575"/>
+          </a:xfrm>
+          <a:prstGeom prst="rect">
+            <a:avLst/>
+          </a:prstGeom>
+        </p:spPr>
+      </p:pic>
+      <p:sp>
+        <p:nvSpPr>
+          <p:cNvPr id="6" name="文本框 5"/>
+          <p:cNvSpPr>
+            <a:spLocks noGrp="1"/>
+          </p:cNvSpPr>
+          <p:nvPr/>
+        </p:nvSpPr>
+        <p:spPr>
+          <a:xfrm>
+            <a:off x="275590" y="226695"/>
+            <a:ext cx="8522970" cy="583565"/>
+          </a:xfrm>
+          <a:prstGeom prst="rect">
+            <a:avLst/>
+          </a:prstGeom>
+          <a:noFill/>
+        </p:spPr>
+        <p:txBody>
+          <a:bodyPr wrap="square">
+            <a:spAutoFit/>
+          </a:bodyPr>
+          <a:lstStyle/>
+          <a:p>
+            <a:r>
+              <a:rPr lang="en-US" altLang="zh-CN" sz="3200" b="1">
+                <a:latin typeface="Times New Roman" panose="02020603050405020304"/>
+                <a:ea typeface="Times New Roman" panose="02020603050405020304"/>
+                <a:cs typeface="Times New Roman" panose="02020603050405020304"/>
+                <a:sym typeface="+mn-ea"/>
+              </a:rPr>
+              <a:t>Offline Validation</a:t>
+            </a:r>
+            <a:endParaRPr lang="en-US" altLang="zh-CN" sz="3200" b="1">
+              <a:latin typeface="Times New Roman" panose="02020603050405020304"/>
+              <a:ea typeface="Times New Roman" panose="02020603050405020304"/>
+              <a:cs typeface="Times New Roman" panose="02020603050405020304"/>
+            </a:endParaRPr>
+          </a:p>
+        </p:txBody>
+      </p:sp>
+    </p:spTree>
+  </p:cSld>
+  <p:clrMapOvr>
+    <a:masterClrMapping/>
+  </p:clrMapOvr>
+  <p:timing>
+    <p:tnLst>
+      <p:par>
+        <p:cTn id="1" dur="indefinite" restart="never" nodeType="tmRoot"/>
+      </p:par>
+    </p:tnLst>
+  </p:timing>
+</p:sld>
+</file>
+
+<file path=ppt/slides/slide13.xml><?xml version="1.0" encoding="utf-8"?>
+<p:sld xmlns:a="http://schemas.openxmlformats.org/drawingml/2006/main" xmlns:r="http://schemas.openxmlformats.org/officeDocument/2006/relationships" xmlns:p="http://schemas.openxmlformats.org/presentationml/2006/main">
+  <p:cSld>
+    <p:spTree>
+      <p:nvGrpSpPr>
+        <p:cNvPr id="1" name=""/>
+        <p:cNvGrpSpPr/>
+        <p:nvPr/>
+      </p:nvGrpSpPr>
+      <p:grpSpPr/>
+      <p:sp>
+        <p:nvSpPr>
+          <p:cNvPr id="6" name="文本框 5"/>
+          <p:cNvSpPr>
+            <a:spLocks noGrp="1"/>
+          </p:cNvSpPr>
+          <p:nvPr/>
+        </p:nvSpPr>
+        <p:spPr>
+          <a:xfrm>
+            <a:off x="275590" y="226695"/>
+            <a:ext cx="8522970" cy="583565"/>
+          </a:xfrm>
+          <a:prstGeom prst="rect">
+            <a:avLst/>
+          </a:prstGeom>
+          <a:noFill/>
+        </p:spPr>
+        <p:txBody>
+          <a:bodyPr wrap="square">
+            <a:spAutoFit/>
+          </a:bodyPr>
+          <a:lstStyle/>
+          <a:p>
+            <a:r>
+              <a:rPr lang="en-US" altLang="zh-CN" sz="3200" b="1">
+                <a:latin typeface="Times New Roman" panose="02020603050405020304"/>
+                <a:ea typeface="Times New Roman" panose="02020603050405020304"/>
+                <a:cs typeface="Times New Roman" panose="02020603050405020304"/>
+                <a:sym typeface="+mn-ea"/>
+              </a:rPr>
+              <a:t>Real-Time Experiment</a:t>
+            </a:r>
+            <a:endParaRPr lang="en-US" altLang="zh-CN" sz="3200" b="1">
+              <a:latin typeface="Times New Roman" panose="02020603050405020304"/>
+              <a:ea typeface="Times New Roman" panose="02020603050405020304"/>
+              <a:cs typeface="Times New Roman" panose="02020603050405020304"/>
+            </a:endParaRPr>
+          </a:p>
+        </p:txBody>
+      </p:sp>
+      <p:pic>
+        <p:nvPicPr>
+          <p:cNvPr id="5" name="图片 4" descr="C:/Users/Di/Desktop/05_per_grasp_window5_metrics.png05_per_grasp_window5_metrics"/>
+          <p:cNvPicPr>
+            <a:picLocks noChangeAspect="1"/>
+          </p:cNvPicPr>
+          <p:nvPr/>
+        </p:nvPicPr>
+        <p:blipFill>
+          <a:blip r:embed="rId1"/>
+          <a:srcRect b="7"/>
+          <a:stretch>
+            <a:fillRect/>
+          </a:stretch>
+        </p:blipFill>
+        <p:spPr>
+          <a:xfrm>
+            <a:off x="0" y="3101340"/>
+            <a:ext cx="9144000" cy="3048000"/>
+          </a:xfrm>
+          <a:prstGeom prst="rect">
+            <a:avLst/>
+          </a:prstGeom>
+        </p:spPr>
+      </p:pic>
+      <p:sp>
+        <p:nvSpPr>
+          <p:cNvPr id="2" name="文本框 1"/>
+          <p:cNvSpPr txBox="1"/>
+          <p:nvPr/>
+        </p:nvSpPr>
+        <p:spPr>
+          <a:xfrm>
+            <a:off x="275590" y="929005"/>
+            <a:ext cx="8523605" cy="368300"/>
+          </a:xfrm>
+          <a:prstGeom prst="rect">
+            <a:avLst/>
+          </a:prstGeom>
+          <a:noFill/>
+        </p:spPr>
+        <p:txBody>
+          <a:bodyPr wrap="square" rtlCol="0">
+            <a:spAutoFit/>
+          </a:bodyPr>
+          <a:p>
+            <a:r>
+              <a:rPr lang="en-US" altLang="zh-CN">
+                <a:ea typeface="SimSun" panose="02010600030101010101" pitchFamily="2" charset="-122"/>
+              </a:rPr>
+              <a:t>Performance </a:t>
+            </a:r>
+            <a:r>
+              <a:rPr lang="en-US" altLang="zh-CN"/>
+              <a:t>comparison </a:t>
+            </a:r>
+            <a:r>
+              <a:rPr lang="en-US" altLang="zh-CN">
+                <a:ea typeface="SimSun" panose="02010600030101010101" pitchFamily="2" charset="-122"/>
+              </a:rPr>
+              <a:t>across 6 real-time </a:t>
+            </a:r>
+            <a:r>
+              <a:rPr lang="en-US" altLang="zh-CN"/>
+              <a:t>e</a:t>
+            </a:r>
+            <a:r>
+              <a:rPr lang="en-US" altLang="zh-CN"/>
+              <a:t>xperiments</a:t>
+            </a:r>
+            <a:endParaRPr lang="en-US" altLang="zh-CN"/>
+          </a:p>
+        </p:txBody>
+      </p:sp>
+    </p:spTree>
+  </p:cSld>
+  <p:clrMapOvr>
+    <a:masterClrMapping/>
+  </p:clrMapOvr>
+  <p:timing>
+    <p:tnLst>
+      <p:par>
+        <p:cTn id="1" dur="indefinite" restart="never" nodeType="tmRoot"/>
+      </p:par>
+    </p:tnLst>
+  </p:timing>
+</p:sld>
+</file>
+
+<file path=ppt/slides/slide14.xml><?xml version="1.0" encoding="utf-8"?>
+<p:sld xmlns:a="http://schemas.openxmlformats.org/drawingml/2006/main" xmlns:r="http://schemas.openxmlformats.org/officeDocument/2006/relationships" xmlns:p="http://schemas.openxmlformats.org/presentationml/2006/main">
+  <p:cSld>
+    <p:spTree>
+      <p:nvGrpSpPr>
+        <p:cNvPr id="1" name=""/>
+        <p:cNvGrpSpPr/>
+        <p:nvPr/>
+      </p:nvGrpSpPr>
+      <p:grpSpPr/>
+      <p:sp>
+        <p:nvSpPr>
+          <p:cNvPr id="6" name="文本框 5"/>
+          <p:cNvSpPr>
+            <a:spLocks noGrp="1"/>
+          </p:cNvSpPr>
+          <p:nvPr/>
+        </p:nvSpPr>
+        <p:spPr>
+          <a:xfrm>
+            <a:off x="275590" y="226695"/>
+            <a:ext cx="8522970" cy="583565"/>
+          </a:xfrm>
+          <a:prstGeom prst="rect">
+            <a:avLst/>
+          </a:prstGeom>
+          <a:noFill/>
+        </p:spPr>
+        <p:txBody>
+          <a:bodyPr wrap="square">
+            <a:spAutoFit/>
+          </a:bodyPr>
+          <a:lstStyle/>
+          <a:p>
+            <a:r>
+              <a:rPr lang="en-US" altLang="zh-CN" sz="3200" b="1">
+                <a:latin typeface="Times New Roman" panose="02020603050405020304"/>
+                <a:ea typeface="Times New Roman" panose="02020603050405020304"/>
+                <a:cs typeface="Times New Roman" panose="02020603050405020304"/>
+                <a:sym typeface="+mn-ea"/>
+              </a:rPr>
+              <a:t>Real-Time Experiment</a:t>
+            </a:r>
+            <a:endParaRPr lang="en-US" altLang="zh-CN" sz="3200" b="1">
+              <a:latin typeface="Times New Roman" panose="02020603050405020304"/>
+              <a:ea typeface="Times New Roman" panose="02020603050405020304"/>
+              <a:cs typeface="Times New Roman" panose="02020603050405020304"/>
+            </a:endParaRPr>
+          </a:p>
+        </p:txBody>
+      </p:sp>
+      <p:sp>
+        <p:nvSpPr>
+          <p:cNvPr id="3" name="文本框 2"/>
+          <p:cNvSpPr txBox="1"/>
+          <p:nvPr/>
+        </p:nvSpPr>
+        <p:spPr>
+          <a:xfrm>
+            <a:off x="275590" y="941070"/>
+            <a:ext cx="3048000" cy="368300"/>
+          </a:xfrm>
+          <a:prstGeom prst="rect">
+            <a:avLst/>
+          </a:prstGeom>
+          <a:noFill/>
+        </p:spPr>
+        <p:txBody>
+          <a:bodyPr wrap="square" rtlCol="0">
+            <a:spAutoFit/>
+          </a:bodyPr>
+          <a:p>
+            <a:r>
+              <a:rPr lang="en-US" altLang="zh-CN">
+                <a:ea typeface="SimSun" panose="02010600030101010101" pitchFamily="2" charset="-122"/>
+              </a:rPr>
+              <a:t>Three phase comparison</a:t>
+            </a:r>
+            <a:endParaRPr lang="en-US" altLang="zh-CN">
+              <a:ea typeface="SimSun" panose="02010600030101010101" pitchFamily="2" charset="-122"/>
+            </a:endParaRPr>
+          </a:p>
+        </p:txBody>
+      </p:sp>
+      <p:pic>
+        <p:nvPicPr>
+          <p:cNvPr id="4" name="图片 3" descr="C:/Users/Di/Desktop/ChatGPT 图像 2026年10月19日 14_44_24.pngChatGPT 图像 2026年10月19日 14_44_24"/>
+          <p:cNvPicPr>
+            <a:picLocks noChangeAspect="1"/>
+          </p:cNvPicPr>
+          <p:nvPr/>
+        </p:nvPicPr>
+        <p:blipFill>
+          <a:blip r:embed="rId1"/>
+          <a:srcRect/>
+          <a:stretch>
+            <a:fillRect/>
+          </a:stretch>
+        </p:blipFill>
+        <p:spPr>
+          <a:xfrm>
+            <a:off x="879475" y="1828800"/>
+            <a:ext cx="7315200" cy="5029200"/>
+          </a:xfrm>
+          <a:prstGeom prst="rect">
+            <a:avLst/>
+          </a:prstGeom>
+        </p:spPr>
+      </p:pic>
+    </p:spTree>
+  </p:cSld>
+  <p:clrMapOvr>
+    <a:masterClrMapping/>
+  </p:clrMapOvr>
+  <p:timing>
+    <p:tnLst>
+      <p:par>
+        <p:cTn id="1" dur="indefinite" restart="never" nodeType="tmRoot"/>
+      </p:par>
+    </p:tnLst>
+  </p:timing>
+</p:sld>
+</file>
+
+<file path=ppt/slides/slide2.xml><?xml version="1.0" encoding="utf-8"?>
+<p:sld xmlns:a="http://schemas.openxmlformats.org/drawingml/2006/main" xmlns:r="http://schemas.openxmlformats.org/officeDocument/2006/relationships" xmlns:p="http://schemas.openxmlformats.org/presentationml/2006/main">
+  <p:cSld>
+    <p:spTree>
+      <p:nvGrpSpPr>
+        <p:cNvPr id="1" name=""/>
+        <p:cNvGrpSpPr/>
+        <p:nvPr/>
+      </p:nvGrpSpPr>
+      <p:grpSpPr/>
+      <p:sp>
+        <p:nvSpPr>
+          <p:cNvPr id="6" name="文本框 5"/>
+          <p:cNvSpPr>
+            <a:spLocks noGrp="1"/>
+          </p:cNvSpPr>
+          <p:nvPr/>
+        </p:nvSpPr>
+        <p:spPr>
+          <a:xfrm>
+            <a:off x="275590" y="226695"/>
+            <a:ext cx="8522970" cy="583565"/>
+          </a:xfrm>
+          <a:prstGeom prst="rect">
+            <a:avLst/>
+          </a:prstGeom>
+          <a:noFill/>
+        </p:spPr>
+        <p:txBody>
+          <a:bodyPr wrap="square">
+            <a:spAutoFit/>
+          </a:bodyPr>
+          <a:lstStyle/>
+          <a:p>
+            <a:r>
+              <a:rPr lang="en-US" altLang="zh-CN" sz="3200" b="1">
+                <a:latin typeface="Times New Roman" panose="02020603050405020304"/>
+                <a:ea typeface="SimSun" panose="02010600030101010101" pitchFamily="2" charset="-122"/>
+                <a:cs typeface="Times New Roman" panose="02020603050405020304"/>
+                <a:sym typeface="+mn-ea"/>
+              </a:rPr>
+              <a:t>Experimental Sample</a:t>
+            </a:r>
+            <a:endParaRPr lang="en-US" altLang="zh-CN" sz="3200" b="1">
+              <a:latin typeface="Times New Roman" panose="02020603050405020304"/>
+              <a:ea typeface="SimSun" panose="02010600030101010101" pitchFamily="2" charset="-122"/>
               <a:cs typeface="Times New Roman" panose="02020603050405020304"/>
               <a:sym typeface="+mn-ea"/>
             </a:endParaRPr>
@@ -4581,7 +5399,7 @@
         </p:blipFill>
         <p:spPr>
           <a:xfrm>
-            <a:off x="1163955" y="1711960"/>
+            <a:off x="1163955" y="2115185"/>
             <a:ext cx="6745605" cy="4613910"/>
           </a:xfrm>
           <a:prstGeom prst="rect">
@@ -4589,6 +5407,355 @@
           </a:prstGeom>
         </p:spPr>
       </p:pic>
+      <p:sp>
+        <p:nvSpPr>
+          <p:cNvPr id="2" name="文本框 1"/>
+          <p:cNvSpPr txBox="1"/>
+          <p:nvPr/>
+        </p:nvSpPr>
+        <p:spPr>
+          <a:xfrm>
+            <a:off x="1163955" y="1769745"/>
+            <a:ext cx="3048000" cy="368300"/>
+          </a:xfrm>
+          <a:prstGeom prst="rect">
+            <a:avLst/>
+          </a:prstGeom>
+          <a:noFill/>
+        </p:spPr>
+        <p:txBody>
+          <a:bodyPr wrap="square" rtlCol="0">
+            <a:spAutoFit/>
+          </a:bodyPr>
+          <a:p>
+            <a:r>
+              <a:rPr lang="en-US" altLang="zh-CN"/>
+              <a:t>Camera View:</a:t>
+            </a:r>
+            <a:endParaRPr lang="en-US" altLang="zh-CN"/>
+          </a:p>
+        </p:txBody>
+      </p:sp>
+      <p:sp>
+        <p:nvSpPr>
+          <p:cNvPr id="3" name="文本框 2"/>
+          <p:cNvSpPr txBox="1"/>
+          <p:nvPr/>
+        </p:nvSpPr>
+        <p:spPr>
+          <a:xfrm>
+            <a:off x="1046480" y="925830"/>
+            <a:ext cx="1504315" cy="368300"/>
+          </a:xfrm>
+          <a:prstGeom prst="rect">
+            <a:avLst/>
+          </a:prstGeom>
+          <a:noFill/>
+        </p:spPr>
+        <p:txBody>
+          <a:bodyPr wrap="square" rtlCol="0">
+            <a:spAutoFit/>
+          </a:bodyPr>
+          <a:p>
+            <a:pPr algn="ctr"/>
+            <a:r>
+              <a:rPr lang="en-US" altLang="zh-CN">
+                <a:ea typeface="SimSun" panose="02010600030101010101" pitchFamily="2" charset="-122"/>
+              </a:rPr>
+              <a:t>Initial Phase</a:t>
+            </a:r>
+            <a:endParaRPr lang="en-US">
+              <a:ea typeface="SimSun" panose="02010600030101010101" pitchFamily="2" charset="-122"/>
+            </a:endParaRPr>
+          </a:p>
+        </p:txBody>
+      </p:sp>
+      <p:sp>
+        <p:nvSpPr>
+          <p:cNvPr id="4" name="文本框 3"/>
+          <p:cNvSpPr txBox="1"/>
+          <p:nvPr/>
+        </p:nvSpPr>
+        <p:spPr>
+          <a:xfrm>
+            <a:off x="1151255" y="1294130"/>
+            <a:ext cx="1143635" cy="337185"/>
+          </a:xfrm>
+          <a:prstGeom prst="rect">
+            <a:avLst/>
+          </a:prstGeom>
+        </p:spPr>
+        <p:txBody>
+          <a:bodyPr wrap="square">
+            <a:spAutoFit/>
+          </a:bodyPr>
+          <a:p>
+            <a:pPr algn="ctr"/>
+            <a:r>
+              <a:rPr lang="en-US" altLang="zh-CN" sz="1600">
+                <a:solidFill>
+                  <a:srgbClr val="6E6E6E"/>
+                </a:solidFill>
+              </a:rPr>
+              <a:t>10 frames</a:t>
+            </a:r>
+            <a:endParaRPr lang="en-US" altLang="zh-CN" sz="1600">
+              <a:solidFill>
+                <a:srgbClr val="6E6E6E"/>
+              </a:solidFill>
+            </a:endParaRPr>
+          </a:p>
+        </p:txBody>
+      </p:sp>
+      <p:sp>
+        <p:nvSpPr>
+          <p:cNvPr id="5" name="右箭头 4"/>
+          <p:cNvSpPr/>
+          <p:nvPr/>
+        </p:nvSpPr>
+        <p:spPr>
+          <a:xfrm>
+            <a:off x="2667000" y="1160145"/>
+            <a:ext cx="658495" cy="253365"/>
+          </a:xfrm>
+          <a:prstGeom prst="rightArrow">
+            <a:avLst>
+              <a:gd name="adj1" fmla="val 50000"/>
+              <a:gd name="adj2" fmla="val 86215"/>
+            </a:avLst>
+          </a:prstGeom>
+          <a:solidFill>
+            <a:srgbClr val="00B050"/>
+          </a:solidFill>
+          <a:ln>
+            <a:noFill/>
+            <a:tailEnd type="oval"/>
+          </a:ln>
+        </p:spPr>
+        <p:style>
+          <a:lnRef idx="2">
+            <a:schemeClr val="accent1">
+              <a:lumMod val="75000"/>
+            </a:schemeClr>
+          </a:lnRef>
+          <a:fillRef idx="1">
+            <a:schemeClr val="accent1"/>
+          </a:fillRef>
+          <a:effectRef idx="0">
+            <a:srgbClr val="FFFFFF"/>
+          </a:effectRef>
+          <a:fontRef idx="minor">
+            <a:schemeClr val="lt1"/>
+          </a:fontRef>
+        </p:style>
+        <p:txBody>
+          <a:bodyPr rtlCol="0" anchor="ctr"/>
+          <a:p>
+            <a:pPr algn="ctr"/>
+            <a:endParaRPr lang="zh-CN" altLang="en-US"/>
+          </a:p>
+        </p:txBody>
+      </p:sp>
+      <p:sp>
+        <p:nvSpPr>
+          <p:cNvPr id="7" name="文本框 6"/>
+          <p:cNvSpPr txBox="1"/>
+          <p:nvPr/>
+        </p:nvSpPr>
+        <p:spPr>
+          <a:xfrm>
+            <a:off x="3441700" y="925830"/>
+            <a:ext cx="1919605" cy="368300"/>
+          </a:xfrm>
+          <a:prstGeom prst="rect">
+            <a:avLst/>
+          </a:prstGeom>
+          <a:noFill/>
+        </p:spPr>
+        <p:txBody>
+          <a:bodyPr wrap="square" rtlCol="0">
+            <a:spAutoFit/>
+          </a:bodyPr>
+          <a:p>
+            <a:pPr algn="ctr"/>
+            <a:r>
+              <a:rPr lang="en-US" altLang="zh-CN">
+                <a:ea typeface="SimSun" panose="02010600030101010101" pitchFamily="2" charset="-122"/>
+              </a:rPr>
+              <a:t>Grasping Phase</a:t>
+            </a:r>
+            <a:endParaRPr lang="en-US" altLang="zh-CN">
+              <a:ea typeface="SimSun" panose="02010600030101010101" pitchFamily="2" charset="-122"/>
+            </a:endParaRPr>
+          </a:p>
+        </p:txBody>
+      </p:sp>
+      <p:sp>
+        <p:nvSpPr>
+          <p:cNvPr id="9" name="右箭头 8"/>
+          <p:cNvSpPr/>
+          <p:nvPr/>
+        </p:nvSpPr>
+        <p:spPr>
+          <a:xfrm>
+            <a:off x="5588000" y="1160145"/>
+            <a:ext cx="658495" cy="253365"/>
+          </a:xfrm>
+          <a:prstGeom prst="rightArrow">
+            <a:avLst>
+              <a:gd name="adj1" fmla="val 50000"/>
+              <a:gd name="adj2" fmla="val 86215"/>
+            </a:avLst>
+          </a:prstGeom>
+          <a:solidFill>
+            <a:srgbClr val="00B050"/>
+          </a:solidFill>
+          <a:ln>
+            <a:noFill/>
+            <a:tailEnd type="oval"/>
+          </a:ln>
+        </p:spPr>
+        <p:style>
+          <a:lnRef idx="2">
+            <a:schemeClr val="accent1">
+              <a:lumMod val="75000"/>
+            </a:schemeClr>
+          </a:lnRef>
+          <a:fillRef idx="1">
+            <a:schemeClr val="accent1"/>
+          </a:fillRef>
+          <a:effectRef idx="0">
+            <a:srgbClr val="FFFFFF"/>
+          </a:effectRef>
+          <a:fontRef idx="minor">
+            <a:schemeClr val="lt1"/>
+          </a:fontRef>
+        </p:style>
+        <p:txBody>
+          <a:bodyPr rtlCol="0" anchor="ctr"/>
+          <a:p>
+            <a:pPr algn="ctr"/>
+            <a:endParaRPr lang="zh-CN" altLang="en-US"/>
+          </a:p>
+        </p:txBody>
+      </p:sp>
+      <p:sp>
+        <p:nvSpPr>
+          <p:cNvPr id="10" name="文本框 9"/>
+          <p:cNvSpPr txBox="1"/>
+          <p:nvPr/>
+        </p:nvSpPr>
+        <p:spPr>
+          <a:xfrm>
+            <a:off x="3634105" y="1288415"/>
+            <a:ext cx="1612900" cy="337185"/>
+          </a:xfrm>
+          <a:prstGeom prst="rect">
+            <a:avLst/>
+          </a:prstGeom>
+        </p:spPr>
+        <p:txBody>
+          <a:bodyPr wrap="square">
+            <a:spAutoFit/>
+          </a:bodyPr>
+          <a:p>
+            <a:pPr algn="ctr">
+              <a:buClrTx/>
+              <a:buSzTx/>
+              <a:buFontTx/>
+            </a:pPr>
+            <a:r>
+              <a:rPr lang="en-US" altLang="zh-CN" sz="1600">
+                <a:solidFill>
+                  <a:srgbClr val="6E6E6E"/>
+                </a:solidFill>
+              </a:rPr>
+              <a:t>Variable duration</a:t>
+            </a:r>
+            <a:endParaRPr lang="en-US" altLang="zh-CN" sz="1600">
+              <a:solidFill>
+                <a:srgbClr val="6E6E6E"/>
+              </a:solidFill>
+            </a:endParaRPr>
+          </a:p>
+        </p:txBody>
+      </p:sp>
+      <p:sp>
+        <p:nvSpPr>
+          <p:cNvPr id="11" name="文本框 10"/>
+          <p:cNvSpPr txBox="1"/>
+          <p:nvPr/>
+        </p:nvSpPr>
+        <p:spPr>
+          <a:xfrm>
+            <a:off x="6137910" y="925830"/>
+            <a:ext cx="1919605" cy="368300"/>
+          </a:xfrm>
+          <a:prstGeom prst="rect">
+            <a:avLst/>
+          </a:prstGeom>
+          <a:noFill/>
+        </p:spPr>
+        <p:txBody>
+          <a:bodyPr wrap="square" rtlCol="0">
+            <a:spAutoFit/>
+          </a:bodyPr>
+          <a:p>
+            <a:pPr algn="ctr"/>
+            <a:r>
+              <a:rPr lang="en-US" altLang="zh-CN">
+                <a:ea typeface="SimSun" panose="02010600030101010101" pitchFamily="2" charset="-122"/>
+              </a:rPr>
+              <a:t>Hold Phase</a:t>
+            </a:r>
+            <a:endParaRPr lang="en-US" altLang="zh-CN">
+              <a:ea typeface="SimSun" panose="02010600030101010101" pitchFamily="2" charset="-122"/>
+            </a:endParaRPr>
+          </a:p>
+        </p:txBody>
+      </p:sp>
+      <p:sp>
+        <p:nvSpPr>
+          <p:cNvPr id="12" name="文本框 11"/>
+          <p:cNvSpPr txBox="1"/>
+          <p:nvPr/>
+        </p:nvSpPr>
+        <p:spPr>
+          <a:xfrm>
+            <a:off x="6330315" y="1288415"/>
+            <a:ext cx="1612900" cy="337185"/>
+          </a:xfrm>
+          <a:prstGeom prst="rect">
+            <a:avLst/>
+          </a:prstGeom>
+        </p:spPr>
+        <p:txBody>
+          <a:bodyPr wrap="square">
+            <a:spAutoFit/>
+          </a:bodyPr>
+          <a:p>
+            <a:pPr algn="ctr">
+              <a:buClrTx/>
+              <a:buSzTx/>
+              <a:buFontTx/>
+            </a:pPr>
+            <a:r>
+              <a:rPr lang="en-US" altLang="zh-CN" sz="1600">
+                <a:solidFill>
+                  <a:srgbClr val="6E6E6E"/>
+                </a:solidFill>
+                <a:sym typeface="+mn-ea"/>
+              </a:rPr>
+              <a:t>20 frames</a:t>
+            </a:r>
+            <a:endParaRPr lang="en-US" altLang="zh-CN" sz="1600">
+              <a:solidFill>
+                <a:srgbClr val="6E6E6E"/>
+              </a:solidFill>
+            </a:endParaRPr>
+          </a:p>
+        </p:txBody>
+      </p:sp>
     </p:spTree>
   </p:cSld>
   <p:clrMapOvr>
@@ -4677,7 +5844,7 @@
 </p:sld>
 </file>
 
-<file path=ppt/slides/slide4.xml><?xml version="1.0" encoding="utf-8"?>
+<file path=ppt/slides/slide3.xml><?xml version="1.0" encoding="utf-8"?>
 <p:sld xmlns:a="http://schemas.openxmlformats.org/drawingml/2006/main" xmlns:r="http://schemas.openxmlformats.org/officeDocument/2006/relationships" xmlns:p="http://schemas.openxmlformats.org/presentationml/2006/main">
   <p:cSld>
     <p:spTree>
@@ -4729,79 +5896,130 @@
       </p:sp>
       <p:grpSp>
         <p:nvGrpSpPr>
-          <p:cNvPr id="4" name="组合 3"/>
+          <p:cNvPr id="12" name="组合 11"/>
           <p:cNvGrpSpPr/>
           <p:nvPr/>
         </p:nvGrpSpPr>
         <p:grpSpPr>
           <a:xfrm>
-            <a:off x="1101725" y="1490980"/>
-            <a:ext cx="1868170" cy="1159510"/>
-            <a:chOff x="4230" y="2456"/>
-            <a:chExt cx="2942" cy="1826"/>
+            <a:off x="848360" y="1447800"/>
+            <a:ext cx="7447915" cy="3125470"/>
+            <a:chOff x="1849" y="1531"/>
+            <a:chExt cx="10159" cy="4017"/>
           </a:xfrm>
         </p:grpSpPr>
-        <p:sp>
-          <p:nvSpPr>
-            <p:cNvPr id="5" name="Google Shape;4859;p44"/>
-            <p:cNvSpPr/>
+        <p:grpSp>
+          <p:nvGrpSpPr>
+            <p:cNvPr id="4" name="组合 3"/>
+            <p:cNvGrpSpPr/>
             <p:nvPr/>
-          </p:nvSpPr>
-          <p:spPr>
+          </p:nvGrpSpPr>
+          <p:grpSpPr>
             <a:xfrm>
-              <a:off x="4230" y="2456"/>
-              <a:ext cx="2107" cy="1826"/>
+              <a:off x="1922" y="2415"/>
+              <a:ext cx="2942" cy="1826"/>
+              <a:chOff x="4230" y="2456"/>
+              <a:chExt cx="2942" cy="1826"/>
             </a:xfrm>
-            <a:prstGeom prst="cube">
-              <a:avLst>
-                <a:gd name="adj" fmla="val 8683"/>
-              </a:avLst>
-            </a:prstGeom>
-            <a:solidFill>
-              <a:schemeClr val="accent6">
-                <a:lumMod val="60000"/>
-                <a:lumOff val="40000"/>
-              </a:schemeClr>
-            </a:solidFill>
-            <a:ln w="9525" cap="flat" cmpd="sng">
-              <a:noFill/>
-              <a:prstDash val="solid"/>
-              <a:round/>
-              <a:headEnd type="none" w="sm" len="sm"/>
-              <a:tailEnd type="none" w="sm" len="sm"/>
-            </a:ln>
-          </p:spPr>
-          <p:txBody>
-            <a:bodyPr spcFirstLastPara="1" wrap="square" lIns="121900" tIns="121900" rIns="121900" bIns="121900" anchor="ctr" anchorCtr="0">
-              <a:noAutofit/>
-            </a:bodyPr>
-            <a:lstStyle/>
-            <a:p>
-              <a:pPr marL="0" lvl="0" indent="0" algn="l" rtl="0">
-                <a:spcBef>
-                  <a:spcPts val="0"/>
-                </a:spcBef>
-                <a:spcAft>
-                  <a:spcPts val="0"/>
-                </a:spcAft>
-                <a:buNone/>
-              </a:pPr>
-              <a:endParaRPr sz="2400"/>
-            </a:p>
-          </p:txBody>
-        </p:sp>
+          </p:grpSpPr>
+          <p:sp>
+            <p:nvSpPr>
+              <p:cNvPr id="5" name="Google Shape;4859;p44"/>
+              <p:cNvSpPr/>
+              <p:nvPr/>
+            </p:nvSpPr>
+            <p:spPr>
+              <a:xfrm>
+                <a:off x="4230" y="2456"/>
+                <a:ext cx="2107" cy="1826"/>
+              </a:xfrm>
+              <a:prstGeom prst="cube">
+                <a:avLst>
+                  <a:gd name="adj" fmla="val 8683"/>
+                </a:avLst>
+              </a:prstGeom>
+              <a:solidFill>
+                <a:schemeClr val="accent6">
+                  <a:lumMod val="60000"/>
+                  <a:lumOff val="40000"/>
+                </a:schemeClr>
+              </a:solidFill>
+              <a:ln w="9525" cap="flat" cmpd="sng">
+                <a:noFill/>
+                <a:prstDash val="solid"/>
+                <a:round/>
+                <a:headEnd type="none" w="sm" len="sm"/>
+                <a:tailEnd type="none" w="sm" len="sm"/>
+              </a:ln>
+            </p:spPr>
+            <p:txBody>
+              <a:bodyPr spcFirstLastPara="1" wrap="square" lIns="121900" tIns="121900" rIns="121900" bIns="121900" anchor="ctr" anchorCtr="0">
+                <a:noAutofit/>
+              </a:bodyPr>
+              <a:lstStyle/>
+              <a:p>
+                <a:pPr marL="0" lvl="0" indent="0" algn="l" rtl="0">
+                  <a:spcBef>
+                    <a:spcPts val="0"/>
+                  </a:spcBef>
+                  <a:spcAft>
+                    <a:spcPts val="0"/>
+                  </a:spcAft>
+                  <a:buNone/>
+                </a:pPr>
+                <a:endParaRPr sz="2400"/>
+              </a:p>
+            </p:txBody>
+          </p:sp>
+          <p:cxnSp>
+            <p:nvCxnSpPr>
+              <p:cNvPr id="8" name="直接箭头连接符 7"/>
+              <p:cNvCxnSpPr>
+                <a:stCxn id="5" idx="4"/>
+              </p:cNvCxnSpPr>
+              <p:nvPr/>
+            </p:nvCxnSpPr>
+            <p:spPr>
+              <a:xfrm flipV="1">
+                <a:off x="6265" y="3436"/>
+                <a:ext cx="907" cy="12"/>
+              </a:xfrm>
+              <a:prstGeom prst="straightConnector1">
+                <a:avLst/>
+              </a:prstGeom>
+              <a:ln>
+                <a:solidFill>
+                  <a:srgbClr val="0E2841"/>
+                </a:solidFill>
+                <a:tailEnd type="arrow"/>
+              </a:ln>
+            </p:spPr>
+            <p:style>
+              <a:lnRef idx="2">
+                <a:schemeClr val="accent1"/>
+              </a:lnRef>
+              <a:fillRef idx="0">
+                <a:schemeClr val="accent1"/>
+              </a:fillRef>
+              <a:effectRef idx="1">
+                <a:schemeClr val="accent1"/>
+              </a:effectRef>
+              <a:fontRef idx="minor">
+                <a:schemeClr val="tx1"/>
+              </a:fontRef>
+            </p:style>
+          </p:cxnSp>
+        </p:grpSp>
         <p:cxnSp>
           <p:nvCxnSpPr>
-            <p:cNvPr id="8" name="直接箭头连接符 7"/>
-            <p:cNvCxnSpPr>
-              <a:stCxn id="5" idx="4"/>
-            </p:cNvCxnSpPr>
+            <p:cNvPr id="24" name="直接箭头连接符 23"/>
+            <p:cNvCxnSpPr/>
             <p:nvPr/>
           </p:nvCxnSpPr>
           <p:spPr>
             <a:xfrm flipV="1">
-              <a:off x="6265" y="3436"/>
-              <a:ext cx="907" cy="12"/>
+              <a:off x="8577" y="3385"/>
+              <a:ext cx="1077" cy="12"/>
             </a:xfrm>
             <a:prstGeom prst="straightConnector1">
               <a:avLst/>
@@ -4828,53 +6046,1780 @@
             </a:fontRef>
           </p:style>
         </p:cxnSp>
+        <p:sp>
+          <p:nvSpPr>
+            <p:cNvPr id="27" name="文本框 26"/>
+            <p:cNvSpPr txBox="1"/>
+            <p:nvPr/>
+          </p:nvSpPr>
+          <p:spPr>
+            <a:xfrm>
+              <a:off x="1849" y="2676"/>
+              <a:ext cx="2108" cy="433"/>
+            </a:xfrm>
+            <a:prstGeom prst="rect">
+              <a:avLst/>
+            </a:prstGeom>
+            <a:noFill/>
+          </p:spPr>
+          <p:txBody>
+            <a:bodyPr wrap="square" rtlCol="0">
+              <a:spAutoFit/>
+            </a:bodyPr>
+            <a:p>
+              <a:pPr algn="ctr"/>
+              <a:r>
+                <a:rPr lang="en-US" altLang="zh-CN" sz="1600" b="1">
+                  <a:latin typeface="Times New Roman" panose="02020603050405020304" charset="0"/>
+                  <a:cs typeface="Times New Roman" panose="02020603050405020304" charset="0"/>
+                  <a:sym typeface="+mn-ea"/>
+                </a:rPr>
+                <a:t>Distance</a:t>
+              </a:r>
+              <a:endParaRPr lang="en-US" altLang="zh-CN" sz="1600" b="1">
+                <a:latin typeface="Times New Roman" panose="02020603050405020304" charset="0"/>
+                <a:cs typeface="Times New Roman" panose="02020603050405020304" charset="0"/>
+                <a:sym typeface="+mn-ea"/>
+              </a:endParaRPr>
+            </a:p>
+          </p:txBody>
+        </p:sp>
+        <p:grpSp>
+          <p:nvGrpSpPr>
+            <p:cNvPr id="29" name="组合 28"/>
+            <p:cNvGrpSpPr/>
+            <p:nvPr/>
+          </p:nvGrpSpPr>
+          <p:grpSpPr>
+            <a:xfrm>
+              <a:off x="9766" y="2560"/>
+              <a:ext cx="2242" cy="1344"/>
+              <a:chOff x="9310" y="4361"/>
+              <a:chExt cx="2242" cy="1344"/>
+            </a:xfrm>
+          </p:grpSpPr>
+          <p:sp>
+            <p:nvSpPr>
+              <p:cNvPr id="4861" name="Google Shape;4861;p44"/>
+              <p:cNvSpPr/>
+              <p:nvPr/>
+            </p:nvSpPr>
+            <p:spPr>
+              <a:xfrm>
+                <a:off x="9310" y="4361"/>
+                <a:ext cx="2192" cy="1344"/>
+              </a:xfrm>
+              <a:prstGeom prst="cube">
+                <a:avLst>
+                  <a:gd name="adj" fmla="val 21848"/>
+                </a:avLst>
+              </a:prstGeom>
+              <a:solidFill>
+                <a:srgbClr val="09CDA6"/>
+              </a:solidFill>
+              <a:ln w="9525" cap="flat" cmpd="sng">
+                <a:noFill/>
+                <a:prstDash val="solid"/>
+                <a:round/>
+                <a:headEnd type="none" w="sm" len="sm"/>
+                <a:tailEnd type="none" w="sm" len="sm"/>
+              </a:ln>
+            </p:spPr>
+            <p:txBody>
+              <a:bodyPr spcFirstLastPara="1" wrap="square" lIns="121900" tIns="121900" rIns="121900" bIns="121900" anchor="ctr" anchorCtr="0">
+                <a:noAutofit/>
+              </a:bodyPr>
+              <a:lstStyle/>
+              <a:p>
+                <a:pPr marL="0" lvl="0" indent="0" algn="l" rtl="0">
+                  <a:spcBef>
+                    <a:spcPts val="0"/>
+                  </a:spcBef>
+                  <a:spcAft>
+                    <a:spcPts val="0"/>
+                  </a:spcAft>
+                  <a:buNone/>
+                </a:pPr>
+                <a:endParaRPr sz="2400"/>
+              </a:p>
+            </p:txBody>
+          </p:sp>
+          <p:sp>
+            <p:nvSpPr>
+              <p:cNvPr id="28" name="文本框 27"/>
+              <p:cNvSpPr txBox="1"/>
+              <p:nvPr/>
+            </p:nvSpPr>
+            <p:spPr>
+              <a:xfrm>
+                <a:off x="9310" y="4688"/>
+                <a:ext cx="2242" cy="829"/>
+              </a:xfrm>
+              <a:prstGeom prst="rect">
+                <a:avLst/>
+              </a:prstGeom>
+            </p:spPr>
+            <p:txBody>
+              <a:bodyPr wrap="square">
+                <a:spAutoFit/>
+              </a:bodyPr>
+              <a:p>
+                <a:r>
+                  <a:rPr lang="en-US" altLang="zh-CN" sz="1800" b="1">
+                    <a:latin typeface="Times New Roman" panose="02020603050405020304" charset="0"/>
+                    <a:cs typeface="Times New Roman" panose="02020603050405020304" charset="0"/>
+                  </a:rPr>
+                  <a:t>Fingertip </a:t>
+                </a:r>
+                <a:endParaRPr lang="en-US" altLang="zh-CN" sz="1800" b="1">
+                  <a:latin typeface="Times New Roman" panose="02020603050405020304" charset="0"/>
+                  <a:cs typeface="Times New Roman" panose="02020603050405020304" charset="0"/>
+                </a:endParaRPr>
+              </a:p>
+              <a:p>
+                <a:r>
+                  <a:rPr lang="en-US" altLang="zh-CN" sz="1800" b="1">
+                    <a:latin typeface="Times New Roman" panose="02020603050405020304" charset="0"/>
+                    <a:cs typeface="Times New Roman" panose="02020603050405020304" charset="0"/>
+                  </a:rPr>
+                  <a:t>Aperture</a:t>
+                </a:r>
+                <a:endParaRPr lang="en-US" altLang="ja-JP" sz="1600"/>
+              </a:p>
+            </p:txBody>
+          </p:sp>
+        </p:grpSp>
+        <p:grpSp>
+          <p:nvGrpSpPr>
+            <p:cNvPr id="155" name="组合 154"/>
+            <p:cNvGrpSpPr/>
+            <p:nvPr/>
+          </p:nvGrpSpPr>
+          <p:grpSpPr>
+            <a:xfrm>
+              <a:off x="5098" y="2147"/>
+              <a:ext cx="3378" cy="2967"/>
+              <a:chOff x="2243" y="1465"/>
+              <a:chExt cx="8060" cy="5346"/>
+            </a:xfrm>
+          </p:grpSpPr>
+          <p:sp>
+            <p:nvSpPr>
+              <p:cNvPr id="114" name="Google Shape;500;p25"/>
+              <p:cNvSpPr/>
+              <p:nvPr/>
+            </p:nvSpPr>
+            <p:spPr>
+              <a:xfrm>
+                <a:off x="2243" y="2689"/>
+                <a:ext cx="125" cy="108"/>
+              </a:xfrm>
+              <a:prstGeom prst="flowChartConnector">
+                <a:avLst/>
+              </a:prstGeom>
+              <a:solidFill>
+                <a:srgbClr val="B7B7B7"/>
+              </a:solidFill>
+              <a:ln w="9525" cap="flat" cmpd="sng">
+                <a:solidFill>
+                  <a:srgbClr val="595959"/>
+                </a:solidFill>
+                <a:prstDash val="solid"/>
+                <a:round/>
+                <a:headEnd type="none" w="sm" len="sm"/>
+                <a:tailEnd type="none" w="sm" len="sm"/>
+              </a:ln>
+            </p:spPr>
+            <p:txBody>
+              <a:bodyPr spcFirstLastPara="1" wrap="square" lIns="91425" tIns="91425" rIns="91425" bIns="91425" anchor="ctr" anchorCtr="0">
+                <a:noAutofit/>
+              </a:bodyPr>
+              <a:lstStyle/>
+              <a:p>
+                <a:pPr marL="0" lvl="0" indent="0" algn="l" rtl="0">
+                  <a:spcBef>
+                    <a:spcPts val="0"/>
+                  </a:spcBef>
+                  <a:spcAft>
+                    <a:spcPts val="0"/>
+                  </a:spcAft>
+                  <a:buNone/>
+                </a:pPr>
+              </a:p>
+            </p:txBody>
+          </p:sp>
+          <p:sp>
+            <p:nvSpPr>
+              <p:cNvPr id="115" name="Google Shape;503;p25"/>
+              <p:cNvSpPr/>
+              <p:nvPr/>
+            </p:nvSpPr>
+            <p:spPr>
+              <a:xfrm>
+                <a:off x="9455" y="3359"/>
+                <a:ext cx="849" cy="878"/>
+              </a:xfrm>
+              <a:prstGeom prst="ellipse">
+                <a:avLst/>
+              </a:prstGeom>
+              <a:solidFill>
+                <a:srgbClr val="F4CCCC"/>
+              </a:solidFill>
+              <a:ln w="9525" cap="flat" cmpd="sng">
+                <a:solidFill>
+                  <a:srgbClr val="595959"/>
+                </a:solidFill>
+                <a:prstDash val="solid"/>
+                <a:round/>
+                <a:headEnd type="none" w="sm" len="sm"/>
+                <a:tailEnd type="none" w="sm" len="sm"/>
+              </a:ln>
+            </p:spPr>
+            <p:txBody>
+              <a:bodyPr spcFirstLastPara="1" wrap="square" lIns="91425" tIns="91425" rIns="91425" bIns="91425" anchor="ctr" anchorCtr="0">
+                <a:noAutofit/>
+              </a:bodyPr>
+              <a:lstStyle/>
+              <a:p>
+                <a:pPr marL="0" lvl="0" indent="0" algn="l" rtl="0">
+                  <a:spcBef>
+                    <a:spcPts val="0"/>
+                  </a:spcBef>
+                  <a:spcAft>
+                    <a:spcPts val="0"/>
+                  </a:spcAft>
+                  <a:buClr>
+                    <a:srgbClr val="000000"/>
+                  </a:buClr>
+                  <a:buSzPts val="1100"/>
+                  <a:buFont typeface="Arial" panose="020B0604020202020204"/>
+                  <a:buNone/>
+                </a:pPr>
+                <a:endParaRPr sz="1600">
+                  <a:solidFill>
+                    <a:srgbClr val="000000"/>
+                  </a:solidFill>
+                </a:endParaRPr>
+              </a:p>
+            </p:txBody>
+          </p:sp>
+          <p:cxnSp>
+            <p:nvCxnSpPr>
+              <p:cNvPr id="116" name="Google Shape;510;p25"/>
+              <p:cNvCxnSpPr>
+                <a:endCxn id="115" idx="2"/>
+              </p:cNvCxnSpPr>
+              <p:nvPr/>
+            </p:nvCxnSpPr>
+            <p:spPr>
+              <a:xfrm rot="10800000" flipH="1">
+                <a:off x="7887" y="3798"/>
+                <a:ext cx="1568" cy="2505"/>
+              </a:xfrm>
+              <a:prstGeom prst="straightConnector1">
+                <a:avLst/>
+              </a:prstGeom>
+              <a:noFill/>
+              <a:ln w="9525" cap="flat" cmpd="sng">
+                <a:solidFill>
+                  <a:srgbClr val="595959"/>
+                </a:solidFill>
+                <a:prstDash val="solid"/>
+                <a:round/>
+                <a:headEnd type="none" w="med" len="med"/>
+                <a:tailEnd type="triangle" w="med" len="med"/>
+              </a:ln>
+            </p:spPr>
+          </p:cxnSp>
+          <p:cxnSp>
+            <p:nvCxnSpPr>
+              <p:cNvPr id="117" name="Google Shape;512;p25"/>
+              <p:cNvCxnSpPr>
+                <a:endCxn id="115" idx="2"/>
+              </p:cNvCxnSpPr>
+              <p:nvPr/>
+            </p:nvCxnSpPr>
+            <p:spPr>
+              <a:xfrm>
+                <a:off x="7887" y="3166"/>
+                <a:ext cx="1568" cy="632"/>
+              </a:xfrm>
+              <a:prstGeom prst="straightConnector1">
+                <a:avLst/>
+              </a:prstGeom>
+              <a:noFill/>
+              <a:ln w="9525" cap="flat" cmpd="sng">
+                <a:solidFill>
+                  <a:srgbClr val="595959"/>
+                </a:solidFill>
+                <a:prstDash val="solid"/>
+                <a:round/>
+                <a:headEnd type="none" w="med" len="med"/>
+                <a:tailEnd type="triangle" w="med" len="med"/>
+              </a:ln>
+            </p:spPr>
+          </p:cxnSp>
+          <p:cxnSp>
+            <p:nvCxnSpPr>
+              <p:cNvPr id="118" name="Google Shape;514;p25"/>
+              <p:cNvCxnSpPr>
+                <a:endCxn id="115" idx="2"/>
+              </p:cNvCxnSpPr>
+              <p:nvPr/>
+            </p:nvCxnSpPr>
+            <p:spPr>
+              <a:xfrm>
+                <a:off x="7887" y="1947"/>
+                <a:ext cx="1568" cy="1851"/>
+              </a:xfrm>
+              <a:prstGeom prst="straightConnector1">
+                <a:avLst/>
+              </a:prstGeom>
+              <a:noFill/>
+              <a:ln w="9525" cap="flat" cmpd="sng">
+                <a:solidFill>
+                  <a:srgbClr val="595959"/>
+                </a:solidFill>
+                <a:prstDash val="solid"/>
+                <a:round/>
+                <a:headEnd type="none" w="med" len="med"/>
+                <a:tailEnd type="triangle" w="med" len="med"/>
+              </a:ln>
+            </p:spPr>
+          </p:cxnSp>
+          <p:cxnSp>
+            <p:nvCxnSpPr>
+              <p:cNvPr id="119" name="Google Shape;516;p25"/>
+              <p:cNvCxnSpPr>
+                <a:stCxn id="120" idx="6"/>
+                <a:endCxn id="124" idx="2"/>
+              </p:cNvCxnSpPr>
+              <p:nvPr/>
+            </p:nvCxnSpPr>
+            <p:spPr>
+              <a:xfrm>
+                <a:off x="5658" y="1947"/>
+                <a:ext cx="1182" cy="0"/>
+              </a:xfrm>
+              <a:prstGeom prst="straightConnector1">
+                <a:avLst/>
+              </a:prstGeom>
+              <a:noFill/>
+              <a:ln w="9525" cap="flat" cmpd="sng">
+                <a:solidFill>
+                  <a:srgbClr val="595959"/>
+                </a:solidFill>
+                <a:prstDash val="solid"/>
+                <a:round/>
+                <a:headEnd type="none" w="med" len="med"/>
+                <a:tailEnd type="triangle" w="med" len="med"/>
+              </a:ln>
+            </p:spPr>
+          </p:cxnSp>
+          <p:sp>
+            <p:nvSpPr>
+              <p:cNvPr id="120" name="Google Shape;517;p25"/>
+              <p:cNvSpPr/>
+              <p:nvPr/>
+            </p:nvSpPr>
+            <p:spPr>
+              <a:xfrm>
+                <a:off x="4724" y="1465"/>
+                <a:ext cx="934" cy="963"/>
+              </a:xfrm>
+              <a:prstGeom prst="ellipse">
+                <a:avLst/>
+              </a:prstGeom>
+              <a:gradFill>
+                <a:gsLst>
+                  <a:gs pos="0">
+                    <a:srgbClr val="E0EDBA">
+                      <a:alpha val="79216"/>
+                    </a:srgbClr>
+                  </a:gs>
+                  <a:gs pos="100000">
+                    <a:srgbClr val="DE87F1">
+                      <a:alpha val="48235"/>
+                    </a:srgbClr>
+                  </a:gs>
+                </a:gsLst>
+                <a:lin ang="13500032" scaled="0"/>
+              </a:gradFill>
+              <a:ln w="9525" cap="flat" cmpd="sng">
+                <a:solidFill>
+                  <a:srgbClr val="595959"/>
+                </a:solidFill>
+                <a:prstDash val="solid"/>
+                <a:round/>
+                <a:headEnd type="none" w="sm" len="sm"/>
+                <a:tailEnd type="none" w="sm" len="sm"/>
+              </a:ln>
+            </p:spPr>
+            <p:txBody>
+              <a:bodyPr spcFirstLastPara="1" wrap="square" lIns="91425" tIns="91425" rIns="91425" bIns="91425" anchor="ctr" anchorCtr="0">
+                <a:noAutofit/>
+              </a:bodyPr>
+              <a:lstStyle/>
+              <a:p>
+                <a:pPr marL="0" lvl="0" indent="0" algn="l" rtl="0">
+                  <a:spcBef>
+                    <a:spcPts val="0"/>
+                  </a:spcBef>
+                  <a:spcAft>
+                    <a:spcPts val="0"/>
+                  </a:spcAft>
+                  <a:buClr>
+                    <a:srgbClr val="000000"/>
+                  </a:buClr>
+                  <a:buSzPts val="1100"/>
+                  <a:buFont typeface="Arial" panose="020B0604020202020204"/>
+                  <a:buNone/>
+                </a:pPr>
+                <a:r>
+                  <a:rPr lang="en-GB" sz="1100"/>
+                  <a:t> </a:t>
+                </a:r>
+                <a:endParaRPr sz="1200" baseline="-25000"/>
+              </a:p>
+            </p:txBody>
+          </p:sp>
+          <p:sp>
+            <p:nvSpPr>
+              <p:cNvPr id="121" name="Google Shape;519;p25"/>
+              <p:cNvSpPr/>
+              <p:nvPr/>
+            </p:nvSpPr>
+            <p:spPr>
+              <a:xfrm>
+                <a:off x="4714" y="2684"/>
+                <a:ext cx="934" cy="963"/>
+              </a:xfrm>
+              <a:prstGeom prst="ellipse">
+                <a:avLst/>
+              </a:prstGeom>
+              <a:gradFill>
+                <a:gsLst>
+                  <a:gs pos="0">
+                    <a:srgbClr val="E0EDBA">
+                      <a:alpha val="79216"/>
+                    </a:srgbClr>
+                  </a:gs>
+                  <a:gs pos="100000">
+                    <a:srgbClr val="DE87F1">
+                      <a:alpha val="48235"/>
+                    </a:srgbClr>
+                  </a:gs>
+                </a:gsLst>
+                <a:lin ang="13500032" scaled="0"/>
+              </a:gradFill>
+              <a:ln w="9525" cap="flat" cmpd="sng">
+                <a:solidFill>
+                  <a:srgbClr val="595959"/>
+                </a:solidFill>
+                <a:prstDash val="solid"/>
+                <a:round/>
+                <a:headEnd type="none" w="sm" len="sm"/>
+                <a:tailEnd type="none" w="sm" len="sm"/>
+              </a:ln>
+            </p:spPr>
+            <p:txBody>
+              <a:bodyPr spcFirstLastPara="1" wrap="square" lIns="91425" tIns="91425" rIns="91425" bIns="91425" anchor="ctr" anchorCtr="0">
+                <a:noAutofit/>
+              </a:bodyPr>
+              <a:lstStyle/>
+              <a:p>
+                <a:pPr marL="0" lvl="0" indent="0" algn="l" rtl="0">
+                  <a:spcBef>
+                    <a:spcPts val="0"/>
+                  </a:spcBef>
+                  <a:spcAft>
+                    <a:spcPts val="0"/>
+                  </a:spcAft>
+                  <a:buClr>
+                    <a:srgbClr val="000000"/>
+                  </a:buClr>
+                  <a:buSzPts val="1100"/>
+                  <a:buFont typeface="Arial" panose="020B0604020202020204"/>
+                  <a:buNone/>
+                </a:pPr>
+                <a:r>
+                  <a:rPr lang="en-GB" sz="1100"/>
+                  <a:t> </a:t>
+                </a:r>
+                <a:endParaRPr sz="1600">
+                  <a:solidFill>
+                    <a:srgbClr val="000000"/>
+                  </a:solidFill>
+                </a:endParaRPr>
+              </a:p>
+            </p:txBody>
+          </p:sp>
+          <p:sp>
+            <p:nvSpPr>
+              <p:cNvPr id="122" name="Google Shape;520;p25"/>
+              <p:cNvSpPr/>
+              <p:nvPr/>
+            </p:nvSpPr>
+            <p:spPr>
+              <a:xfrm>
+                <a:off x="4724" y="3903"/>
+                <a:ext cx="934" cy="963"/>
+              </a:xfrm>
+              <a:prstGeom prst="ellipse">
+                <a:avLst/>
+              </a:prstGeom>
+              <a:gradFill>
+                <a:gsLst>
+                  <a:gs pos="0">
+                    <a:srgbClr val="E0EDBA">
+                      <a:alpha val="79216"/>
+                    </a:srgbClr>
+                  </a:gs>
+                  <a:gs pos="100000">
+                    <a:srgbClr val="DE87F1">
+                      <a:alpha val="48235"/>
+                    </a:srgbClr>
+                  </a:gs>
+                </a:gsLst>
+                <a:lin ang="13500032" scaled="0"/>
+              </a:gradFill>
+              <a:ln w="9525" cap="flat" cmpd="sng">
+                <a:solidFill>
+                  <a:srgbClr val="595959"/>
+                </a:solidFill>
+                <a:prstDash val="solid"/>
+                <a:round/>
+                <a:headEnd type="none" w="sm" len="sm"/>
+                <a:tailEnd type="none" w="sm" len="sm"/>
+              </a:ln>
+            </p:spPr>
+            <p:txBody>
+              <a:bodyPr spcFirstLastPara="1" wrap="square" lIns="91425" tIns="91425" rIns="91425" bIns="91425" anchor="ctr" anchorCtr="0">
+                <a:noAutofit/>
+              </a:bodyPr>
+              <a:lstStyle/>
+              <a:p>
+                <a:pPr marL="0" lvl="0" indent="0" algn="l" rtl="0">
+                  <a:spcBef>
+                    <a:spcPts val="0"/>
+                  </a:spcBef>
+                  <a:spcAft>
+                    <a:spcPts val="0"/>
+                  </a:spcAft>
+                  <a:buClr>
+                    <a:srgbClr val="000000"/>
+                  </a:buClr>
+                  <a:buSzPts val="1100"/>
+                  <a:buFont typeface="Arial" panose="020B0604020202020204"/>
+                  <a:buNone/>
+                </a:pPr>
+                <a:r>
+                  <a:rPr lang="en-GB" sz="1100"/>
+                  <a:t> </a:t>
+                </a:r>
+                <a:endParaRPr sz="1600">
+                  <a:solidFill>
+                    <a:srgbClr val="000000"/>
+                  </a:solidFill>
+                </a:endParaRPr>
+              </a:p>
+            </p:txBody>
+          </p:sp>
+          <p:sp>
+            <p:nvSpPr>
+              <p:cNvPr id="123" name="Google Shape;521;p25"/>
+              <p:cNvSpPr/>
+              <p:nvPr/>
+            </p:nvSpPr>
+            <p:spPr>
+              <a:xfrm>
+                <a:off x="4724" y="5849"/>
+                <a:ext cx="925" cy="963"/>
+              </a:xfrm>
+              <a:prstGeom prst="ellipse">
+                <a:avLst/>
+              </a:prstGeom>
+              <a:gradFill>
+                <a:gsLst>
+                  <a:gs pos="0">
+                    <a:srgbClr val="E0EDBA">
+                      <a:alpha val="79216"/>
+                    </a:srgbClr>
+                  </a:gs>
+                  <a:gs pos="100000">
+                    <a:srgbClr val="DE87F1">
+                      <a:alpha val="48235"/>
+                    </a:srgbClr>
+                  </a:gs>
+                </a:gsLst>
+                <a:lin ang="13500032" scaled="0"/>
+              </a:gradFill>
+              <a:ln w="9525" cap="flat" cmpd="sng">
+                <a:solidFill>
+                  <a:srgbClr val="595959"/>
+                </a:solidFill>
+                <a:prstDash val="solid"/>
+                <a:round/>
+                <a:headEnd type="none" w="sm" len="sm"/>
+                <a:tailEnd type="none" w="sm" len="sm"/>
+              </a:ln>
+            </p:spPr>
+            <p:txBody>
+              <a:bodyPr spcFirstLastPara="1" wrap="square" lIns="91425" tIns="91425" rIns="91425" bIns="91425" anchor="ctr" anchorCtr="0">
+                <a:noAutofit/>
+              </a:bodyPr>
+              <a:lstStyle/>
+              <a:p>
+                <a:pPr marL="0" lvl="0" indent="0" algn="l" rtl="0">
+                  <a:spcBef>
+                    <a:spcPts val="0"/>
+                  </a:spcBef>
+                  <a:spcAft>
+                    <a:spcPts val="0"/>
+                  </a:spcAft>
+                  <a:buClr>
+                    <a:srgbClr val="000000"/>
+                  </a:buClr>
+                  <a:buSzPts val="1100"/>
+                  <a:buFont typeface="Arial" panose="020B0604020202020204"/>
+                  <a:buNone/>
+                </a:pPr>
+                <a:endParaRPr sz="1100">
+                  <a:solidFill>
+                    <a:srgbClr val="000000"/>
+                  </a:solidFill>
+                </a:endParaRPr>
+              </a:p>
+            </p:txBody>
+          </p:sp>
+          <p:sp>
+            <p:nvSpPr>
+              <p:cNvPr id="124" name="Google Shape;518;p25"/>
+              <p:cNvSpPr/>
+              <p:nvPr/>
+            </p:nvSpPr>
+            <p:spPr>
+              <a:xfrm>
+                <a:off x="6840" y="1465"/>
+                <a:ext cx="934" cy="963"/>
+              </a:xfrm>
+              <a:prstGeom prst="ellipse">
+                <a:avLst/>
+              </a:prstGeom>
+              <a:gradFill>
+                <a:gsLst>
+                  <a:gs pos="0">
+                    <a:srgbClr val="E0EDBA">
+                      <a:alpha val="79216"/>
+                    </a:srgbClr>
+                  </a:gs>
+                  <a:gs pos="100000">
+                    <a:srgbClr val="DE87F1">
+                      <a:alpha val="48235"/>
+                    </a:srgbClr>
+                  </a:gs>
+                </a:gsLst>
+                <a:lin ang="13500032" scaled="0"/>
+              </a:gradFill>
+              <a:ln w="9525" cap="flat" cmpd="sng">
+                <a:solidFill>
+                  <a:srgbClr val="595959"/>
+                </a:solidFill>
+                <a:prstDash val="solid"/>
+                <a:round/>
+                <a:headEnd type="none" w="sm" len="sm"/>
+                <a:tailEnd type="none" w="sm" len="sm"/>
+              </a:ln>
+            </p:spPr>
+            <p:txBody>
+              <a:bodyPr spcFirstLastPara="1" wrap="square" lIns="91425" tIns="91425" rIns="91425" bIns="91425" anchor="ctr" anchorCtr="0">
+                <a:noAutofit/>
+              </a:bodyPr>
+              <a:lstStyle/>
+              <a:p>
+                <a:pPr marL="0" lvl="0" indent="0" algn="l" rtl="0">
+                  <a:spcBef>
+                    <a:spcPts val="0"/>
+                  </a:spcBef>
+                  <a:spcAft>
+                    <a:spcPts val="0"/>
+                  </a:spcAft>
+                  <a:buClr>
+                    <a:srgbClr val="000000"/>
+                  </a:buClr>
+                  <a:buSzPts val="1100"/>
+                  <a:buFont typeface="Arial" panose="020B0604020202020204"/>
+                  <a:buNone/>
+                </a:pPr>
+                <a:endParaRPr sz="1200" baseline="-25000"/>
+              </a:p>
+            </p:txBody>
+          </p:sp>
+          <p:sp>
+            <p:nvSpPr>
+              <p:cNvPr id="125" name="Google Shape;522;p25"/>
+              <p:cNvSpPr/>
+              <p:nvPr/>
+            </p:nvSpPr>
+            <p:spPr>
+              <a:xfrm>
+                <a:off x="6840" y="2743"/>
+                <a:ext cx="934" cy="963"/>
+              </a:xfrm>
+              <a:prstGeom prst="ellipse">
+                <a:avLst/>
+              </a:prstGeom>
+              <a:gradFill>
+                <a:gsLst>
+                  <a:gs pos="0">
+                    <a:srgbClr val="E0EDBA">
+                      <a:alpha val="79216"/>
+                    </a:srgbClr>
+                  </a:gs>
+                  <a:gs pos="100000">
+                    <a:srgbClr val="DE87F1">
+                      <a:alpha val="48235"/>
+                    </a:srgbClr>
+                  </a:gs>
+                </a:gsLst>
+                <a:lin ang="13500032" scaled="0"/>
+              </a:gradFill>
+              <a:ln w="9525" cap="flat" cmpd="sng">
+                <a:solidFill>
+                  <a:srgbClr val="595959"/>
+                </a:solidFill>
+                <a:prstDash val="solid"/>
+                <a:round/>
+                <a:headEnd type="none" w="sm" len="sm"/>
+                <a:tailEnd type="none" w="sm" len="sm"/>
+              </a:ln>
+            </p:spPr>
+            <p:txBody>
+              <a:bodyPr spcFirstLastPara="1" wrap="square" lIns="91425" tIns="91425" rIns="91425" bIns="91425" anchor="ctr" anchorCtr="0">
+                <a:noAutofit/>
+              </a:bodyPr>
+              <a:lstStyle/>
+              <a:p>
+                <a:pPr marL="0" lvl="0" indent="0" algn="l" rtl="0">
+                  <a:spcBef>
+                    <a:spcPts val="0"/>
+                  </a:spcBef>
+                  <a:spcAft>
+                    <a:spcPts val="0"/>
+                  </a:spcAft>
+                  <a:buClr>
+                    <a:srgbClr val="000000"/>
+                  </a:buClr>
+                  <a:buSzPts val="1100"/>
+                  <a:buFont typeface="Arial" panose="020B0604020202020204"/>
+                  <a:buNone/>
+                </a:pPr>
+                <a:endParaRPr sz="1600">
+                  <a:solidFill>
+                    <a:srgbClr val="000000"/>
+                  </a:solidFill>
+                </a:endParaRPr>
+              </a:p>
+            </p:txBody>
+          </p:sp>
+          <p:sp>
+            <p:nvSpPr>
+              <p:cNvPr id="126" name="Google Shape;523;p25"/>
+              <p:cNvSpPr/>
+              <p:nvPr/>
+            </p:nvSpPr>
+            <p:spPr>
+              <a:xfrm>
+                <a:off x="6840" y="3946"/>
+                <a:ext cx="934" cy="963"/>
+              </a:xfrm>
+              <a:prstGeom prst="ellipse">
+                <a:avLst/>
+              </a:prstGeom>
+              <a:gradFill>
+                <a:gsLst>
+                  <a:gs pos="0">
+                    <a:srgbClr val="E0EDBA">
+                      <a:alpha val="79216"/>
+                    </a:srgbClr>
+                  </a:gs>
+                  <a:gs pos="100000">
+                    <a:srgbClr val="DE87F1">
+                      <a:alpha val="48235"/>
+                    </a:srgbClr>
+                  </a:gs>
+                </a:gsLst>
+                <a:lin ang="13500032" scaled="0"/>
+              </a:gradFill>
+              <a:ln w="9525" cap="flat" cmpd="sng">
+                <a:solidFill>
+                  <a:srgbClr val="595959"/>
+                </a:solidFill>
+                <a:prstDash val="solid"/>
+                <a:round/>
+                <a:headEnd type="none" w="sm" len="sm"/>
+                <a:tailEnd type="none" w="sm" len="sm"/>
+              </a:ln>
+            </p:spPr>
+            <p:txBody>
+              <a:bodyPr spcFirstLastPara="1" wrap="square" lIns="91425" tIns="91425" rIns="91425" bIns="91425" anchor="ctr" anchorCtr="0">
+                <a:noAutofit/>
+              </a:bodyPr>
+              <a:lstStyle/>
+              <a:p>
+                <a:pPr marL="0" lvl="0" indent="0" algn="l" rtl="0">
+                  <a:spcBef>
+                    <a:spcPts val="0"/>
+                  </a:spcBef>
+                  <a:spcAft>
+                    <a:spcPts val="0"/>
+                  </a:spcAft>
+                  <a:buClr>
+                    <a:srgbClr val="000000"/>
+                  </a:buClr>
+                  <a:buSzPts val="1100"/>
+                  <a:buFont typeface="Arial" panose="020B0604020202020204"/>
+                  <a:buNone/>
+                </a:pPr>
+                <a:endParaRPr sz="1600">
+                  <a:solidFill>
+                    <a:srgbClr val="000000"/>
+                  </a:solidFill>
+                </a:endParaRPr>
+              </a:p>
+            </p:txBody>
+          </p:sp>
+          <p:sp>
+            <p:nvSpPr>
+              <p:cNvPr id="127" name="Google Shape;524;p25"/>
+              <p:cNvSpPr/>
+              <p:nvPr/>
+            </p:nvSpPr>
+            <p:spPr>
+              <a:xfrm>
+                <a:off x="6840" y="5849"/>
+                <a:ext cx="934" cy="963"/>
+              </a:xfrm>
+              <a:prstGeom prst="ellipse">
+                <a:avLst/>
+              </a:prstGeom>
+              <a:gradFill>
+                <a:gsLst>
+                  <a:gs pos="0">
+                    <a:srgbClr val="E0EDBA">
+                      <a:alpha val="79216"/>
+                    </a:srgbClr>
+                  </a:gs>
+                  <a:gs pos="100000">
+                    <a:srgbClr val="DE87F1">
+                      <a:alpha val="48235"/>
+                    </a:srgbClr>
+                  </a:gs>
+                </a:gsLst>
+                <a:lin ang="13500032" scaled="0"/>
+              </a:gradFill>
+              <a:ln w="9525" cap="flat" cmpd="sng">
+                <a:solidFill>
+                  <a:srgbClr val="595959"/>
+                </a:solidFill>
+                <a:prstDash val="solid"/>
+                <a:round/>
+                <a:headEnd type="none" w="sm" len="sm"/>
+                <a:tailEnd type="none" w="sm" len="sm"/>
+              </a:ln>
+            </p:spPr>
+            <p:txBody>
+              <a:bodyPr spcFirstLastPara="1" wrap="square" lIns="91425" tIns="91425" rIns="91425" bIns="91425" anchor="ctr" anchorCtr="0">
+                <a:noAutofit/>
+              </a:bodyPr>
+              <a:lstStyle/>
+              <a:p>
+                <a:pPr marL="0" lvl="0" indent="0" algn="l" rtl="0">
+                  <a:spcBef>
+                    <a:spcPts val="0"/>
+                  </a:spcBef>
+                  <a:spcAft>
+                    <a:spcPts val="0"/>
+                  </a:spcAft>
+                  <a:buClr>
+                    <a:srgbClr val="000000"/>
+                  </a:buClr>
+                  <a:buSzPts val="1100"/>
+                  <a:buFont typeface="Arial" panose="020B0604020202020204"/>
+                  <a:buNone/>
+                </a:pPr>
+                <a:endParaRPr sz="1600">
+                  <a:solidFill>
+                    <a:srgbClr val="000000"/>
+                  </a:solidFill>
+                </a:endParaRPr>
+              </a:p>
+            </p:txBody>
+          </p:sp>
+          <p:cxnSp>
+            <p:nvCxnSpPr>
+              <p:cNvPr id="128" name="Google Shape;526;p25"/>
+              <p:cNvCxnSpPr/>
+              <p:nvPr/>
+            </p:nvCxnSpPr>
+            <p:spPr>
+              <a:xfrm flipH="1">
+                <a:off x="5186" y="5064"/>
+                <a:ext cx="9" cy="709"/>
+              </a:xfrm>
+              <a:prstGeom prst="straightConnector1">
+                <a:avLst/>
+              </a:prstGeom>
+              <a:noFill/>
+              <a:ln w="28575" cap="flat" cmpd="sng">
+                <a:solidFill>
+                  <a:srgbClr val="595959"/>
+                </a:solidFill>
+                <a:prstDash val="dot"/>
+                <a:round/>
+                <a:headEnd type="none" w="med" len="med"/>
+                <a:tailEnd type="none" w="med" len="med"/>
+              </a:ln>
+            </p:spPr>
+          </p:cxnSp>
+          <p:sp>
+            <p:nvSpPr>
+              <p:cNvPr id="129" name="Google Shape;530;p25"/>
+              <p:cNvSpPr/>
+              <p:nvPr/>
+            </p:nvSpPr>
+            <p:spPr>
+              <a:xfrm>
+                <a:off x="2243" y="5113"/>
+                <a:ext cx="125" cy="108"/>
+              </a:xfrm>
+              <a:prstGeom prst="flowChartConnector">
+                <a:avLst/>
+              </a:prstGeom>
+              <a:solidFill>
+                <a:srgbClr val="B7B7B7"/>
+              </a:solidFill>
+              <a:ln w="9525" cap="flat" cmpd="sng">
+                <a:solidFill>
+                  <a:srgbClr val="595959"/>
+                </a:solidFill>
+                <a:prstDash val="solid"/>
+                <a:round/>
+                <a:headEnd type="none" w="sm" len="sm"/>
+                <a:tailEnd type="none" w="sm" len="sm"/>
+              </a:ln>
+            </p:spPr>
+            <p:txBody>
+              <a:bodyPr spcFirstLastPara="1" wrap="square" lIns="91425" tIns="91425" rIns="91425" bIns="91425" anchor="ctr" anchorCtr="0">
+                <a:noAutofit/>
+              </a:bodyPr>
+              <a:lstStyle/>
+              <a:p>
+                <a:pPr marL="0" lvl="0" indent="0" algn="l" rtl="0">
+                  <a:spcBef>
+                    <a:spcPts val="0"/>
+                  </a:spcBef>
+                  <a:spcAft>
+                    <a:spcPts val="0"/>
+                  </a:spcAft>
+                  <a:buNone/>
+                </a:pPr>
+              </a:p>
+            </p:txBody>
+          </p:sp>
+          <p:cxnSp>
+            <p:nvCxnSpPr>
+              <p:cNvPr id="130" name="Google Shape;531;p25"/>
+              <p:cNvCxnSpPr>
+                <a:endCxn id="120" idx="2"/>
+              </p:cNvCxnSpPr>
+              <p:nvPr/>
+            </p:nvCxnSpPr>
+            <p:spPr>
+              <a:xfrm rot="10800000" flipH="1">
+                <a:off x="2378" y="1947"/>
+                <a:ext cx="2346" cy="803"/>
+              </a:xfrm>
+              <a:prstGeom prst="straightConnector1">
+                <a:avLst/>
+              </a:prstGeom>
+              <a:noFill/>
+              <a:ln w="9525" cap="flat" cmpd="sng">
+                <a:solidFill>
+                  <a:srgbClr val="595959"/>
+                </a:solidFill>
+                <a:prstDash val="solid"/>
+                <a:round/>
+                <a:headEnd type="none" w="med" len="med"/>
+                <a:tailEnd type="triangle" w="med" len="med"/>
+              </a:ln>
+            </p:spPr>
+          </p:cxnSp>
+          <p:cxnSp>
+            <p:nvCxnSpPr>
+              <p:cNvPr id="131" name="Google Shape;532;p25"/>
+              <p:cNvCxnSpPr>
+                <a:stCxn id="114" idx="5"/>
+                <a:endCxn id="121" idx="2"/>
+              </p:cNvCxnSpPr>
+              <p:nvPr/>
+            </p:nvCxnSpPr>
+            <p:spPr>
+              <a:xfrm>
+                <a:off x="2350" y="2781"/>
+                <a:ext cx="2365" cy="385"/>
+              </a:xfrm>
+              <a:prstGeom prst="straightConnector1">
+                <a:avLst/>
+              </a:prstGeom>
+              <a:noFill/>
+              <a:ln w="9525" cap="flat" cmpd="sng">
+                <a:solidFill>
+                  <a:srgbClr val="595959"/>
+                </a:solidFill>
+                <a:prstDash val="solid"/>
+                <a:round/>
+                <a:headEnd type="none" w="med" len="med"/>
+                <a:tailEnd type="triangle" w="med" len="med"/>
+              </a:ln>
+            </p:spPr>
+          </p:cxnSp>
+          <p:cxnSp>
+            <p:nvCxnSpPr>
+              <p:cNvPr id="132" name="Google Shape;533;p25"/>
+              <p:cNvCxnSpPr>
+                <a:stCxn id="114" idx="5"/>
+                <a:endCxn id="122" idx="2"/>
+              </p:cNvCxnSpPr>
+              <p:nvPr/>
+            </p:nvCxnSpPr>
+            <p:spPr>
+              <a:xfrm>
+                <a:off x="2350" y="2781"/>
+                <a:ext cx="2374" cy="1604"/>
+              </a:xfrm>
+              <a:prstGeom prst="straightConnector1">
+                <a:avLst/>
+              </a:prstGeom>
+              <a:noFill/>
+              <a:ln w="9525" cap="flat" cmpd="sng">
+                <a:solidFill>
+                  <a:srgbClr val="595959"/>
+                </a:solidFill>
+                <a:prstDash val="solid"/>
+                <a:round/>
+                <a:headEnd type="none" w="med" len="med"/>
+                <a:tailEnd type="triangle" w="med" len="med"/>
+              </a:ln>
+            </p:spPr>
+          </p:cxnSp>
+          <p:cxnSp>
+            <p:nvCxnSpPr>
+              <p:cNvPr id="133" name="Google Shape;534;p25"/>
+              <p:cNvCxnSpPr>
+                <a:stCxn id="114" idx="5"/>
+                <a:endCxn id="123" idx="2"/>
+              </p:cNvCxnSpPr>
+              <p:nvPr/>
+            </p:nvCxnSpPr>
+            <p:spPr>
+              <a:xfrm>
+                <a:off x="2350" y="2781"/>
+                <a:ext cx="2374" cy="3550"/>
+              </a:xfrm>
+              <a:prstGeom prst="straightConnector1">
+                <a:avLst/>
+              </a:prstGeom>
+              <a:noFill/>
+              <a:ln w="9525" cap="flat" cmpd="sng">
+                <a:solidFill>
+                  <a:srgbClr val="595959"/>
+                </a:solidFill>
+                <a:prstDash val="solid"/>
+                <a:round/>
+                <a:headEnd type="none" w="med" len="med"/>
+                <a:tailEnd type="triangle" w="med" len="med"/>
+              </a:ln>
+            </p:spPr>
+          </p:cxnSp>
+          <p:cxnSp>
+            <p:nvCxnSpPr>
+              <p:cNvPr id="134" name="Google Shape;555;p25"/>
+              <p:cNvCxnSpPr>
+                <a:stCxn id="129" idx="5"/>
+                <a:endCxn id="120" idx="2"/>
+              </p:cNvCxnSpPr>
+              <p:nvPr/>
+            </p:nvCxnSpPr>
+            <p:spPr>
+              <a:xfrm rot="10800000" flipH="1">
+                <a:off x="2350" y="1947"/>
+                <a:ext cx="2374" cy="3258"/>
+              </a:xfrm>
+              <a:prstGeom prst="straightConnector1">
+                <a:avLst/>
+              </a:prstGeom>
+              <a:noFill/>
+              <a:ln w="9525" cap="flat" cmpd="sng">
+                <a:solidFill>
+                  <a:srgbClr val="595959"/>
+                </a:solidFill>
+                <a:prstDash val="solid"/>
+                <a:round/>
+                <a:headEnd type="none" w="med" len="med"/>
+                <a:tailEnd type="triangle" w="med" len="med"/>
+              </a:ln>
+            </p:spPr>
+          </p:cxnSp>
+          <p:cxnSp>
+            <p:nvCxnSpPr>
+              <p:cNvPr id="135" name="Google Shape;556;p25"/>
+              <p:cNvCxnSpPr>
+                <a:stCxn id="129" idx="5"/>
+                <a:endCxn id="121" idx="2"/>
+              </p:cNvCxnSpPr>
+              <p:nvPr/>
+            </p:nvCxnSpPr>
+            <p:spPr>
+              <a:xfrm rot="10800000" flipH="1">
+                <a:off x="2350" y="3166"/>
+                <a:ext cx="2365" cy="2039"/>
+              </a:xfrm>
+              <a:prstGeom prst="straightConnector1">
+                <a:avLst/>
+              </a:prstGeom>
+              <a:noFill/>
+              <a:ln w="9525" cap="flat" cmpd="sng">
+                <a:solidFill>
+                  <a:srgbClr val="595959"/>
+                </a:solidFill>
+                <a:prstDash val="solid"/>
+                <a:round/>
+                <a:headEnd type="none" w="med" len="med"/>
+                <a:tailEnd type="triangle" w="med" len="med"/>
+              </a:ln>
+            </p:spPr>
+          </p:cxnSp>
+          <p:cxnSp>
+            <p:nvCxnSpPr>
+              <p:cNvPr id="136" name="Google Shape;557;p25"/>
+              <p:cNvCxnSpPr>
+                <a:stCxn id="129" idx="5"/>
+                <a:endCxn id="122" idx="2"/>
+              </p:cNvCxnSpPr>
+              <p:nvPr/>
+            </p:nvCxnSpPr>
+            <p:spPr>
+              <a:xfrm rot="10800000" flipH="1">
+                <a:off x="2350" y="4385"/>
+                <a:ext cx="2374" cy="820"/>
+              </a:xfrm>
+              <a:prstGeom prst="straightConnector1">
+                <a:avLst/>
+              </a:prstGeom>
+              <a:noFill/>
+              <a:ln w="9525" cap="flat" cmpd="sng">
+                <a:solidFill>
+                  <a:srgbClr val="595959"/>
+                </a:solidFill>
+                <a:prstDash val="solid"/>
+                <a:round/>
+                <a:headEnd type="none" w="med" len="med"/>
+                <a:tailEnd type="triangle" w="med" len="med"/>
+              </a:ln>
+            </p:spPr>
+          </p:cxnSp>
+          <p:cxnSp>
+            <p:nvCxnSpPr>
+              <p:cNvPr id="137" name="Google Shape;558;p25"/>
+              <p:cNvCxnSpPr>
+                <a:stCxn id="129" idx="5"/>
+                <a:endCxn id="123" idx="2"/>
+              </p:cNvCxnSpPr>
+              <p:nvPr/>
+            </p:nvCxnSpPr>
+            <p:spPr>
+              <a:xfrm>
+                <a:off x="2350" y="5205"/>
+                <a:ext cx="2374" cy="1126"/>
+              </a:xfrm>
+              <a:prstGeom prst="straightConnector1">
+                <a:avLst/>
+              </a:prstGeom>
+              <a:noFill/>
+              <a:ln w="9525" cap="flat" cmpd="sng">
+                <a:solidFill>
+                  <a:srgbClr val="595959"/>
+                </a:solidFill>
+                <a:prstDash val="solid"/>
+                <a:round/>
+                <a:headEnd type="none" w="med" len="med"/>
+                <a:tailEnd type="triangle" w="med" len="med"/>
+              </a:ln>
+            </p:spPr>
+          </p:cxnSp>
+          <p:cxnSp>
+            <p:nvCxnSpPr>
+              <p:cNvPr id="138" name="Google Shape;559;p25"/>
+              <p:cNvCxnSpPr>
+                <a:stCxn id="120" idx="6"/>
+                <a:endCxn id="125" idx="2"/>
+              </p:cNvCxnSpPr>
+              <p:nvPr/>
+            </p:nvCxnSpPr>
+            <p:spPr>
+              <a:xfrm>
+                <a:off x="5658" y="1947"/>
+                <a:ext cx="1182" cy="1277"/>
+              </a:xfrm>
+              <a:prstGeom prst="straightConnector1">
+                <a:avLst/>
+              </a:prstGeom>
+              <a:noFill/>
+              <a:ln w="9525" cap="flat" cmpd="sng">
+                <a:solidFill>
+                  <a:srgbClr val="595959"/>
+                </a:solidFill>
+                <a:prstDash val="solid"/>
+                <a:round/>
+                <a:headEnd type="none" w="med" len="med"/>
+                <a:tailEnd type="triangle" w="med" len="med"/>
+              </a:ln>
+            </p:spPr>
+          </p:cxnSp>
+          <p:cxnSp>
+            <p:nvCxnSpPr>
+              <p:cNvPr id="139" name="Google Shape;560;p25"/>
+              <p:cNvCxnSpPr>
+                <a:stCxn id="120" idx="6"/>
+                <a:endCxn id="126" idx="2"/>
+              </p:cNvCxnSpPr>
+              <p:nvPr/>
+            </p:nvCxnSpPr>
+            <p:spPr>
+              <a:xfrm>
+                <a:off x="5658" y="1947"/>
+                <a:ext cx="1182" cy="2481"/>
+              </a:xfrm>
+              <a:prstGeom prst="straightConnector1">
+                <a:avLst/>
+              </a:prstGeom>
+              <a:noFill/>
+              <a:ln w="9525" cap="flat" cmpd="sng">
+                <a:solidFill>
+                  <a:srgbClr val="595959"/>
+                </a:solidFill>
+                <a:prstDash val="solid"/>
+                <a:round/>
+                <a:headEnd type="none" w="med" len="med"/>
+                <a:tailEnd type="triangle" w="med" len="med"/>
+              </a:ln>
+            </p:spPr>
+          </p:cxnSp>
+          <p:cxnSp>
+            <p:nvCxnSpPr>
+              <p:cNvPr id="140" name="Google Shape;561;p25"/>
+              <p:cNvCxnSpPr>
+                <a:stCxn id="120" idx="6"/>
+                <a:endCxn id="127" idx="2"/>
+              </p:cNvCxnSpPr>
+              <p:nvPr/>
+            </p:nvCxnSpPr>
+            <p:spPr>
+              <a:xfrm>
+                <a:off x="5658" y="1947"/>
+                <a:ext cx="1182" cy="4384"/>
+              </a:xfrm>
+              <a:prstGeom prst="straightConnector1">
+                <a:avLst/>
+              </a:prstGeom>
+              <a:noFill/>
+              <a:ln w="9525" cap="flat" cmpd="sng">
+                <a:solidFill>
+                  <a:srgbClr val="595959"/>
+                </a:solidFill>
+                <a:prstDash val="solid"/>
+                <a:round/>
+                <a:headEnd type="none" w="med" len="med"/>
+                <a:tailEnd type="triangle" w="med" len="med"/>
+              </a:ln>
+            </p:spPr>
+          </p:cxnSp>
+          <p:cxnSp>
+            <p:nvCxnSpPr>
+              <p:cNvPr id="141" name="Google Shape;562;p25"/>
+              <p:cNvCxnSpPr>
+                <a:stCxn id="121" idx="6"/>
+                <a:endCxn id="124" idx="2"/>
+              </p:cNvCxnSpPr>
+              <p:nvPr/>
+            </p:nvCxnSpPr>
+            <p:spPr>
+              <a:xfrm rot="10800000" flipH="1">
+                <a:off x="5648" y="1946"/>
+                <a:ext cx="1191" cy="1219"/>
+              </a:xfrm>
+              <a:prstGeom prst="straightConnector1">
+                <a:avLst/>
+              </a:prstGeom>
+              <a:noFill/>
+              <a:ln w="9525" cap="flat" cmpd="sng">
+                <a:solidFill>
+                  <a:srgbClr val="595959"/>
+                </a:solidFill>
+                <a:prstDash val="solid"/>
+                <a:round/>
+                <a:headEnd type="none" w="med" len="med"/>
+                <a:tailEnd type="triangle" w="med" len="med"/>
+              </a:ln>
+            </p:spPr>
+          </p:cxnSp>
+          <p:cxnSp>
+            <p:nvCxnSpPr>
+              <p:cNvPr id="142" name="Google Shape;563;p25"/>
+              <p:cNvCxnSpPr>
+                <a:stCxn id="121" idx="6"/>
+                <a:endCxn id="125" idx="2"/>
+              </p:cNvCxnSpPr>
+              <p:nvPr/>
+            </p:nvCxnSpPr>
+            <p:spPr>
+              <a:xfrm>
+                <a:off x="5648" y="3166"/>
+                <a:ext cx="1191" cy="59"/>
+              </a:xfrm>
+              <a:prstGeom prst="straightConnector1">
+                <a:avLst/>
+              </a:prstGeom>
+              <a:noFill/>
+              <a:ln w="9525" cap="flat" cmpd="sng">
+                <a:solidFill>
+                  <a:srgbClr val="595959"/>
+                </a:solidFill>
+                <a:prstDash val="solid"/>
+                <a:round/>
+                <a:headEnd type="none" w="med" len="med"/>
+                <a:tailEnd type="triangle" w="med" len="med"/>
+              </a:ln>
+            </p:spPr>
+          </p:cxnSp>
+          <p:cxnSp>
+            <p:nvCxnSpPr>
+              <p:cNvPr id="143" name="Google Shape;564;p25"/>
+              <p:cNvCxnSpPr>
+                <a:stCxn id="121" idx="6"/>
+                <a:endCxn id="126" idx="2"/>
+              </p:cNvCxnSpPr>
+              <p:nvPr/>
+            </p:nvCxnSpPr>
+            <p:spPr>
+              <a:xfrm>
+                <a:off x="5648" y="3166"/>
+                <a:ext cx="1191" cy="1262"/>
+              </a:xfrm>
+              <a:prstGeom prst="straightConnector1">
+                <a:avLst/>
+              </a:prstGeom>
+              <a:noFill/>
+              <a:ln w="9525" cap="flat" cmpd="sng">
+                <a:solidFill>
+                  <a:srgbClr val="595959"/>
+                </a:solidFill>
+                <a:prstDash val="solid"/>
+                <a:round/>
+                <a:headEnd type="none" w="med" len="med"/>
+                <a:tailEnd type="triangle" w="med" len="med"/>
+              </a:ln>
+            </p:spPr>
+          </p:cxnSp>
+          <p:cxnSp>
+            <p:nvCxnSpPr>
+              <p:cNvPr id="144" name="Google Shape;565;p25"/>
+              <p:cNvCxnSpPr>
+                <a:stCxn id="121" idx="6"/>
+                <a:endCxn id="127" idx="2"/>
+              </p:cNvCxnSpPr>
+              <p:nvPr/>
+            </p:nvCxnSpPr>
+            <p:spPr>
+              <a:xfrm>
+                <a:off x="5648" y="3166"/>
+                <a:ext cx="1191" cy="3165"/>
+              </a:xfrm>
+              <a:prstGeom prst="straightConnector1">
+                <a:avLst/>
+              </a:prstGeom>
+              <a:noFill/>
+              <a:ln w="9525" cap="flat" cmpd="sng">
+                <a:solidFill>
+                  <a:srgbClr val="595959"/>
+                </a:solidFill>
+                <a:prstDash val="solid"/>
+                <a:round/>
+                <a:headEnd type="none" w="med" len="med"/>
+                <a:tailEnd type="triangle" w="med" len="med"/>
+              </a:ln>
+            </p:spPr>
+          </p:cxnSp>
+          <p:cxnSp>
+            <p:nvCxnSpPr>
+              <p:cNvPr id="145" name="Google Shape;566;p25"/>
+              <p:cNvCxnSpPr>
+                <a:stCxn id="122" idx="6"/>
+                <a:endCxn id="124" idx="2"/>
+              </p:cNvCxnSpPr>
+              <p:nvPr/>
+            </p:nvCxnSpPr>
+            <p:spPr>
+              <a:xfrm rot="10800000" flipH="1">
+                <a:off x="5658" y="1947"/>
+                <a:ext cx="1182" cy="2438"/>
+              </a:xfrm>
+              <a:prstGeom prst="straightConnector1">
+                <a:avLst/>
+              </a:prstGeom>
+              <a:noFill/>
+              <a:ln w="9525" cap="flat" cmpd="sng">
+                <a:solidFill>
+                  <a:srgbClr val="595959"/>
+                </a:solidFill>
+                <a:prstDash val="solid"/>
+                <a:round/>
+                <a:headEnd type="none" w="med" len="med"/>
+                <a:tailEnd type="triangle" w="med" len="med"/>
+              </a:ln>
+            </p:spPr>
+          </p:cxnSp>
+          <p:cxnSp>
+            <p:nvCxnSpPr>
+              <p:cNvPr id="146" name="Google Shape;567;p25"/>
+              <p:cNvCxnSpPr>
+                <a:stCxn id="122" idx="6"/>
+                <a:endCxn id="125" idx="2"/>
+              </p:cNvCxnSpPr>
+              <p:nvPr/>
+            </p:nvCxnSpPr>
+            <p:spPr>
+              <a:xfrm rot="10800000" flipH="1">
+                <a:off x="5658" y="3224"/>
+                <a:ext cx="1182" cy="1161"/>
+              </a:xfrm>
+              <a:prstGeom prst="straightConnector1">
+                <a:avLst/>
+              </a:prstGeom>
+              <a:noFill/>
+              <a:ln w="9525" cap="flat" cmpd="sng">
+                <a:solidFill>
+                  <a:srgbClr val="595959"/>
+                </a:solidFill>
+                <a:prstDash val="solid"/>
+                <a:round/>
+                <a:headEnd type="none" w="med" len="med"/>
+                <a:tailEnd type="triangle" w="med" len="med"/>
+              </a:ln>
+            </p:spPr>
+          </p:cxnSp>
+          <p:cxnSp>
+            <p:nvCxnSpPr>
+              <p:cNvPr id="147" name="Google Shape;568;p25"/>
+              <p:cNvCxnSpPr>
+                <a:stCxn id="122" idx="6"/>
+                <a:endCxn id="126" idx="2"/>
+              </p:cNvCxnSpPr>
+              <p:nvPr/>
+            </p:nvCxnSpPr>
+            <p:spPr>
+              <a:xfrm>
+                <a:off x="5658" y="4385"/>
+                <a:ext cx="1182" cy="43"/>
+              </a:xfrm>
+              <a:prstGeom prst="straightConnector1">
+                <a:avLst/>
+              </a:prstGeom>
+              <a:noFill/>
+              <a:ln w="9525" cap="flat" cmpd="sng">
+                <a:solidFill>
+                  <a:srgbClr val="595959"/>
+                </a:solidFill>
+                <a:prstDash val="solid"/>
+                <a:round/>
+                <a:headEnd type="none" w="med" len="med"/>
+                <a:tailEnd type="triangle" w="med" len="med"/>
+              </a:ln>
+            </p:spPr>
+          </p:cxnSp>
+          <p:cxnSp>
+            <p:nvCxnSpPr>
+              <p:cNvPr id="148" name="Google Shape;569;p25"/>
+              <p:cNvCxnSpPr>
+                <a:stCxn id="122" idx="6"/>
+                <a:endCxn id="127" idx="2"/>
+              </p:cNvCxnSpPr>
+              <p:nvPr/>
+            </p:nvCxnSpPr>
+            <p:spPr>
+              <a:xfrm>
+                <a:off x="5658" y="4385"/>
+                <a:ext cx="1182" cy="1946"/>
+              </a:xfrm>
+              <a:prstGeom prst="straightConnector1">
+                <a:avLst/>
+              </a:prstGeom>
+              <a:noFill/>
+              <a:ln w="9525" cap="flat" cmpd="sng">
+                <a:solidFill>
+                  <a:srgbClr val="595959"/>
+                </a:solidFill>
+                <a:prstDash val="solid"/>
+                <a:round/>
+                <a:headEnd type="none" w="med" len="med"/>
+                <a:tailEnd type="triangle" w="med" len="med"/>
+              </a:ln>
+            </p:spPr>
+          </p:cxnSp>
+          <p:cxnSp>
+            <p:nvCxnSpPr>
+              <p:cNvPr id="149" name="Google Shape;570;p25"/>
+              <p:cNvCxnSpPr>
+                <a:endCxn id="124" idx="2"/>
+              </p:cNvCxnSpPr>
+              <p:nvPr/>
+            </p:nvCxnSpPr>
+            <p:spPr>
+              <a:xfrm rot="10800000" flipH="1">
+                <a:off x="5658" y="1947"/>
+                <a:ext cx="1182" cy="4440"/>
+              </a:xfrm>
+              <a:prstGeom prst="straightConnector1">
+                <a:avLst/>
+              </a:prstGeom>
+              <a:noFill/>
+              <a:ln w="9525" cap="flat" cmpd="sng">
+                <a:solidFill>
+                  <a:srgbClr val="595959"/>
+                </a:solidFill>
+                <a:prstDash val="solid"/>
+                <a:round/>
+                <a:headEnd type="none" w="med" len="med"/>
+                <a:tailEnd type="triangle" w="med" len="med"/>
+              </a:ln>
+            </p:spPr>
+          </p:cxnSp>
+          <p:cxnSp>
+            <p:nvCxnSpPr>
+              <p:cNvPr id="150" name="Google Shape;571;p25"/>
+              <p:cNvCxnSpPr>
+                <a:stCxn id="123" idx="6"/>
+                <a:endCxn id="125" idx="2"/>
+              </p:cNvCxnSpPr>
+              <p:nvPr/>
+            </p:nvCxnSpPr>
+            <p:spPr>
+              <a:xfrm rot="10800000" flipH="1">
+                <a:off x="5649" y="3224"/>
+                <a:ext cx="1191" cy="3107"/>
+              </a:xfrm>
+              <a:prstGeom prst="straightConnector1">
+                <a:avLst/>
+              </a:prstGeom>
+              <a:noFill/>
+              <a:ln w="9525" cap="flat" cmpd="sng">
+                <a:solidFill>
+                  <a:srgbClr val="595959"/>
+                </a:solidFill>
+                <a:prstDash val="solid"/>
+                <a:round/>
+                <a:headEnd type="none" w="med" len="med"/>
+                <a:tailEnd type="triangle" w="med" len="med"/>
+              </a:ln>
+            </p:spPr>
+          </p:cxnSp>
+          <p:cxnSp>
+            <p:nvCxnSpPr>
+              <p:cNvPr id="151" name="Google Shape;572;p25"/>
+              <p:cNvCxnSpPr>
+                <a:stCxn id="123" idx="6"/>
+                <a:endCxn id="126" idx="2"/>
+              </p:cNvCxnSpPr>
+              <p:nvPr/>
+            </p:nvCxnSpPr>
+            <p:spPr>
+              <a:xfrm rot="10800000" flipH="1">
+                <a:off x="5649" y="4428"/>
+                <a:ext cx="1191" cy="1903"/>
+              </a:xfrm>
+              <a:prstGeom prst="straightConnector1">
+                <a:avLst/>
+              </a:prstGeom>
+              <a:noFill/>
+              <a:ln w="9525" cap="flat" cmpd="sng">
+                <a:solidFill>
+                  <a:srgbClr val="595959"/>
+                </a:solidFill>
+                <a:prstDash val="solid"/>
+                <a:round/>
+                <a:headEnd type="none" w="med" len="med"/>
+                <a:tailEnd type="triangle" w="med" len="med"/>
+              </a:ln>
+            </p:spPr>
+          </p:cxnSp>
+          <p:cxnSp>
+            <p:nvCxnSpPr>
+              <p:cNvPr id="152" name="Google Shape;573;p25"/>
+              <p:cNvCxnSpPr>
+                <a:stCxn id="123" idx="6"/>
+                <a:endCxn id="127" idx="2"/>
+              </p:cNvCxnSpPr>
+              <p:nvPr/>
+            </p:nvCxnSpPr>
+            <p:spPr>
+              <a:xfrm>
+                <a:off x="5649" y="6331"/>
+                <a:ext cx="1191" cy="0"/>
+              </a:xfrm>
+              <a:prstGeom prst="straightConnector1">
+                <a:avLst/>
+              </a:prstGeom>
+              <a:noFill/>
+              <a:ln w="9525" cap="flat" cmpd="sng">
+                <a:solidFill>
+                  <a:srgbClr val="595959"/>
+                </a:solidFill>
+                <a:prstDash val="solid"/>
+                <a:round/>
+                <a:headEnd type="none" w="med" len="med"/>
+                <a:tailEnd type="triangle" w="med" len="med"/>
+              </a:ln>
+            </p:spPr>
+          </p:cxnSp>
+          <p:cxnSp>
+            <p:nvCxnSpPr>
+              <p:cNvPr id="153" name="Google Shape;591;p25"/>
+              <p:cNvCxnSpPr>
+                <a:endCxn id="115" idx="2"/>
+              </p:cNvCxnSpPr>
+              <p:nvPr/>
+            </p:nvCxnSpPr>
+            <p:spPr>
+              <a:xfrm rot="10800000" flipH="1">
+                <a:off x="7887" y="3798"/>
+                <a:ext cx="1568" cy="587"/>
+              </a:xfrm>
+              <a:prstGeom prst="straightConnector1">
+                <a:avLst/>
+              </a:prstGeom>
+              <a:noFill/>
+              <a:ln w="9525" cap="flat" cmpd="sng">
+                <a:solidFill>
+                  <a:srgbClr val="595959"/>
+                </a:solidFill>
+                <a:prstDash val="solid"/>
+                <a:round/>
+                <a:headEnd type="none" w="med" len="med"/>
+                <a:tailEnd type="triangle" w="med" len="med"/>
+              </a:ln>
+            </p:spPr>
+          </p:cxnSp>
+          <p:cxnSp>
+            <p:nvCxnSpPr>
+              <p:cNvPr id="154" name="Google Shape;593;p25"/>
+              <p:cNvCxnSpPr/>
+              <p:nvPr/>
+            </p:nvCxnSpPr>
+            <p:spPr>
+              <a:xfrm flipH="1">
+                <a:off x="7302" y="5064"/>
+                <a:ext cx="9" cy="709"/>
+              </a:xfrm>
+              <a:prstGeom prst="straightConnector1">
+                <a:avLst/>
+              </a:prstGeom>
+              <a:noFill/>
+              <a:ln w="28575" cap="flat" cmpd="sng">
+                <a:solidFill>
+                  <a:srgbClr val="595959"/>
+                </a:solidFill>
+                <a:prstDash val="dot"/>
+                <a:round/>
+                <a:headEnd type="none" w="med" len="med"/>
+                <a:tailEnd type="none" w="med" len="med"/>
+              </a:ln>
+            </p:spPr>
+          </p:cxnSp>
+        </p:grpSp>
+        <p:sp>
+          <p:nvSpPr>
+            <p:cNvPr id="156" name="文本框 155"/>
+            <p:cNvSpPr txBox="1"/>
+            <p:nvPr/>
+          </p:nvSpPr>
+          <p:spPr>
+            <a:xfrm>
+              <a:off x="4864" y="1531"/>
+              <a:ext cx="3800" cy="433"/>
+            </a:xfrm>
+            <a:prstGeom prst="rect">
+              <a:avLst/>
+            </a:prstGeom>
+            <a:noFill/>
+          </p:spPr>
+          <p:txBody>
+            <a:bodyPr wrap="square" rtlCol="0">
+              <a:spAutoFit/>
+            </a:bodyPr>
+            <a:p>
+              <a:pPr algn="ctr"/>
+              <a:r>
+                <a:rPr lang="en-US" altLang="zh-CN" sz="1600" b="1"/>
+                <a:t>5-frame window MLP</a:t>
+              </a:r>
+              <a:endParaRPr lang="en-US" altLang="zh-CN" sz="1600" b="1">
+                <a:sym typeface="+mn-ea"/>
+              </a:endParaRPr>
+            </a:p>
+          </p:txBody>
+        </p:sp>
+        <p:sp>
+          <p:nvSpPr>
+            <p:cNvPr id="157" name="文本框 156"/>
+            <p:cNvSpPr txBox="1"/>
+            <p:nvPr/>
+          </p:nvSpPr>
+          <p:spPr>
+            <a:xfrm>
+              <a:off x="3776" y="5115"/>
+              <a:ext cx="6411" cy="433"/>
+            </a:xfrm>
+            <a:prstGeom prst="rect">
+              <a:avLst/>
+            </a:prstGeom>
+            <a:noFill/>
+          </p:spPr>
+          <p:txBody>
+            <a:bodyPr wrap="square" rtlCol="0">
+              <a:spAutoFit/>
+            </a:bodyPr>
+            <a:p>
+              <a:pPr algn="ctr"/>
+              <a:r>
+                <a:rPr lang="en-US" altLang="zh-CN" sz="1600" b="1"/>
+                <a:t>2 hidden layer, each with 32 neurons.</a:t>
+              </a:r>
+              <a:endParaRPr lang="en-US" altLang="zh-CN" sz="1600" b="1"/>
+            </a:p>
+          </p:txBody>
+        </p:sp>
       </p:grpSp>
-      <p:cxnSp>
-        <p:nvCxnSpPr>
-          <p:cNvPr id="24" name="直接箭头连接符 23"/>
-          <p:cNvCxnSpPr/>
-          <p:nvPr/>
-        </p:nvCxnSpPr>
-        <p:spPr>
-          <a:xfrm flipV="1">
-            <a:off x="5327650" y="2106930"/>
-            <a:ext cx="684000" cy="7620"/>
-          </a:xfrm>
-          <a:prstGeom prst="straightConnector1">
-            <a:avLst/>
-          </a:prstGeom>
-          <a:ln>
-            <a:solidFill>
-              <a:srgbClr val="0E2841"/>
-            </a:solidFill>
-            <a:tailEnd type="arrow"/>
-          </a:ln>
-        </p:spPr>
-        <p:style>
-          <a:lnRef idx="2">
-            <a:schemeClr val="accent1"/>
-          </a:lnRef>
-          <a:fillRef idx="0">
-            <a:schemeClr val="accent1"/>
-          </a:fillRef>
-          <a:effectRef idx="1">
-            <a:schemeClr val="accent1"/>
-          </a:effectRef>
-          <a:fontRef idx="minor">
-            <a:schemeClr val="tx1"/>
-          </a:fontRef>
-        </p:style>
-      </p:cxnSp>
-      <p:sp>
-        <p:nvSpPr>
-          <p:cNvPr id="27" name="文本框 26"/>
+      <p:sp>
+        <p:nvSpPr>
+          <p:cNvPr id="9" name="文本框 8"/>
           <p:cNvSpPr txBox="1"/>
           <p:nvPr/>
         </p:nvSpPr>
         <p:spPr>
           <a:xfrm>
-            <a:off x="1055370" y="1656715"/>
-            <a:ext cx="1338580" cy="337185"/>
+            <a:off x="901700" y="4872355"/>
+            <a:ext cx="5356860" cy="1198880"/>
           </a:xfrm>
           <a:prstGeom prst="rect">
             <a:avLst/>
@@ -4886,1696 +7831,75 @@
             <a:spAutoFit/>
           </a:bodyPr>
           <a:p>
-            <a:pPr algn="ctr"/>
-            <a:r>
-              <a:rPr lang="en-US" altLang="zh-CN" sz="1600" b="1">
-                <a:latin typeface="Times New Roman" panose="02020603050405020304" charset="0"/>
-                <a:cs typeface="Times New Roman" panose="02020603050405020304" charset="0"/>
-                <a:sym typeface="+mn-ea"/>
-              </a:rPr>
-              <a:t>Distance</a:t>
-            </a:r>
-            <a:endParaRPr lang="en-US" altLang="zh-CN" sz="1600" b="1">
-              <a:latin typeface="Times New Roman" panose="02020603050405020304" charset="0"/>
-              <a:cs typeface="Times New Roman" panose="02020603050405020304" charset="0"/>
-              <a:sym typeface="+mn-ea"/>
-            </a:endParaRPr>
-          </a:p>
-        </p:txBody>
-      </p:sp>
-      <p:grpSp>
-        <p:nvGrpSpPr>
-          <p:cNvPr id="29" name="组合 28"/>
-          <p:cNvGrpSpPr/>
-          <p:nvPr/>
-        </p:nvGrpSpPr>
-        <p:grpSpPr>
-          <a:xfrm>
-            <a:off x="6082665" y="1583055"/>
-            <a:ext cx="1423670" cy="853440"/>
-            <a:chOff x="9310" y="4361"/>
-            <a:chExt cx="2242" cy="1344"/>
-          </a:xfrm>
-        </p:grpSpPr>
-        <p:sp>
-          <p:nvSpPr>
-            <p:cNvPr id="4861" name="Google Shape;4861;p44"/>
-            <p:cNvSpPr/>
-            <p:nvPr/>
-          </p:nvSpPr>
-          <p:spPr>
-            <a:xfrm>
-              <a:off x="9310" y="4361"/>
-              <a:ext cx="2192" cy="1344"/>
-            </a:xfrm>
-            <a:prstGeom prst="cube">
-              <a:avLst>
-                <a:gd name="adj" fmla="val 21848"/>
-              </a:avLst>
-            </a:prstGeom>
-            <a:solidFill>
-              <a:srgbClr val="09CDA6"/>
-            </a:solidFill>
-            <a:ln w="9525" cap="flat" cmpd="sng">
-              <a:noFill/>
-              <a:prstDash val="solid"/>
-              <a:round/>
-              <a:headEnd type="none" w="sm" len="sm"/>
-              <a:tailEnd type="none" w="sm" len="sm"/>
-            </a:ln>
-          </p:spPr>
-          <p:txBody>
-            <a:bodyPr spcFirstLastPara="1" wrap="square" lIns="121900" tIns="121900" rIns="121900" bIns="121900" anchor="ctr" anchorCtr="0">
-              <a:noAutofit/>
-            </a:bodyPr>
-            <a:lstStyle/>
-            <a:p>
-              <a:pPr marL="0" lvl="0" indent="0" algn="l" rtl="0">
-                <a:spcBef>
-                  <a:spcPts val="0"/>
-                </a:spcBef>
-                <a:spcAft>
-                  <a:spcPts val="0"/>
-                </a:spcAft>
-                <a:buNone/>
-              </a:pPr>
-              <a:endParaRPr sz="2400"/>
-            </a:p>
-          </p:txBody>
-        </p:sp>
-        <p:sp>
-          <p:nvSpPr>
-            <p:cNvPr id="28" name="文本框 27"/>
-            <p:cNvSpPr txBox="1"/>
-            <p:nvPr/>
-          </p:nvSpPr>
-          <p:spPr>
-            <a:xfrm>
-              <a:off x="9310" y="4688"/>
-              <a:ext cx="2242" cy="1016"/>
-            </a:xfrm>
-            <a:prstGeom prst="rect">
-              <a:avLst/>
-            </a:prstGeom>
-          </p:spPr>
-          <p:txBody>
-            <a:bodyPr wrap="square">
-              <a:spAutoFit/>
-            </a:bodyPr>
-            <a:p>
-              <a:r>
-                <a:rPr lang="en-US" altLang="zh-CN" sz="1800" b="1">
-                  <a:latin typeface="Times New Roman" panose="02020603050405020304" charset="0"/>
-                  <a:cs typeface="Times New Roman" panose="02020603050405020304" charset="0"/>
-                </a:rPr>
-                <a:t>Fingertip </a:t>
-              </a:r>
-              <a:endParaRPr lang="en-US" altLang="zh-CN" sz="1800" b="1">
-                <a:latin typeface="Times New Roman" panose="02020603050405020304" charset="0"/>
-                <a:cs typeface="Times New Roman" panose="02020603050405020304" charset="0"/>
-              </a:endParaRPr>
-            </a:p>
-            <a:p>
-              <a:r>
-                <a:rPr lang="en-US" altLang="zh-CN" sz="1800" b="1">
-                  <a:latin typeface="Times New Roman" panose="02020603050405020304" charset="0"/>
-                  <a:cs typeface="Times New Roman" panose="02020603050405020304" charset="0"/>
-                </a:rPr>
-                <a:t>Aperture</a:t>
-              </a:r>
-              <a:endParaRPr lang="en-US" altLang="ja-JP" sz="1600"/>
-            </a:p>
-          </p:txBody>
-        </p:sp>
-      </p:grpSp>
-      <p:grpSp>
-        <p:nvGrpSpPr>
-          <p:cNvPr id="155" name="组合 154"/>
-          <p:cNvGrpSpPr/>
-          <p:nvPr/>
-        </p:nvGrpSpPr>
-        <p:grpSpPr>
-          <a:xfrm>
-            <a:off x="3118485" y="1320800"/>
-            <a:ext cx="2145030" cy="1884045"/>
-            <a:chOff x="2243" y="1465"/>
-            <a:chExt cx="8060" cy="5346"/>
-          </a:xfrm>
-        </p:grpSpPr>
-        <p:sp>
-          <p:nvSpPr>
-            <p:cNvPr id="114" name="Google Shape;500;p25"/>
-            <p:cNvSpPr/>
-            <p:nvPr/>
-          </p:nvSpPr>
-          <p:spPr>
-            <a:xfrm>
-              <a:off x="2243" y="2689"/>
-              <a:ext cx="125" cy="108"/>
-            </a:xfrm>
-            <a:prstGeom prst="flowChartConnector">
-              <a:avLst/>
-            </a:prstGeom>
-            <a:solidFill>
-              <a:srgbClr val="B7B7B7"/>
-            </a:solidFill>
-            <a:ln w="9525" cap="flat" cmpd="sng">
-              <a:solidFill>
-                <a:srgbClr val="595959"/>
-              </a:solidFill>
-              <a:prstDash val="solid"/>
-              <a:round/>
-              <a:headEnd type="none" w="sm" len="sm"/>
-              <a:tailEnd type="none" w="sm" len="sm"/>
-            </a:ln>
-          </p:spPr>
-          <p:txBody>
-            <a:bodyPr spcFirstLastPara="1" wrap="square" lIns="91425" tIns="91425" rIns="91425" bIns="91425" anchor="ctr" anchorCtr="0">
-              <a:noAutofit/>
-            </a:bodyPr>
-            <a:lstStyle/>
-            <a:p>
-              <a:pPr marL="0" lvl="0" indent="0" algn="l" rtl="0">
-                <a:spcBef>
-                  <a:spcPts val="0"/>
-                </a:spcBef>
-                <a:spcAft>
-                  <a:spcPts val="0"/>
-                </a:spcAft>
-                <a:buNone/>
-              </a:pPr>
-            </a:p>
-          </p:txBody>
-        </p:sp>
-        <p:sp>
-          <p:nvSpPr>
-            <p:cNvPr id="115" name="Google Shape;503;p25"/>
-            <p:cNvSpPr/>
-            <p:nvPr/>
-          </p:nvSpPr>
-          <p:spPr>
-            <a:xfrm>
-              <a:off x="9455" y="3359"/>
-              <a:ext cx="849" cy="878"/>
-            </a:xfrm>
-            <a:prstGeom prst="ellipse">
-              <a:avLst/>
-            </a:prstGeom>
-            <a:solidFill>
-              <a:srgbClr val="F4CCCC"/>
-            </a:solidFill>
-            <a:ln w="9525" cap="flat" cmpd="sng">
-              <a:solidFill>
-                <a:srgbClr val="595959"/>
-              </a:solidFill>
-              <a:prstDash val="solid"/>
-              <a:round/>
-              <a:headEnd type="none" w="sm" len="sm"/>
-              <a:tailEnd type="none" w="sm" len="sm"/>
-            </a:ln>
-          </p:spPr>
-          <p:txBody>
-            <a:bodyPr spcFirstLastPara="1" wrap="square" lIns="91425" tIns="91425" rIns="91425" bIns="91425" anchor="ctr" anchorCtr="0">
-              <a:noAutofit/>
-            </a:bodyPr>
-            <a:lstStyle/>
-            <a:p>
-              <a:pPr marL="0" lvl="0" indent="0" algn="l" rtl="0">
-                <a:spcBef>
-                  <a:spcPts val="0"/>
-                </a:spcBef>
-                <a:spcAft>
-                  <a:spcPts val="0"/>
-                </a:spcAft>
-                <a:buClr>
-                  <a:srgbClr val="000000"/>
-                </a:buClr>
-                <a:buSzPts val="1100"/>
-                <a:buFont typeface="Arial" panose="020B0604020202020204"/>
-                <a:buNone/>
-              </a:pPr>
-              <a:endParaRPr sz="1600">
-                <a:solidFill>
-                  <a:srgbClr val="000000"/>
-                </a:solidFill>
-              </a:endParaRPr>
-            </a:p>
-          </p:txBody>
-        </p:sp>
-        <p:cxnSp>
-          <p:nvCxnSpPr>
-            <p:cNvPr id="116" name="Google Shape;510;p25"/>
-            <p:cNvCxnSpPr>
-              <a:endCxn id="115" idx="2"/>
-            </p:cNvCxnSpPr>
-            <p:nvPr/>
-          </p:nvCxnSpPr>
-          <p:spPr>
-            <a:xfrm rot="10800000" flipH="1">
-              <a:off x="7887" y="3798"/>
-              <a:ext cx="1568" cy="2505"/>
-            </a:xfrm>
-            <a:prstGeom prst="straightConnector1">
-              <a:avLst/>
-            </a:prstGeom>
-            <a:noFill/>
-            <a:ln w="9525" cap="flat" cmpd="sng">
-              <a:solidFill>
-                <a:srgbClr val="595959"/>
-              </a:solidFill>
-              <a:prstDash val="solid"/>
-              <a:round/>
-              <a:headEnd type="none" w="med" len="med"/>
-              <a:tailEnd type="triangle" w="med" len="med"/>
-            </a:ln>
-          </p:spPr>
-        </p:cxnSp>
-        <p:cxnSp>
-          <p:nvCxnSpPr>
-            <p:cNvPr id="117" name="Google Shape;512;p25"/>
-            <p:cNvCxnSpPr>
-              <a:endCxn id="115" idx="2"/>
-            </p:cNvCxnSpPr>
-            <p:nvPr/>
-          </p:nvCxnSpPr>
-          <p:spPr>
-            <a:xfrm>
-              <a:off x="7887" y="3166"/>
-              <a:ext cx="1568" cy="632"/>
-            </a:xfrm>
-            <a:prstGeom prst="straightConnector1">
-              <a:avLst/>
-            </a:prstGeom>
-            <a:noFill/>
-            <a:ln w="9525" cap="flat" cmpd="sng">
-              <a:solidFill>
-                <a:srgbClr val="595959"/>
-              </a:solidFill>
-              <a:prstDash val="solid"/>
-              <a:round/>
-              <a:headEnd type="none" w="med" len="med"/>
-              <a:tailEnd type="triangle" w="med" len="med"/>
-            </a:ln>
-          </p:spPr>
-        </p:cxnSp>
-        <p:cxnSp>
-          <p:nvCxnSpPr>
-            <p:cNvPr id="118" name="Google Shape;514;p25"/>
-            <p:cNvCxnSpPr>
-              <a:endCxn id="115" idx="2"/>
-            </p:cNvCxnSpPr>
-            <p:nvPr/>
-          </p:nvCxnSpPr>
-          <p:spPr>
-            <a:xfrm>
-              <a:off x="7887" y="1947"/>
-              <a:ext cx="1568" cy="1851"/>
-            </a:xfrm>
-            <a:prstGeom prst="straightConnector1">
-              <a:avLst/>
-            </a:prstGeom>
-            <a:noFill/>
-            <a:ln w="9525" cap="flat" cmpd="sng">
-              <a:solidFill>
-                <a:srgbClr val="595959"/>
-              </a:solidFill>
-              <a:prstDash val="solid"/>
-              <a:round/>
-              <a:headEnd type="none" w="med" len="med"/>
-              <a:tailEnd type="triangle" w="med" len="med"/>
-            </a:ln>
-          </p:spPr>
-        </p:cxnSp>
-        <p:cxnSp>
-          <p:nvCxnSpPr>
-            <p:cNvPr id="119" name="Google Shape;516;p25"/>
-            <p:cNvCxnSpPr>
-              <a:stCxn id="120" idx="6"/>
-              <a:endCxn id="124" idx="2"/>
-            </p:cNvCxnSpPr>
-            <p:nvPr/>
-          </p:nvCxnSpPr>
-          <p:spPr>
-            <a:xfrm>
-              <a:off x="5658" y="1947"/>
-              <a:ext cx="1182" cy="0"/>
-            </a:xfrm>
-            <a:prstGeom prst="straightConnector1">
-              <a:avLst/>
-            </a:prstGeom>
-            <a:noFill/>
-            <a:ln w="9525" cap="flat" cmpd="sng">
-              <a:solidFill>
-                <a:srgbClr val="595959"/>
-              </a:solidFill>
-              <a:prstDash val="solid"/>
-              <a:round/>
-              <a:headEnd type="none" w="med" len="med"/>
-              <a:tailEnd type="triangle" w="med" len="med"/>
-            </a:ln>
-          </p:spPr>
-        </p:cxnSp>
-        <p:sp>
-          <p:nvSpPr>
-            <p:cNvPr id="120" name="Google Shape;517;p25"/>
-            <p:cNvSpPr/>
-            <p:nvPr/>
-          </p:nvSpPr>
-          <p:spPr>
-            <a:xfrm>
-              <a:off x="4724" y="1465"/>
-              <a:ext cx="934" cy="963"/>
-            </a:xfrm>
-            <a:prstGeom prst="ellipse">
-              <a:avLst/>
-            </a:prstGeom>
-            <a:gradFill>
-              <a:gsLst>
-                <a:gs pos="0">
-                  <a:srgbClr val="E0EDBA">
-                    <a:alpha val="79216"/>
-                  </a:srgbClr>
-                </a:gs>
-                <a:gs pos="100000">
-                  <a:srgbClr val="DE87F1">
-                    <a:alpha val="48235"/>
-                  </a:srgbClr>
-                </a:gs>
-              </a:gsLst>
-              <a:lin ang="13500032" scaled="0"/>
-            </a:gradFill>
-            <a:ln w="9525" cap="flat" cmpd="sng">
-              <a:solidFill>
-                <a:srgbClr val="595959"/>
-              </a:solidFill>
-              <a:prstDash val="solid"/>
-              <a:round/>
-              <a:headEnd type="none" w="sm" len="sm"/>
-              <a:tailEnd type="none" w="sm" len="sm"/>
-            </a:ln>
-          </p:spPr>
-          <p:txBody>
-            <a:bodyPr spcFirstLastPara="1" wrap="square" lIns="91425" tIns="91425" rIns="91425" bIns="91425" anchor="ctr" anchorCtr="0">
-              <a:noAutofit/>
-            </a:bodyPr>
-            <a:lstStyle/>
-            <a:p>
-              <a:pPr marL="0" lvl="0" indent="0" algn="l" rtl="0">
-                <a:spcBef>
-                  <a:spcPts val="0"/>
-                </a:spcBef>
-                <a:spcAft>
-                  <a:spcPts val="0"/>
-                </a:spcAft>
-                <a:buClr>
-                  <a:srgbClr val="000000"/>
-                </a:buClr>
-                <a:buSzPts val="1100"/>
-                <a:buFont typeface="Arial" panose="020B0604020202020204"/>
-                <a:buNone/>
-              </a:pPr>
-              <a:r>
-                <a:rPr lang="en-GB" sz="1100"/>
-                <a:t> </a:t>
-              </a:r>
-              <a:endParaRPr sz="1200" baseline="-25000"/>
-            </a:p>
-          </p:txBody>
-        </p:sp>
-        <p:sp>
-          <p:nvSpPr>
-            <p:cNvPr id="121" name="Google Shape;519;p25"/>
-            <p:cNvSpPr/>
-            <p:nvPr/>
-          </p:nvSpPr>
-          <p:spPr>
-            <a:xfrm>
-              <a:off x="4714" y="2684"/>
-              <a:ext cx="934" cy="963"/>
-            </a:xfrm>
-            <a:prstGeom prst="ellipse">
-              <a:avLst/>
-            </a:prstGeom>
-            <a:gradFill>
-              <a:gsLst>
-                <a:gs pos="0">
-                  <a:srgbClr val="E0EDBA">
-                    <a:alpha val="79216"/>
-                  </a:srgbClr>
-                </a:gs>
-                <a:gs pos="100000">
-                  <a:srgbClr val="DE87F1">
-                    <a:alpha val="48235"/>
-                  </a:srgbClr>
-                </a:gs>
-              </a:gsLst>
-              <a:lin ang="13500032" scaled="0"/>
-            </a:gradFill>
-            <a:ln w="9525" cap="flat" cmpd="sng">
-              <a:solidFill>
-                <a:srgbClr val="595959"/>
-              </a:solidFill>
-              <a:prstDash val="solid"/>
-              <a:round/>
-              <a:headEnd type="none" w="sm" len="sm"/>
-              <a:tailEnd type="none" w="sm" len="sm"/>
-            </a:ln>
-          </p:spPr>
-          <p:txBody>
-            <a:bodyPr spcFirstLastPara="1" wrap="square" lIns="91425" tIns="91425" rIns="91425" bIns="91425" anchor="ctr" anchorCtr="0">
-              <a:noAutofit/>
-            </a:bodyPr>
-            <a:lstStyle/>
-            <a:p>
-              <a:pPr marL="0" lvl="0" indent="0" algn="l" rtl="0">
-                <a:spcBef>
-                  <a:spcPts val="0"/>
-                </a:spcBef>
-                <a:spcAft>
-                  <a:spcPts val="0"/>
-                </a:spcAft>
-                <a:buClr>
-                  <a:srgbClr val="000000"/>
-                </a:buClr>
-                <a:buSzPts val="1100"/>
-                <a:buFont typeface="Arial" panose="020B0604020202020204"/>
-                <a:buNone/>
-              </a:pPr>
-              <a:r>
-                <a:rPr lang="en-GB" sz="1100"/>
-                <a:t> </a:t>
-              </a:r>
-              <a:endParaRPr sz="1600">
-                <a:solidFill>
-                  <a:srgbClr val="000000"/>
-                </a:solidFill>
-              </a:endParaRPr>
-            </a:p>
-          </p:txBody>
-        </p:sp>
-        <p:sp>
-          <p:nvSpPr>
-            <p:cNvPr id="122" name="Google Shape;520;p25"/>
-            <p:cNvSpPr/>
-            <p:nvPr/>
-          </p:nvSpPr>
-          <p:spPr>
-            <a:xfrm>
-              <a:off x="4724" y="3903"/>
-              <a:ext cx="934" cy="963"/>
-            </a:xfrm>
-            <a:prstGeom prst="ellipse">
-              <a:avLst/>
-            </a:prstGeom>
-            <a:gradFill>
-              <a:gsLst>
-                <a:gs pos="0">
-                  <a:srgbClr val="E0EDBA">
-                    <a:alpha val="79216"/>
-                  </a:srgbClr>
-                </a:gs>
-                <a:gs pos="100000">
-                  <a:srgbClr val="DE87F1">
-                    <a:alpha val="48235"/>
-                  </a:srgbClr>
-                </a:gs>
-              </a:gsLst>
-              <a:lin ang="13500032" scaled="0"/>
-            </a:gradFill>
-            <a:ln w="9525" cap="flat" cmpd="sng">
-              <a:solidFill>
-                <a:srgbClr val="595959"/>
-              </a:solidFill>
-              <a:prstDash val="solid"/>
-              <a:round/>
-              <a:headEnd type="none" w="sm" len="sm"/>
-              <a:tailEnd type="none" w="sm" len="sm"/>
-            </a:ln>
-          </p:spPr>
-          <p:txBody>
-            <a:bodyPr spcFirstLastPara="1" wrap="square" lIns="91425" tIns="91425" rIns="91425" bIns="91425" anchor="ctr" anchorCtr="0">
-              <a:noAutofit/>
-            </a:bodyPr>
-            <a:lstStyle/>
-            <a:p>
-              <a:pPr marL="0" lvl="0" indent="0" algn="l" rtl="0">
-                <a:spcBef>
-                  <a:spcPts val="0"/>
-                </a:spcBef>
-                <a:spcAft>
-                  <a:spcPts val="0"/>
-                </a:spcAft>
-                <a:buClr>
-                  <a:srgbClr val="000000"/>
-                </a:buClr>
-                <a:buSzPts val="1100"/>
-                <a:buFont typeface="Arial" panose="020B0604020202020204"/>
-                <a:buNone/>
-              </a:pPr>
-              <a:r>
-                <a:rPr lang="en-GB" sz="1100"/>
-                <a:t> </a:t>
-              </a:r>
-              <a:endParaRPr sz="1600">
-                <a:solidFill>
-                  <a:srgbClr val="000000"/>
-                </a:solidFill>
-              </a:endParaRPr>
-            </a:p>
-          </p:txBody>
-        </p:sp>
-        <p:sp>
-          <p:nvSpPr>
-            <p:cNvPr id="123" name="Google Shape;521;p25"/>
-            <p:cNvSpPr/>
-            <p:nvPr/>
-          </p:nvSpPr>
-          <p:spPr>
-            <a:xfrm>
-              <a:off x="4724" y="5849"/>
-              <a:ext cx="925" cy="963"/>
-            </a:xfrm>
-            <a:prstGeom prst="ellipse">
-              <a:avLst/>
-            </a:prstGeom>
-            <a:gradFill>
-              <a:gsLst>
-                <a:gs pos="0">
-                  <a:srgbClr val="E0EDBA">
-                    <a:alpha val="79216"/>
-                  </a:srgbClr>
-                </a:gs>
-                <a:gs pos="100000">
-                  <a:srgbClr val="DE87F1">
-                    <a:alpha val="48235"/>
-                  </a:srgbClr>
-                </a:gs>
-              </a:gsLst>
-              <a:lin ang="13500032" scaled="0"/>
-            </a:gradFill>
-            <a:ln w="9525" cap="flat" cmpd="sng">
-              <a:solidFill>
-                <a:srgbClr val="595959"/>
-              </a:solidFill>
-              <a:prstDash val="solid"/>
-              <a:round/>
-              <a:headEnd type="none" w="sm" len="sm"/>
-              <a:tailEnd type="none" w="sm" len="sm"/>
-            </a:ln>
-          </p:spPr>
-          <p:txBody>
-            <a:bodyPr spcFirstLastPara="1" wrap="square" lIns="91425" tIns="91425" rIns="91425" bIns="91425" anchor="ctr" anchorCtr="0">
-              <a:noAutofit/>
-            </a:bodyPr>
-            <a:lstStyle/>
-            <a:p>
-              <a:pPr marL="0" lvl="0" indent="0" algn="l" rtl="0">
-                <a:spcBef>
-                  <a:spcPts val="0"/>
-                </a:spcBef>
-                <a:spcAft>
-                  <a:spcPts val="0"/>
-                </a:spcAft>
-                <a:buClr>
-                  <a:srgbClr val="000000"/>
-                </a:buClr>
-                <a:buSzPts val="1100"/>
-                <a:buFont typeface="Arial" panose="020B0604020202020204"/>
-                <a:buNone/>
-              </a:pPr>
-              <a:endParaRPr sz="1100">
-                <a:solidFill>
-                  <a:srgbClr val="000000"/>
-                </a:solidFill>
-              </a:endParaRPr>
-            </a:p>
-          </p:txBody>
-        </p:sp>
-        <p:sp>
-          <p:nvSpPr>
-            <p:cNvPr id="124" name="Google Shape;518;p25"/>
-            <p:cNvSpPr/>
-            <p:nvPr/>
-          </p:nvSpPr>
-          <p:spPr>
-            <a:xfrm>
-              <a:off x="6840" y="1465"/>
-              <a:ext cx="934" cy="963"/>
-            </a:xfrm>
-            <a:prstGeom prst="ellipse">
-              <a:avLst/>
-            </a:prstGeom>
-            <a:gradFill>
-              <a:gsLst>
-                <a:gs pos="0">
-                  <a:srgbClr val="E0EDBA">
-                    <a:alpha val="79216"/>
-                  </a:srgbClr>
-                </a:gs>
-                <a:gs pos="100000">
-                  <a:srgbClr val="DE87F1">
-                    <a:alpha val="48235"/>
-                  </a:srgbClr>
-                </a:gs>
-              </a:gsLst>
-              <a:lin ang="13500032" scaled="0"/>
-            </a:gradFill>
-            <a:ln w="9525" cap="flat" cmpd="sng">
-              <a:solidFill>
-                <a:srgbClr val="595959"/>
-              </a:solidFill>
-              <a:prstDash val="solid"/>
-              <a:round/>
-              <a:headEnd type="none" w="sm" len="sm"/>
-              <a:tailEnd type="none" w="sm" len="sm"/>
-            </a:ln>
-          </p:spPr>
-          <p:txBody>
-            <a:bodyPr spcFirstLastPara="1" wrap="square" lIns="91425" tIns="91425" rIns="91425" bIns="91425" anchor="ctr" anchorCtr="0">
-              <a:noAutofit/>
-            </a:bodyPr>
-            <a:lstStyle/>
-            <a:p>
-              <a:pPr marL="0" lvl="0" indent="0" algn="l" rtl="0">
-                <a:spcBef>
-                  <a:spcPts val="0"/>
-                </a:spcBef>
-                <a:spcAft>
-                  <a:spcPts val="0"/>
-                </a:spcAft>
-                <a:buClr>
-                  <a:srgbClr val="000000"/>
-                </a:buClr>
-                <a:buSzPts val="1100"/>
-                <a:buFont typeface="Arial" panose="020B0604020202020204"/>
-                <a:buNone/>
-              </a:pPr>
-              <a:endParaRPr sz="1200" baseline="-25000"/>
-            </a:p>
-          </p:txBody>
-        </p:sp>
-        <p:sp>
-          <p:nvSpPr>
-            <p:cNvPr id="125" name="Google Shape;522;p25"/>
-            <p:cNvSpPr/>
-            <p:nvPr/>
-          </p:nvSpPr>
-          <p:spPr>
-            <a:xfrm>
-              <a:off x="6840" y="2743"/>
-              <a:ext cx="934" cy="963"/>
-            </a:xfrm>
-            <a:prstGeom prst="ellipse">
-              <a:avLst/>
-            </a:prstGeom>
-            <a:gradFill>
-              <a:gsLst>
-                <a:gs pos="0">
-                  <a:srgbClr val="E0EDBA">
-                    <a:alpha val="79216"/>
-                  </a:srgbClr>
-                </a:gs>
-                <a:gs pos="100000">
-                  <a:srgbClr val="DE87F1">
-                    <a:alpha val="48235"/>
-                  </a:srgbClr>
-                </a:gs>
-              </a:gsLst>
-              <a:lin ang="13500032" scaled="0"/>
-            </a:gradFill>
-            <a:ln w="9525" cap="flat" cmpd="sng">
-              <a:solidFill>
-                <a:srgbClr val="595959"/>
-              </a:solidFill>
-              <a:prstDash val="solid"/>
-              <a:round/>
-              <a:headEnd type="none" w="sm" len="sm"/>
-              <a:tailEnd type="none" w="sm" len="sm"/>
-            </a:ln>
-          </p:spPr>
-          <p:txBody>
-            <a:bodyPr spcFirstLastPara="1" wrap="square" lIns="91425" tIns="91425" rIns="91425" bIns="91425" anchor="ctr" anchorCtr="0">
-              <a:noAutofit/>
-            </a:bodyPr>
-            <a:lstStyle/>
-            <a:p>
-              <a:pPr marL="0" lvl="0" indent="0" algn="l" rtl="0">
-                <a:spcBef>
-                  <a:spcPts val="0"/>
-                </a:spcBef>
-                <a:spcAft>
-                  <a:spcPts val="0"/>
-                </a:spcAft>
-                <a:buClr>
-                  <a:srgbClr val="000000"/>
-                </a:buClr>
-                <a:buSzPts val="1100"/>
-                <a:buFont typeface="Arial" panose="020B0604020202020204"/>
-                <a:buNone/>
-              </a:pPr>
-              <a:endParaRPr sz="1600">
-                <a:solidFill>
-                  <a:srgbClr val="000000"/>
-                </a:solidFill>
-              </a:endParaRPr>
-            </a:p>
-          </p:txBody>
-        </p:sp>
-        <p:sp>
-          <p:nvSpPr>
-            <p:cNvPr id="126" name="Google Shape;523;p25"/>
-            <p:cNvSpPr/>
-            <p:nvPr/>
-          </p:nvSpPr>
-          <p:spPr>
-            <a:xfrm>
-              <a:off x="6840" y="3946"/>
-              <a:ext cx="934" cy="963"/>
-            </a:xfrm>
-            <a:prstGeom prst="ellipse">
-              <a:avLst/>
-            </a:prstGeom>
-            <a:gradFill>
-              <a:gsLst>
-                <a:gs pos="0">
-                  <a:srgbClr val="E0EDBA">
-                    <a:alpha val="79216"/>
-                  </a:srgbClr>
-                </a:gs>
-                <a:gs pos="100000">
-                  <a:srgbClr val="DE87F1">
-                    <a:alpha val="48235"/>
-                  </a:srgbClr>
-                </a:gs>
-              </a:gsLst>
-              <a:lin ang="13500032" scaled="0"/>
-            </a:gradFill>
-            <a:ln w="9525" cap="flat" cmpd="sng">
-              <a:solidFill>
-                <a:srgbClr val="595959"/>
-              </a:solidFill>
-              <a:prstDash val="solid"/>
-              <a:round/>
-              <a:headEnd type="none" w="sm" len="sm"/>
-              <a:tailEnd type="none" w="sm" len="sm"/>
-            </a:ln>
-          </p:spPr>
-          <p:txBody>
-            <a:bodyPr spcFirstLastPara="1" wrap="square" lIns="91425" tIns="91425" rIns="91425" bIns="91425" anchor="ctr" anchorCtr="0">
-              <a:noAutofit/>
-            </a:bodyPr>
-            <a:lstStyle/>
-            <a:p>
-              <a:pPr marL="0" lvl="0" indent="0" algn="l" rtl="0">
-                <a:spcBef>
-                  <a:spcPts val="0"/>
-                </a:spcBef>
-                <a:spcAft>
-                  <a:spcPts val="0"/>
-                </a:spcAft>
-                <a:buClr>
-                  <a:srgbClr val="000000"/>
-                </a:buClr>
-                <a:buSzPts val="1100"/>
-                <a:buFont typeface="Arial" panose="020B0604020202020204"/>
-                <a:buNone/>
-              </a:pPr>
-              <a:endParaRPr sz="1600">
-                <a:solidFill>
-                  <a:srgbClr val="000000"/>
-                </a:solidFill>
-              </a:endParaRPr>
-            </a:p>
-          </p:txBody>
-        </p:sp>
-        <p:sp>
-          <p:nvSpPr>
-            <p:cNvPr id="127" name="Google Shape;524;p25"/>
-            <p:cNvSpPr/>
-            <p:nvPr/>
-          </p:nvSpPr>
-          <p:spPr>
-            <a:xfrm>
-              <a:off x="6840" y="5849"/>
-              <a:ext cx="934" cy="963"/>
-            </a:xfrm>
-            <a:prstGeom prst="ellipse">
-              <a:avLst/>
-            </a:prstGeom>
-            <a:gradFill>
-              <a:gsLst>
-                <a:gs pos="0">
-                  <a:srgbClr val="E0EDBA">
-                    <a:alpha val="79216"/>
-                  </a:srgbClr>
-                </a:gs>
-                <a:gs pos="100000">
-                  <a:srgbClr val="DE87F1">
-                    <a:alpha val="48235"/>
-                  </a:srgbClr>
-                </a:gs>
-              </a:gsLst>
-              <a:lin ang="13500032" scaled="0"/>
-            </a:gradFill>
-            <a:ln w="9525" cap="flat" cmpd="sng">
-              <a:solidFill>
-                <a:srgbClr val="595959"/>
-              </a:solidFill>
-              <a:prstDash val="solid"/>
-              <a:round/>
-              <a:headEnd type="none" w="sm" len="sm"/>
-              <a:tailEnd type="none" w="sm" len="sm"/>
-            </a:ln>
-          </p:spPr>
-          <p:txBody>
-            <a:bodyPr spcFirstLastPara="1" wrap="square" lIns="91425" tIns="91425" rIns="91425" bIns="91425" anchor="ctr" anchorCtr="0">
-              <a:noAutofit/>
-            </a:bodyPr>
-            <a:lstStyle/>
-            <a:p>
-              <a:pPr marL="0" lvl="0" indent="0" algn="l" rtl="0">
-                <a:spcBef>
-                  <a:spcPts val="0"/>
-                </a:spcBef>
-                <a:spcAft>
-                  <a:spcPts val="0"/>
-                </a:spcAft>
-                <a:buClr>
-                  <a:srgbClr val="000000"/>
-                </a:buClr>
-                <a:buSzPts val="1100"/>
-                <a:buFont typeface="Arial" panose="020B0604020202020204"/>
-                <a:buNone/>
-              </a:pPr>
-              <a:endParaRPr sz="1600">
-                <a:solidFill>
-                  <a:srgbClr val="000000"/>
-                </a:solidFill>
-              </a:endParaRPr>
-            </a:p>
-          </p:txBody>
-        </p:sp>
-        <p:cxnSp>
-          <p:nvCxnSpPr>
-            <p:cNvPr id="128" name="Google Shape;526;p25"/>
-            <p:cNvCxnSpPr/>
-            <p:nvPr/>
-          </p:nvCxnSpPr>
-          <p:spPr>
-            <a:xfrm flipH="1">
-              <a:off x="5186" y="5064"/>
-              <a:ext cx="9" cy="709"/>
-            </a:xfrm>
-            <a:prstGeom prst="straightConnector1">
-              <a:avLst/>
-            </a:prstGeom>
-            <a:noFill/>
-            <a:ln w="28575" cap="flat" cmpd="sng">
-              <a:solidFill>
-                <a:srgbClr val="595959"/>
-              </a:solidFill>
-              <a:prstDash val="dot"/>
-              <a:round/>
-              <a:headEnd type="none" w="med" len="med"/>
-              <a:tailEnd type="none" w="med" len="med"/>
-            </a:ln>
-          </p:spPr>
-        </p:cxnSp>
-        <p:sp>
-          <p:nvSpPr>
-            <p:cNvPr id="129" name="Google Shape;530;p25"/>
-            <p:cNvSpPr/>
-            <p:nvPr/>
-          </p:nvSpPr>
-          <p:spPr>
-            <a:xfrm>
-              <a:off x="2243" y="5113"/>
-              <a:ext cx="125" cy="108"/>
-            </a:xfrm>
-            <a:prstGeom prst="flowChartConnector">
-              <a:avLst/>
-            </a:prstGeom>
-            <a:solidFill>
-              <a:srgbClr val="B7B7B7"/>
-            </a:solidFill>
-            <a:ln w="9525" cap="flat" cmpd="sng">
-              <a:solidFill>
-                <a:srgbClr val="595959"/>
-              </a:solidFill>
-              <a:prstDash val="solid"/>
-              <a:round/>
-              <a:headEnd type="none" w="sm" len="sm"/>
-              <a:tailEnd type="none" w="sm" len="sm"/>
-            </a:ln>
-          </p:spPr>
-          <p:txBody>
-            <a:bodyPr spcFirstLastPara="1" wrap="square" lIns="91425" tIns="91425" rIns="91425" bIns="91425" anchor="ctr" anchorCtr="0">
-              <a:noAutofit/>
-            </a:bodyPr>
-            <a:lstStyle/>
-            <a:p>
-              <a:pPr marL="0" lvl="0" indent="0" algn="l" rtl="0">
-                <a:spcBef>
-                  <a:spcPts val="0"/>
-                </a:spcBef>
-                <a:spcAft>
-                  <a:spcPts val="0"/>
-                </a:spcAft>
-                <a:buNone/>
-              </a:pPr>
-            </a:p>
-          </p:txBody>
-        </p:sp>
-        <p:cxnSp>
-          <p:nvCxnSpPr>
-            <p:cNvPr id="130" name="Google Shape;531;p25"/>
-            <p:cNvCxnSpPr>
-              <a:endCxn id="120" idx="2"/>
-            </p:cNvCxnSpPr>
-            <p:nvPr/>
-          </p:nvCxnSpPr>
-          <p:spPr>
-            <a:xfrm rot="10800000" flipH="1">
-              <a:off x="2378" y="1947"/>
-              <a:ext cx="2346" cy="803"/>
-            </a:xfrm>
-            <a:prstGeom prst="straightConnector1">
-              <a:avLst/>
-            </a:prstGeom>
-            <a:noFill/>
-            <a:ln w="9525" cap="flat" cmpd="sng">
-              <a:solidFill>
-                <a:srgbClr val="595959"/>
-              </a:solidFill>
-              <a:prstDash val="solid"/>
-              <a:round/>
-              <a:headEnd type="none" w="med" len="med"/>
-              <a:tailEnd type="triangle" w="med" len="med"/>
-            </a:ln>
-          </p:spPr>
-        </p:cxnSp>
-        <p:cxnSp>
-          <p:nvCxnSpPr>
-            <p:cNvPr id="131" name="Google Shape;532;p25"/>
-            <p:cNvCxnSpPr>
-              <a:stCxn id="114" idx="5"/>
-              <a:endCxn id="121" idx="2"/>
-            </p:cNvCxnSpPr>
-            <p:nvPr/>
-          </p:nvCxnSpPr>
-          <p:spPr>
-            <a:xfrm>
-              <a:off x="2350" y="2781"/>
-              <a:ext cx="2365" cy="385"/>
-            </a:xfrm>
-            <a:prstGeom prst="straightConnector1">
-              <a:avLst/>
-            </a:prstGeom>
-            <a:noFill/>
-            <a:ln w="9525" cap="flat" cmpd="sng">
-              <a:solidFill>
-                <a:srgbClr val="595959"/>
-              </a:solidFill>
-              <a:prstDash val="solid"/>
-              <a:round/>
-              <a:headEnd type="none" w="med" len="med"/>
-              <a:tailEnd type="triangle" w="med" len="med"/>
-            </a:ln>
-          </p:spPr>
-        </p:cxnSp>
-        <p:cxnSp>
-          <p:nvCxnSpPr>
-            <p:cNvPr id="132" name="Google Shape;533;p25"/>
-            <p:cNvCxnSpPr>
-              <a:stCxn id="114" idx="5"/>
-              <a:endCxn id="122" idx="2"/>
-            </p:cNvCxnSpPr>
-            <p:nvPr/>
-          </p:nvCxnSpPr>
-          <p:spPr>
-            <a:xfrm>
-              <a:off x="2350" y="2781"/>
-              <a:ext cx="2374" cy="1604"/>
-            </a:xfrm>
-            <a:prstGeom prst="straightConnector1">
-              <a:avLst/>
-            </a:prstGeom>
-            <a:noFill/>
-            <a:ln w="9525" cap="flat" cmpd="sng">
-              <a:solidFill>
-                <a:srgbClr val="595959"/>
-              </a:solidFill>
-              <a:prstDash val="solid"/>
-              <a:round/>
-              <a:headEnd type="none" w="med" len="med"/>
-              <a:tailEnd type="triangle" w="med" len="med"/>
-            </a:ln>
-          </p:spPr>
-        </p:cxnSp>
-        <p:cxnSp>
-          <p:nvCxnSpPr>
-            <p:cNvPr id="133" name="Google Shape;534;p25"/>
-            <p:cNvCxnSpPr>
-              <a:stCxn id="114" idx="5"/>
-              <a:endCxn id="123" idx="2"/>
-            </p:cNvCxnSpPr>
-            <p:nvPr/>
-          </p:nvCxnSpPr>
-          <p:spPr>
-            <a:xfrm>
-              <a:off x="2350" y="2781"/>
-              <a:ext cx="2374" cy="3550"/>
-            </a:xfrm>
-            <a:prstGeom prst="straightConnector1">
-              <a:avLst/>
-            </a:prstGeom>
-            <a:noFill/>
-            <a:ln w="9525" cap="flat" cmpd="sng">
-              <a:solidFill>
-                <a:srgbClr val="595959"/>
-              </a:solidFill>
-              <a:prstDash val="solid"/>
-              <a:round/>
-              <a:headEnd type="none" w="med" len="med"/>
-              <a:tailEnd type="triangle" w="med" len="med"/>
-            </a:ln>
-          </p:spPr>
-        </p:cxnSp>
-        <p:cxnSp>
-          <p:nvCxnSpPr>
-            <p:cNvPr id="134" name="Google Shape;555;p25"/>
-            <p:cNvCxnSpPr>
-              <a:stCxn id="129" idx="5"/>
-              <a:endCxn id="120" idx="2"/>
-            </p:cNvCxnSpPr>
-            <p:nvPr/>
-          </p:nvCxnSpPr>
-          <p:spPr>
-            <a:xfrm rot="10800000" flipH="1">
-              <a:off x="2350" y="1947"/>
-              <a:ext cx="2374" cy="3258"/>
-            </a:xfrm>
-            <a:prstGeom prst="straightConnector1">
-              <a:avLst/>
-            </a:prstGeom>
-            <a:noFill/>
-            <a:ln w="9525" cap="flat" cmpd="sng">
-              <a:solidFill>
-                <a:srgbClr val="595959"/>
-              </a:solidFill>
-              <a:prstDash val="solid"/>
-              <a:round/>
-              <a:headEnd type="none" w="med" len="med"/>
-              <a:tailEnd type="triangle" w="med" len="med"/>
-            </a:ln>
-          </p:spPr>
-        </p:cxnSp>
-        <p:cxnSp>
-          <p:nvCxnSpPr>
-            <p:cNvPr id="135" name="Google Shape;556;p25"/>
-            <p:cNvCxnSpPr>
-              <a:stCxn id="129" idx="5"/>
-              <a:endCxn id="121" idx="2"/>
-            </p:cNvCxnSpPr>
-            <p:nvPr/>
-          </p:nvCxnSpPr>
-          <p:spPr>
-            <a:xfrm rot="10800000" flipH="1">
-              <a:off x="2350" y="3166"/>
-              <a:ext cx="2365" cy="2039"/>
-            </a:xfrm>
-            <a:prstGeom prst="straightConnector1">
-              <a:avLst/>
-            </a:prstGeom>
-            <a:noFill/>
-            <a:ln w="9525" cap="flat" cmpd="sng">
-              <a:solidFill>
-                <a:srgbClr val="595959"/>
-              </a:solidFill>
-              <a:prstDash val="solid"/>
-              <a:round/>
-              <a:headEnd type="none" w="med" len="med"/>
-              <a:tailEnd type="triangle" w="med" len="med"/>
-            </a:ln>
-          </p:spPr>
-        </p:cxnSp>
-        <p:cxnSp>
-          <p:nvCxnSpPr>
-            <p:cNvPr id="136" name="Google Shape;557;p25"/>
-            <p:cNvCxnSpPr>
-              <a:stCxn id="129" idx="5"/>
-              <a:endCxn id="122" idx="2"/>
-            </p:cNvCxnSpPr>
-            <p:nvPr/>
-          </p:nvCxnSpPr>
-          <p:spPr>
-            <a:xfrm rot="10800000" flipH="1">
-              <a:off x="2350" y="4385"/>
-              <a:ext cx="2374" cy="820"/>
-            </a:xfrm>
-            <a:prstGeom prst="straightConnector1">
-              <a:avLst/>
-            </a:prstGeom>
-            <a:noFill/>
-            <a:ln w="9525" cap="flat" cmpd="sng">
-              <a:solidFill>
-                <a:srgbClr val="595959"/>
-              </a:solidFill>
-              <a:prstDash val="solid"/>
-              <a:round/>
-              <a:headEnd type="none" w="med" len="med"/>
-              <a:tailEnd type="triangle" w="med" len="med"/>
-            </a:ln>
-          </p:spPr>
-        </p:cxnSp>
-        <p:cxnSp>
-          <p:nvCxnSpPr>
-            <p:cNvPr id="137" name="Google Shape;558;p25"/>
-            <p:cNvCxnSpPr>
-              <a:stCxn id="129" idx="5"/>
-              <a:endCxn id="123" idx="2"/>
-            </p:cNvCxnSpPr>
-            <p:nvPr/>
-          </p:nvCxnSpPr>
-          <p:spPr>
-            <a:xfrm>
-              <a:off x="2350" y="5205"/>
-              <a:ext cx="2374" cy="1126"/>
-            </a:xfrm>
-            <a:prstGeom prst="straightConnector1">
-              <a:avLst/>
-            </a:prstGeom>
-            <a:noFill/>
-            <a:ln w="9525" cap="flat" cmpd="sng">
-              <a:solidFill>
-                <a:srgbClr val="595959"/>
-              </a:solidFill>
-              <a:prstDash val="solid"/>
-              <a:round/>
-              <a:headEnd type="none" w="med" len="med"/>
-              <a:tailEnd type="triangle" w="med" len="med"/>
-            </a:ln>
-          </p:spPr>
-        </p:cxnSp>
-        <p:cxnSp>
-          <p:nvCxnSpPr>
-            <p:cNvPr id="138" name="Google Shape;559;p25"/>
-            <p:cNvCxnSpPr>
-              <a:stCxn id="120" idx="6"/>
-              <a:endCxn id="125" idx="2"/>
-            </p:cNvCxnSpPr>
-            <p:nvPr/>
-          </p:nvCxnSpPr>
-          <p:spPr>
-            <a:xfrm>
-              <a:off x="5658" y="1947"/>
-              <a:ext cx="1182" cy="1277"/>
-            </a:xfrm>
-            <a:prstGeom prst="straightConnector1">
-              <a:avLst/>
-            </a:prstGeom>
-            <a:noFill/>
-            <a:ln w="9525" cap="flat" cmpd="sng">
-              <a:solidFill>
-                <a:srgbClr val="595959"/>
-              </a:solidFill>
-              <a:prstDash val="solid"/>
-              <a:round/>
-              <a:headEnd type="none" w="med" len="med"/>
-              <a:tailEnd type="triangle" w="med" len="med"/>
-            </a:ln>
-          </p:spPr>
-        </p:cxnSp>
-        <p:cxnSp>
-          <p:nvCxnSpPr>
-            <p:cNvPr id="139" name="Google Shape;560;p25"/>
-            <p:cNvCxnSpPr>
-              <a:stCxn id="120" idx="6"/>
-              <a:endCxn id="126" idx="2"/>
-            </p:cNvCxnSpPr>
-            <p:nvPr/>
-          </p:nvCxnSpPr>
-          <p:spPr>
-            <a:xfrm>
-              <a:off x="5658" y="1947"/>
-              <a:ext cx="1182" cy="2481"/>
-            </a:xfrm>
-            <a:prstGeom prst="straightConnector1">
-              <a:avLst/>
-            </a:prstGeom>
-            <a:noFill/>
-            <a:ln w="9525" cap="flat" cmpd="sng">
-              <a:solidFill>
-                <a:srgbClr val="595959"/>
-              </a:solidFill>
-              <a:prstDash val="solid"/>
-              <a:round/>
-              <a:headEnd type="none" w="med" len="med"/>
-              <a:tailEnd type="triangle" w="med" len="med"/>
-            </a:ln>
-          </p:spPr>
-        </p:cxnSp>
-        <p:cxnSp>
-          <p:nvCxnSpPr>
-            <p:cNvPr id="140" name="Google Shape;561;p25"/>
-            <p:cNvCxnSpPr>
-              <a:stCxn id="120" idx="6"/>
-              <a:endCxn id="127" idx="2"/>
-            </p:cNvCxnSpPr>
-            <p:nvPr/>
-          </p:nvCxnSpPr>
-          <p:spPr>
-            <a:xfrm>
-              <a:off x="5658" y="1947"/>
-              <a:ext cx="1182" cy="4384"/>
-            </a:xfrm>
-            <a:prstGeom prst="straightConnector1">
-              <a:avLst/>
-            </a:prstGeom>
-            <a:noFill/>
-            <a:ln w="9525" cap="flat" cmpd="sng">
-              <a:solidFill>
-                <a:srgbClr val="595959"/>
-              </a:solidFill>
-              <a:prstDash val="solid"/>
-              <a:round/>
-              <a:headEnd type="none" w="med" len="med"/>
-              <a:tailEnd type="triangle" w="med" len="med"/>
-            </a:ln>
-          </p:spPr>
-        </p:cxnSp>
-        <p:cxnSp>
-          <p:nvCxnSpPr>
-            <p:cNvPr id="141" name="Google Shape;562;p25"/>
-            <p:cNvCxnSpPr>
-              <a:stCxn id="121" idx="6"/>
-              <a:endCxn id="124" idx="2"/>
-            </p:cNvCxnSpPr>
-            <p:nvPr/>
-          </p:nvCxnSpPr>
-          <p:spPr>
-            <a:xfrm rot="10800000" flipH="1">
-              <a:off x="5648" y="1946"/>
-              <a:ext cx="1191" cy="1219"/>
-            </a:xfrm>
-            <a:prstGeom prst="straightConnector1">
-              <a:avLst/>
-            </a:prstGeom>
-            <a:noFill/>
-            <a:ln w="9525" cap="flat" cmpd="sng">
-              <a:solidFill>
-                <a:srgbClr val="595959"/>
-              </a:solidFill>
-              <a:prstDash val="solid"/>
-              <a:round/>
-              <a:headEnd type="none" w="med" len="med"/>
-              <a:tailEnd type="triangle" w="med" len="med"/>
-            </a:ln>
-          </p:spPr>
-        </p:cxnSp>
-        <p:cxnSp>
-          <p:nvCxnSpPr>
-            <p:cNvPr id="142" name="Google Shape;563;p25"/>
-            <p:cNvCxnSpPr>
-              <a:stCxn id="121" idx="6"/>
-              <a:endCxn id="125" idx="2"/>
-            </p:cNvCxnSpPr>
-            <p:nvPr/>
-          </p:nvCxnSpPr>
-          <p:spPr>
-            <a:xfrm>
-              <a:off x="5648" y="3166"/>
-              <a:ext cx="1191" cy="59"/>
-            </a:xfrm>
-            <a:prstGeom prst="straightConnector1">
-              <a:avLst/>
-            </a:prstGeom>
-            <a:noFill/>
-            <a:ln w="9525" cap="flat" cmpd="sng">
-              <a:solidFill>
-                <a:srgbClr val="595959"/>
-              </a:solidFill>
-              <a:prstDash val="solid"/>
-              <a:round/>
-              <a:headEnd type="none" w="med" len="med"/>
-              <a:tailEnd type="triangle" w="med" len="med"/>
-            </a:ln>
-          </p:spPr>
-        </p:cxnSp>
-        <p:cxnSp>
-          <p:nvCxnSpPr>
-            <p:cNvPr id="143" name="Google Shape;564;p25"/>
-            <p:cNvCxnSpPr>
-              <a:stCxn id="121" idx="6"/>
-              <a:endCxn id="126" idx="2"/>
-            </p:cNvCxnSpPr>
-            <p:nvPr/>
-          </p:nvCxnSpPr>
-          <p:spPr>
-            <a:xfrm>
-              <a:off x="5648" y="3166"/>
-              <a:ext cx="1191" cy="1262"/>
-            </a:xfrm>
-            <a:prstGeom prst="straightConnector1">
-              <a:avLst/>
-            </a:prstGeom>
-            <a:noFill/>
-            <a:ln w="9525" cap="flat" cmpd="sng">
-              <a:solidFill>
-                <a:srgbClr val="595959"/>
-              </a:solidFill>
-              <a:prstDash val="solid"/>
-              <a:round/>
-              <a:headEnd type="none" w="med" len="med"/>
-              <a:tailEnd type="triangle" w="med" len="med"/>
-            </a:ln>
-          </p:spPr>
-        </p:cxnSp>
-        <p:cxnSp>
-          <p:nvCxnSpPr>
-            <p:cNvPr id="144" name="Google Shape;565;p25"/>
-            <p:cNvCxnSpPr>
-              <a:stCxn id="121" idx="6"/>
-              <a:endCxn id="127" idx="2"/>
-            </p:cNvCxnSpPr>
-            <p:nvPr/>
-          </p:nvCxnSpPr>
-          <p:spPr>
-            <a:xfrm>
-              <a:off x="5648" y="3166"/>
-              <a:ext cx="1191" cy="3165"/>
-            </a:xfrm>
-            <a:prstGeom prst="straightConnector1">
-              <a:avLst/>
-            </a:prstGeom>
-            <a:noFill/>
-            <a:ln w="9525" cap="flat" cmpd="sng">
-              <a:solidFill>
-                <a:srgbClr val="595959"/>
-              </a:solidFill>
-              <a:prstDash val="solid"/>
-              <a:round/>
-              <a:headEnd type="none" w="med" len="med"/>
-              <a:tailEnd type="triangle" w="med" len="med"/>
-            </a:ln>
-          </p:spPr>
-        </p:cxnSp>
-        <p:cxnSp>
-          <p:nvCxnSpPr>
-            <p:cNvPr id="145" name="Google Shape;566;p25"/>
-            <p:cNvCxnSpPr>
-              <a:stCxn id="122" idx="6"/>
-              <a:endCxn id="124" idx="2"/>
-            </p:cNvCxnSpPr>
-            <p:nvPr/>
-          </p:nvCxnSpPr>
-          <p:spPr>
-            <a:xfrm rot="10800000" flipH="1">
-              <a:off x="5658" y="1947"/>
-              <a:ext cx="1182" cy="2438"/>
-            </a:xfrm>
-            <a:prstGeom prst="straightConnector1">
-              <a:avLst/>
-            </a:prstGeom>
-            <a:noFill/>
-            <a:ln w="9525" cap="flat" cmpd="sng">
-              <a:solidFill>
-                <a:srgbClr val="595959"/>
-              </a:solidFill>
-              <a:prstDash val="solid"/>
-              <a:round/>
-              <a:headEnd type="none" w="med" len="med"/>
-              <a:tailEnd type="triangle" w="med" len="med"/>
-            </a:ln>
-          </p:spPr>
-        </p:cxnSp>
-        <p:cxnSp>
-          <p:nvCxnSpPr>
-            <p:cNvPr id="146" name="Google Shape;567;p25"/>
-            <p:cNvCxnSpPr>
-              <a:stCxn id="122" idx="6"/>
-              <a:endCxn id="125" idx="2"/>
-            </p:cNvCxnSpPr>
-            <p:nvPr/>
-          </p:nvCxnSpPr>
-          <p:spPr>
-            <a:xfrm rot="10800000" flipH="1">
-              <a:off x="5658" y="3224"/>
-              <a:ext cx="1182" cy="1161"/>
-            </a:xfrm>
-            <a:prstGeom prst="straightConnector1">
-              <a:avLst/>
-            </a:prstGeom>
-            <a:noFill/>
-            <a:ln w="9525" cap="flat" cmpd="sng">
-              <a:solidFill>
-                <a:srgbClr val="595959"/>
-              </a:solidFill>
-              <a:prstDash val="solid"/>
-              <a:round/>
-              <a:headEnd type="none" w="med" len="med"/>
-              <a:tailEnd type="triangle" w="med" len="med"/>
-            </a:ln>
-          </p:spPr>
-        </p:cxnSp>
-        <p:cxnSp>
-          <p:nvCxnSpPr>
-            <p:cNvPr id="147" name="Google Shape;568;p25"/>
-            <p:cNvCxnSpPr>
-              <a:stCxn id="122" idx="6"/>
-              <a:endCxn id="126" idx="2"/>
-            </p:cNvCxnSpPr>
-            <p:nvPr/>
-          </p:nvCxnSpPr>
-          <p:spPr>
-            <a:xfrm>
-              <a:off x="5658" y="4385"/>
-              <a:ext cx="1182" cy="43"/>
-            </a:xfrm>
-            <a:prstGeom prst="straightConnector1">
-              <a:avLst/>
-            </a:prstGeom>
-            <a:noFill/>
-            <a:ln w="9525" cap="flat" cmpd="sng">
-              <a:solidFill>
-                <a:srgbClr val="595959"/>
-              </a:solidFill>
-              <a:prstDash val="solid"/>
-              <a:round/>
-              <a:headEnd type="none" w="med" len="med"/>
-              <a:tailEnd type="triangle" w="med" len="med"/>
-            </a:ln>
-          </p:spPr>
-        </p:cxnSp>
-        <p:cxnSp>
-          <p:nvCxnSpPr>
-            <p:cNvPr id="148" name="Google Shape;569;p25"/>
-            <p:cNvCxnSpPr>
-              <a:stCxn id="122" idx="6"/>
-              <a:endCxn id="127" idx="2"/>
-            </p:cNvCxnSpPr>
-            <p:nvPr/>
-          </p:nvCxnSpPr>
-          <p:spPr>
-            <a:xfrm>
-              <a:off x="5658" y="4385"/>
-              <a:ext cx="1182" cy="1946"/>
-            </a:xfrm>
-            <a:prstGeom prst="straightConnector1">
-              <a:avLst/>
-            </a:prstGeom>
-            <a:noFill/>
-            <a:ln w="9525" cap="flat" cmpd="sng">
-              <a:solidFill>
-                <a:srgbClr val="595959"/>
-              </a:solidFill>
-              <a:prstDash val="solid"/>
-              <a:round/>
-              <a:headEnd type="none" w="med" len="med"/>
-              <a:tailEnd type="triangle" w="med" len="med"/>
-            </a:ln>
-          </p:spPr>
-        </p:cxnSp>
-        <p:cxnSp>
-          <p:nvCxnSpPr>
-            <p:cNvPr id="149" name="Google Shape;570;p25"/>
-            <p:cNvCxnSpPr>
-              <a:endCxn id="124" idx="2"/>
-            </p:cNvCxnSpPr>
-            <p:nvPr/>
-          </p:nvCxnSpPr>
-          <p:spPr>
-            <a:xfrm rot="10800000" flipH="1">
-              <a:off x="5658" y="1947"/>
-              <a:ext cx="1182" cy="4440"/>
-            </a:xfrm>
-            <a:prstGeom prst="straightConnector1">
-              <a:avLst/>
-            </a:prstGeom>
-            <a:noFill/>
-            <a:ln w="9525" cap="flat" cmpd="sng">
-              <a:solidFill>
-                <a:srgbClr val="595959"/>
-              </a:solidFill>
-              <a:prstDash val="solid"/>
-              <a:round/>
-              <a:headEnd type="none" w="med" len="med"/>
-              <a:tailEnd type="triangle" w="med" len="med"/>
-            </a:ln>
-          </p:spPr>
-        </p:cxnSp>
-        <p:cxnSp>
-          <p:nvCxnSpPr>
-            <p:cNvPr id="150" name="Google Shape;571;p25"/>
-            <p:cNvCxnSpPr>
-              <a:stCxn id="123" idx="6"/>
-              <a:endCxn id="125" idx="2"/>
-            </p:cNvCxnSpPr>
-            <p:nvPr/>
-          </p:nvCxnSpPr>
-          <p:spPr>
-            <a:xfrm rot="10800000" flipH="1">
-              <a:off x="5649" y="3224"/>
-              <a:ext cx="1191" cy="3107"/>
-            </a:xfrm>
-            <a:prstGeom prst="straightConnector1">
-              <a:avLst/>
-            </a:prstGeom>
-            <a:noFill/>
-            <a:ln w="9525" cap="flat" cmpd="sng">
-              <a:solidFill>
-                <a:srgbClr val="595959"/>
-              </a:solidFill>
-              <a:prstDash val="solid"/>
-              <a:round/>
-              <a:headEnd type="none" w="med" len="med"/>
-              <a:tailEnd type="triangle" w="med" len="med"/>
-            </a:ln>
-          </p:spPr>
-        </p:cxnSp>
-        <p:cxnSp>
-          <p:nvCxnSpPr>
-            <p:cNvPr id="151" name="Google Shape;572;p25"/>
-            <p:cNvCxnSpPr>
-              <a:stCxn id="123" idx="6"/>
-              <a:endCxn id="126" idx="2"/>
-            </p:cNvCxnSpPr>
-            <p:nvPr/>
-          </p:nvCxnSpPr>
-          <p:spPr>
-            <a:xfrm rot="10800000" flipH="1">
-              <a:off x="5649" y="4428"/>
-              <a:ext cx="1191" cy="1903"/>
-            </a:xfrm>
-            <a:prstGeom prst="straightConnector1">
-              <a:avLst/>
-            </a:prstGeom>
-            <a:noFill/>
-            <a:ln w="9525" cap="flat" cmpd="sng">
-              <a:solidFill>
-                <a:srgbClr val="595959"/>
-              </a:solidFill>
-              <a:prstDash val="solid"/>
-              <a:round/>
-              <a:headEnd type="none" w="med" len="med"/>
-              <a:tailEnd type="triangle" w="med" len="med"/>
-            </a:ln>
-          </p:spPr>
-        </p:cxnSp>
-        <p:cxnSp>
-          <p:nvCxnSpPr>
-            <p:cNvPr id="152" name="Google Shape;573;p25"/>
-            <p:cNvCxnSpPr>
-              <a:stCxn id="123" idx="6"/>
-              <a:endCxn id="127" idx="2"/>
-            </p:cNvCxnSpPr>
-            <p:nvPr/>
-          </p:nvCxnSpPr>
-          <p:spPr>
-            <a:xfrm>
-              <a:off x="5649" y="6331"/>
-              <a:ext cx="1191" cy="0"/>
-            </a:xfrm>
-            <a:prstGeom prst="straightConnector1">
-              <a:avLst/>
-            </a:prstGeom>
-            <a:noFill/>
-            <a:ln w="9525" cap="flat" cmpd="sng">
-              <a:solidFill>
-                <a:srgbClr val="595959"/>
-              </a:solidFill>
-              <a:prstDash val="solid"/>
-              <a:round/>
-              <a:headEnd type="none" w="med" len="med"/>
-              <a:tailEnd type="triangle" w="med" len="med"/>
-            </a:ln>
-          </p:spPr>
-        </p:cxnSp>
-        <p:cxnSp>
-          <p:nvCxnSpPr>
-            <p:cNvPr id="153" name="Google Shape;591;p25"/>
-            <p:cNvCxnSpPr>
-              <a:endCxn id="115" idx="2"/>
-            </p:cNvCxnSpPr>
-            <p:nvPr/>
-          </p:nvCxnSpPr>
-          <p:spPr>
-            <a:xfrm rot="10800000" flipH="1">
-              <a:off x="7887" y="3798"/>
-              <a:ext cx="1568" cy="587"/>
-            </a:xfrm>
-            <a:prstGeom prst="straightConnector1">
-              <a:avLst/>
-            </a:prstGeom>
-            <a:noFill/>
-            <a:ln w="9525" cap="flat" cmpd="sng">
-              <a:solidFill>
-                <a:srgbClr val="595959"/>
-              </a:solidFill>
-              <a:prstDash val="solid"/>
-              <a:round/>
-              <a:headEnd type="none" w="med" len="med"/>
-              <a:tailEnd type="triangle" w="med" len="med"/>
-            </a:ln>
-          </p:spPr>
-        </p:cxnSp>
-        <p:cxnSp>
-          <p:nvCxnSpPr>
-            <p:cNvPr id="154" name="Google Shape;593;p25"/>
-            <p:cNvCxnSpPr/>
-            <p:nvPr/>
-          </p:nvCxnSpPr>
-          <p:spPr>
-            <a:xfrm flipH="1">
-              <a:off x="7302" y="5064"/>
-              <a:ext cx="9" cy="709"/>
-            </a:xfrm>
-            <a:prstGeom prst="straightConnector1">
-              <a:avLst/>
-            </a:prstGeom>
-            <a:noFill/>
-            <a:ln w="28575" cap="flat" cmpd="sng">
-              <a:solidFill>
-                <a:srgbClr val="595959"/>
-              </a:solidFill>
-              <a:prstDash val="dot"/>
-              <a:round/>
-              <a:headEnd type="none" w="med" len="med"/>
-              <a:tailEnd type="none" w="med" len="med"/>
-            </a:ln>
-          </p:spPr>
-        </p:cxnSp>
-      </p:grpSp>
-      <p:sp>
-        <p:nvSpPr>
-          <p:cNvPr id="156" name="文本框 155"/>
-          <p:cNvSpPr txBox="1"/>
+            <a:pPr>
+              <a:lnSpc>
+                <a:spcPct val="120000"/>
+              </a:lnSpc>
+            </a:pPr>
+            <a:r>
+              <a:rPr lang="en-US" altLang="zh-CN" sz="2000"/>
+              <a:t>Loss Function: MAE</a:t>
+            </a:r>
+            <a:br>
+              <a:rPr lang="en-US" altLang="zh-CN" sz="2000"/>
+            </a:br>
+            <a:r>
+              <a:rPr lang="en-US" altLang="zh-CN" sz="2000"/>
+              <a:t>Input Preprocessing: Input normalization</a:t>
+            </a:r>
+            <a:endParaRPr lang="en-US" altLang="zh-CN" sz="2000"/>
+          </a:p>
+          <a:p>
+            <a:pPr>
+              <a:lnSpc>
+                <a:spcPct val="120000"/>
+              </a:lnSpc>
+            </a:pPr>
+            <a:r>
+              <a:rPr lang="en-US" altLang="zh-CN" sz="2000"/>
+              <a:t>Training Data: 30 trials</a:t>
+            </a:r>
+            <a:endParaRPr lang="en-US" altLang="zh-CN" sz="2000"/>
+          </a:p>
+        </p:txBody>
+      </p:sp>
+    </p:spTree>
+  </p:cSld>
+  <p:clrMapOvr>
+    <a:masterClrMapping/>
+  </p:clrMapOvr>
+  <p:timing>
+    <p:tnLst>
+      <p:par>
+        <p:cTn id="1" dur="indefinite" restart="never" nodeType="tmRoot"/>
+      </p:par>
+    </p:tnLst>
+  </p:timing>
+</p:sld>
+</file>
+
+<file path=ppt/slides/slide4.xml><?xml version="1.0" encoding="utf-8"?>
+<p:sld xmlns:a="http://schemas.openxmlformats.org/drawingml/2006/main" xmlns:r="http://schemas.openxmlformats.org/officeDocument/2006/relationships" xmlns:p="http://schemas.openxmlformats.org/presentationml/2006/main">
+  <p:cSld>
+    <p:spTree>
+      <p:nvGrpSpPr>
+        <p:cNvPr id="1" name=""/>
+        <p:cNvGrpSpPr/>
+        <p:nvPr/>
+      </p:nvGrpSpPr>
+      <p:grpSpPr/>
+      <p:sp>
+        <p:nvSpPr>
+          <p:cNvPr id="6" name="文本框 5"/>
+          <p:cNvSpPr>
+            <a:spLocks noGrp="1"/>
+          </p:cNvSpPr>
           <p:nvPr/>
         </p:nvSpPr>
         <p:spPr>
           <a:xfrm>
-            <a:off x="3260090" y="977265"/>
-            <a:ext cx="2413000" cy="337185"/>
+            <a:off x="275590" y="226695"/>
+            <a:ext cx="8522970" cy="583565"/>
           </a:xfrm>
           <a:prstGeom prst="rect">
             <a:avLst/>
@@ -6583,31 +7907,37 @@
           <a:noFill/>
         </p:spPr>
         <p:txBody>
-          <a:bodyPr wrap="square" rtlCol="0">
+          <a:bodyPr wrap="square">
             <a:spAutoFit/>
           </a:bodyPr>
-          <a:p>
-            <a:pPr algn="ctr"/>
-            <a:r>
-              <a:rPr lang="en-US" altLang="zh-CN" sz="1600" b="1"/>
-              <a:t>5-frame window MLP</a:t>
-            </a:r>
-            <a:endParaRPr lang="en-US" altLang="zh-CN" sz="1600" b="1">
-              <a:sym typeface="+mn-ea"/>
+          <a:lstStyle/>
+          <a:p>
+            <a:r>
+              <a:rPr lang="en-US" altLang="zh-CN" sz="3200" b="1">
+                <a:latin typeface="Times New Roman" panose="02020603050405020304"/>
+                <a:ea typeface="Times New Roman" panose="02020603050405020304"/>
+                <a:cs typeface="Times New Roman" panose="02020603050405020304"/>
+              </a:rPr>
+              <a:t>Model</a:t>
+            </a:r>
+            <a:endParaRPr lang="en-US" altLang="zh-CN" sz="3200" b="1">
+              <a:latin typeface="Times New Roman" panose="02020603050405020304"/>
+              <a:ea typeface="Times New Roman" panose="02020603050405020304"/>
+              <a:cs typeface="Times New Roman" panose="02020603050405020304"/>
             </a:endParaRPr>
           </a:p>
         </p:txBody>
       </p:sp>
       <p:sp>
         <p:nvSpPr>
-          <p:cNvPr id="157" name="文本框 156"/>
+          <p:cNvPr id="11" name="文本框 10"/>
           <p:cNvSpPr txBox="1"/>
           <p:nvPr/>
         </p:nvSpPr>
         <p:spPr>
           <a:xfrm>
-            <a:off x="3016250" y="3205480"/>
-            <a:ext cx="4070985" cy="337185"/>
+            <a:off x="275590" y="810260"/>
+            <a:ext cx="8523605" cy="368300"/>
           </a:xfrm>
           <a:prstGeom prst="rect">
             <a:avLst/>
@@ -6619,188 +7949,26 @@
             <a:spAutoFit/>
           </a:bodyPr>
           <a:p>
-            <a:pPr algn="ctr"/>
-            <a:r>
-              <a:rPr lang="en-US" altLang="zh-CN" sz="1600" b="1"/>
-              <a:t>2 hidden layer, each with 32 neurons.</a:t>
-            </a:r>
-            <a:endParaRPr lang="en-US" altLang="zh-CN" sz="1600" b="1"/>
-          </a:p>
-        </p:txBody>
-      </p:sp>
-      <p:sp>
-        <p:nvSpPr>
-          <p:cNvPr id="3" name="任意多边形 2"/>
-          <p:cNvSpPr/>
+            <a:r>
+              <a:rPr lang="en-US" altLang="zh-CN"/>
+              <a:t>Reasons for selecting a temporal window.</a:t>
+            </a:r>
+            <a:endParaRPr lang="zh-CN" altLang="en-US">
+              <a:ea typeface="SimSun" panose="02010600030101010101" pitchFamily="2" charset="-122"/>
+            </a:endParaRPr>
+          </a:p>
+        </p:txBody>
+      </p:sp>
+      <p:sp>
+        <p:nvSpPr>
+          <p:cNvPr id="31" name="文本框 30"/>
+          <p:cNvSpPr txBox="1"/>
           <p:nvPr/>
         </p:nvSpPr>
         <p:spPr>
           <a:xfrm>
-            <a:off x="3154680" y="1148715"/>
-            <a:ext cx="281940" cy="434975"/>
-          </a:xfrm>
-          <a:custGeom>
-            <a:avLst/>
-            <a:gdLst>
-              <a:gd name="connisteX0" fmla="*/ 0 w 380365"/>
-              <a:gd name="connsiteY0" fmla="*/ 887730 h 887730"/>
-              <a:gd name="connisteX1" fmla="*/ 0 w 380365"/>
-              <a:gd name="connsiteY1" fmla="*/ 0 h 887730"/>
-              <a:gd name="connisteX2" fmla="*/ 380365 w 380365"/>
-              <a:gd name="connsiteY2" fmla="*/ 0 h 887730"/>
-            </a:gdLst>
-            <a:ahLst/>
-            <a:cxnLst>
-              <a:cxn ang="0">
-                <a:pos x="connisteX0" y="connsiteY0"/>
-              </a:cxn>
-              <a:cxn ang="0">
-                <a:pos x="connisteX1" y="connsiteY1"/>
-              </a:cxn>
-              <a:cxn ang="0">
-                <a:pos x="connisteX2" y="connsiteY2"/>
-              </a:cxn>
-            </a:cxnLst>
-            <a:rect l="l" t="t" r="r" b="b"/>
-            <a:pathLst>
-              <a:path w="380365" h="887730">
-                <a:moveTo>
-                  <a:pt x="0" y="887730"/>
-                </a:moveTo>
-                <a:lnTo>
-                  <a:pt x="0" y="0"/>
-                </a:lnTo>
-                <a:lnTo>
-                  <a:pt x="380365" y="0"/>
-                </a:lnTo>
-              </a:path>
-            </a:pathLst>
-          </a:custGeom>
-          <a:noFill/>
-          <a:ln>
-            <a:solidFill>
-              <a:schemeClr val="tx1">
-                <a:lumMod val="85000"/>
-                <a:lumOff val="15000"/>
-              </a:schemeClr>
-            </a:solidFill>
-            <a:tailEnd type="oval"/>
-          </a:ln>
-        </p:spPr>
-        <p:style>
-          <a:lnRef idx="2">
-            <a:schemeClr val="accent1">
-              <a:lumMod val="75000"/>
-            </a:schemeClr>
-          </a:lnRef>
-          <a:fillRef idx="1">
-            <a:schemeClr val="accent1"/>
-          </a:fillRef>
-          <a:effectRef idx="0">
-            <a:srgbClr val="FFFFFF"/>
-          </a:effectRef>
-          <a:fontRef idx="minor">
-            <a:schemeClr val="lt1"/>
-          </a:fontRef>
-        </p:style>
-        <p:txBody>
-          <a:bodyPr rtlCol="0" anchor="ctr"/>
-          <a:p>
-            <a:pPr algn="ctr"/>
-            <a:endParaRPr lang="zh-CN" altLang="en-US"/>
-          </a:p>
-        </p:txBody>
-      </p:sp>
-      <p:sp>
-        <p:nvSpPr>
-          <p:cNvPr id="7" name="任意多边形 6"/>
-          <p:cNvSpPr/>
-          <p:nvPr/>
-        </p:nvSpPr>
-        <p:spPr>
-          <a:xfrm>
-            <a:off x="3169285" y="3115945"/>
-            <a:ext cx="1451610" cy="2346325"/>
-          </a:xfrm>
-          <a:custGeom>
-            <a:avLst/>
-            <a:gdLst>
-              <a:gd name="connisteX0" fmla="*/ 0 w 2300605"/>
-              <a:gd name="connsiteY0" fmla="*/ 0 h 2346325"/>
-              <a:gd name="connisteX1" fmla="*/ 8890 w 2300605"/>
-              <a:gd name="connsiteY1" fmla="*/ 2346325 h 2346325"/>
-              <a:gd name="connisteX2" fmla="*/ 2300605 w 2300605"/>
-              <a:gd name="connsiteY2" fmla="*/ 2337435 h 2346325"/>
-            </a:gdLst>
-            <a:ahLst/>
-            <a:cxnLst>
-              <a:cxn ang="0">
-                <a:pos x="connisteX0" y="connsiteY0"/>
-              </a:cxn>
-              <a:cxn ang="0">
-                <a:pos x="connisteX1" y="connsiteY1"/>
-              </a:cxn>
-              <a:cxn ang="0">
-                <a:pos x="connisteX2" y="connsiteY2"/>
-              </a:cxn>
-            </a:cxnLst>
-            <a:rect l="l" t="t" r="r" b="b"/>
-            <a:pathLst>
-              <a:path w="2300605" h="2346325">
-                <a:moveTo>
-                  <a:pt x="0" y="0"/>
-                </a:moveTo>
-                <a:lnTo>
-                  <a:pt x="8890" y="2346325"/>
-                </a:lnTo>
-                <a:lnTo>
-                  <a:pt x="2300605" y="2337435"/>
-                </a:lnTo>
-              </a:path>
-            </a:pathLst>
-          </a:custGeom>
-          <a:noFill/>
-          <a:ln>
-            <a:solidFill>
-              <a:srgbClr val="14B8A6"/>
-            </a:solidFill>
-            <a:tailEnd type="triangle"/>
-          </a:ln>
-        </p:spPr>
-        <p:style>
-          <a:lnRef idx="2">
-            <a:schemeClr val="accent1">
-              <a:lumMod val="75000"/>
-            </a:schemeClr>
-          </a:lnRef>
-          <a:fillRef idx="1">
-            <a:schemeClr val="accent1"/>
-          </a:fillRef>
-          <a:effectRef idx="0">
-            <a:srgbClr val="FFFFFF"/>
-          </a:effectRef>
-          <a:fontRef idx="minor">
-            <a:schemeClr val="lt1"/>
-          </a:fontRef>
-        </p:style>
-        <p:txBody>
-          <a:bodyPr rtlCol="0" anchor="ctr"/>
-          <a:p>
-            <a:pPr algn="ctr"/>
-            <a:endParaRPr lang="zh-CN" altLang="en-US"/>
-          </a:p>
-        </p:txBody>
-      </p:sp>
-      <p:sp>
-        <p:nvSpPr>
-          <p:cNvPr id="9" name="文本框 8"/>
-          <p:cNvSpPr txBox="1"/>
-          <p:nvPr/>
-        </p:nvSpPr>
-        <p:spPr>
-          <a:xfrm>
-            <a:off x="4620260" y="5253355"/>
-            <a:ext cx="3048000" cy="368300"/>
+            <a:off x="240665" y="6157595"/>
+            <a:ext cx="8556625" cy="521970"/>
           </a:xfrm>
           <a:prstGeom prst="rect">
             <a:avLst/>
@@ -6813,53 +7981,137 @@
           </a:bodyPr>
           <a:p>
             <a:r>
-              <a:rPr lang="zh-CN" altLang="en-US"/>
-              <a:t>训练目标</a:t>
-            </a:r>
-            <a:r>
-              <a:rPr lang="en-US" altLang="zh-CN"/>
-              <a:t>:MAE</a:t>
-            </a:r>
-            <a:endParaRPr lang="en-US" altLang="zh-CN"/>
-          </a:p>
-        </p:txBody>
-      </p:sp>
-      <p:sp>
-        <p:nvSpPr>
-          <p:cNvPr id="2" name="文本框 1"/>
+              <a:rPr lang="en-US" altLang="zh-CN" sz="1400"/>
+              <a:t>Comparison between predicted and ground-truth curves, In the red-highlighted region, the model without a temporal window shows poor prediction performance.</a:t>
+            </a:r>
+            <a:endParaRPr lang="en-US" altLang="zh-CN" sz="1400"/>
+          </a:p>
+        </p:txBody>
+      </p:sp>
+      <p:sp>
+        <p:nvSpPr>
+          <p:cNvPr id="33" name="文本框 32"/>
           <p:cNvSpPr txBox="1"/>
           <p:nvPr/>
         </p:nvSpPr>
         <p:spPr>
           <a:xfrm>
-            <a:off x="4620895" y="5733098"/>
-            <a:ext cx="5080000" cy="337185"/>
+            <a:off x="275590" y="1266825"/>
+            <a:ext cx="8522970" cy="1476375"/>
           </a:xfrm>
           <a:prstGeom prst="rect">
             <a:avLst/>
           </a:prstGeom>
         </p:spPr>
         <p:txBody>
-          <a:bodyPr>
+          <a:bodyPr wrap="square">
             <a:spAutoFit/>
           </a:bodyPr>
           <a:p>
-            <a:r>
-              <a:rPr lang="zh-CN" altLang="en-US" sz="1600"/>
-              <a:t>输入</a:t>
-            </a:r>
-            <a:r>
-              <a:rPr lang="zh-CN" sz="1600">
-                <a:ea typeface="宋体" panose="02010600030101010101" pitchFamily="2" charset="-122"/>
-              </a:rPr>
-              <a:t>进行了归一化</a:t>
-            </a:r>
-            <a:endParaRPr lang="zh-CN" sz="1600">
-              <a:ea typeface="宋体" panose="02010600030101010101" pitchFamily="2" charset="-122"/>
-            </a:endParaRPr>
-          </a:p>
-        </p:txBody>
-      </p:sp>
+            <a:pPr marL="285750" indent="-285750">
+              <a:buFont typeface="Wingdings" panose="05000000000000000000" charset="0"/>
+              <a:buChar char="l"/>
+            </a:pPr>
+            <a:r>
+              <a:rPr lang="en-US" altLang="zh-CN"/>
+              <a:t>Without a temporal window : The model learns only the mapping between distance and fingertip aperture, resulting in larger errors during rapid changes.</a:t>
+            </a:r>
+            <a:endParaRPr lang="en-US" altLang="zh-CN"/>
+          </a:p>
+          <a:p>
+            <a:pPr marL="285750" indent="-285750">
+              <a:buFont typeface="Wingdings" panose="05000000000000000000" charset="0"/>
+              <a:buChar char="l"/>
+            </a:pPr>
+            <a:endParaRPr lang="en-US" altLang="zh-CN"/>
+          </a:p>
+          <a:p>
+            <a:pPr marL="285750" indent="-285750">
+              <a:buFont typeface="Wingdings" panose="05000000000000000000" charset="0"/>
+              <a:buChar char="l"/>
+            </a:pPr>
+            <a:r>
+              <a:rPr lang="en-US" altLang="zh-CN"/>
+              <a:t>With a temporal window:The model can utilize short-term motion context to learn temporal trends, improving prediction accuracy.</a:t>
+            </a:r>
+            <a:endParaRPr lang="en-US" altLang="zh-CN"/>
+          </a:p>
+        </p:txBody>
+      </p:sp>
+      <p:pic>
+        <p:nvPicPr>
+          <p:cNvPr id="34" name="图片 33" descr="download"/>
+          <p:cNvPicPr>
+            <a:picLocks noChangeAspect="1"/>
+          </p:cNvPicPr>
+          <p:nvPr/>
+        </p:nvPicPr>
+        <p:blipFill>
+          <a:blip r:embed="rId1"/>
+          <a:stretch>
+            <a:fillRect/>
+          </a:stretch>
+        </p:blipFill>
+        <p:spPr>
+          <a:xfrm>
+            <a:off x="275590" y="3016250"/>
+            <a:ext cx="2640965" cy="3215640"/>
+          </a:xfrm>
+          <a:prstGeom prst="rect">
+            <a:avLst/>
+          </a:prstGeom>
+        </p:spPr>
+      </p:pic>
+      <p:pic>
+        <p:nvPicPr>
+          <p:cNvPr id="36" name="图片 35" descr="C:/Users/Di/Downloads/download (1).pngdownload (1)"/>
+          <p:cNvPicPr>
+            <a:picLocks noChangeAspect="1"/>
+          </p:cNvPicPr>
+          <p:nvPr/>
+        </p:nvPicPr>
+        <p:blipFill>
+          <a:blip r:embed="rId2"/>
+          <a:srcRect r="20"/>
+          <a:stretch>
+            <a:fillRect/>
+          </a:stretch>
+        </p:blipFill>
+        <p:spPr>
+          <a:xfrm>
+            <a:off x="3216275" y="3016250"/>
+            <a:ext cx="2640965" cy="3215640"/>
+          </a:xfrm>
+          <a:prstGeom prst="rect">
+            <a:avLst/>
+          </a:prstGeom>
+        </p:spPr>
+      </p:pic>
+      <p:pic>
+        <p:nvPicPr>
+          <p:cNvPr id="37" name="图片 36" descr="C:/Users/Di/Downloads/download (2).pngdownload (2)"/>
+          <p:cNvPicPr>
+            <a:picLocks noChangeAspect="1"/>
+          </p:cNvPicPr>
+          <p:nvPr/>
+        </p:nvPicPr>
+        <p:blipFill>
+          <a:blip r:embed="rId3"/>
+          <a:srcRect r="20"/>
+          <a:stretch>
+            <a:fillRect/>
+          </a:stretch>
+        </p:blipFill>
+        <p:spPr>
+          <a:xfrm>
+            <a:off x="6156960" y="3016250"/>
+            <a:ext cx="2640965" cy="3215640"/>
+          </a:xfrm>
+          <a:prstGeom prst="rect">
+            <a:avLst/>
+          </a:prstGeom>
+        </p:spPr>
+      </p:pic>
     </p:spTree>
   </p:cSld>
   <p:clrMapOvr>
@@ -6914,8 +8166,9 @@
                 <a:latin typeface="Times New Roman" panose="02020603050405020304"/>
                 <a:ea typeface="Times New Roman" panose="02020603050405020304"/>
                 <a:cs typeface="Times New Roman" panose="02020603050405020304"/>
+                <a:sym typeface="+mn-ea"/>
               </a:rPr>
-              <a:t>Trail</a:t>
+              <a:t>Offline Validation</a:t>
             </a:r>
             <a:endParaRPr lang="en-US" altLang="zh-CN" sz="3200" b="1">
               <a:latin typeface="Times New Roman" panose="02020603050405020304"/>
@@ -6925,37 +8178,180 @@
           </a:p>
         </p:txBody>
       </p:sp>
-      <p:pic>
-        <p:nvPicPr>
-          <p:cNvPr id="10" name="grasp_video">
-            <a:hlinkClick r:id="" action="ppaction://media"/>
-          </p:cNvPr>
-          <p:cNvPicPr/>
-          <p:nvPr>
-            <a:videoFile r:link="rId1"/>
-            <p:extLst>
-              <p:ext uri="{DAA4B4D4-6D71-4841-9C94-3DE7FCFB9230}">
-                <p14:media xmlns:p14="http://schemas.microsoft.com/office/powerpoint/2010/main" r:embed="rId2"/>
-              </p:ext>
-            </p:extLst>
-          </p:nvPr>
-        </p:nvPicPr>
-        <p:blipFill>
-          <a:blip r:embed="rId3"/>
-          <a:stretch>
-            <a:fillRect/>
-          </a:stretch>
-        </p:blipFill>
+      <p:sp>
+        <p:nvSpPr>
+          <p:cNvPr id="16" name="文本框 15"/>
+          <p:cNvSpPr txBox="1"/>
+          <p:nvPr/>
+        </p:nvSpPr>
         <p:spPr>
           <a:xfrm>
-            <a:off x="2197100" y="2560320"/>
-            <a:ext cx="4876800" cy="3657600"/>
+            <a:off x="275590" y="810260"/>
+            <a:ext cx="8523605" cy="645160"/>
           </a:xfrm>
           <a:prstGeom prst="rect">
             <a:avLst/>
           </a:prstGeom>
+          <a:noFill/>
         </p:spPr>
-      </p:pic>
+        <p:txBody>
+          <a:bodyPr wrap="square" rtlCol="0">
+            <a:spAutoFit/>
+          </a:bodyPr>
+          <a:p>
+            <a:r>
+              <a:rPr lang="en-US" altLang="zh-CN"/>
+              <a:t>9 trials were used to validation each cube size. Overall validation across 27 trials for three cube sizes.</a:t>
+            </a:r>
+            <a:endParaRPr lang="en-US" altLang="zh-CN"/>
+          </a:p>
+        </p:txBody>
+      </p:sp>
+      <p:grpSp>
+        <p:nvGrpSpPr>
+          <p:cNvPr id="19" name="组合 18"/>
+          <p:cNvGrpSpPr/>
+          <p:nvPr/>
+        </p:nvGrpSpPr>
+        <p:grpSpPr>
+          <a:xfrm>
+            <a:off x="0" y="2799080"/>
+            <a:ext cx="9144000" cy="3797300"/>
+            <a:chOff x="0" y="3354"/>
+            <a:chExt cx="14400" cy="5980"/>
+          </a:xfrm>
+        </p:grpSpPr>
+        <p:pic>
+          <p:nvPicPr>
+            <p:cNvPr id="17" name="图片 16" descr="01_overall_model_comparison"/>
+            <p:cNvPicPr>
+              <a:picLocks noChangeAspect="1"/>
+            </p:cNvPicPr>
+            <p:nvPr/>
+          </p:nvPicPr>
+          <p:blipFill>
+            <a:blip r:embed="rId1"/>
+            <a:stretch>
+              <a:fillRect/>
+            </a:stretch>
+          </p:blipFill>
+          <p:spPr>
+            <a:xfrm>
+              <a:off x="0" y="3354"/>
+              <a:ext cx="14400" cy="5400"/>
+            </a:xfrm>
+            <a:prstGeom prst="rect">
+              <a:avLst/>
+            </a:prstGeom>
+          </p:spPr>
+        </p:pic>
+        <p:sp>
+          <p:nvSpPr>
+            <p:cNvPr id="18" name="文本框 17"/>
+            <p:cNvSpPr txBox="1"/>
+            <p:nvPr/>
+          </p:nvSpPr>
+          <p:spPr>
+            <a:xfrm>
+              <a:off x="3600" y="8754"/>
+              <a:ext cx="7200" cy="580"/>
+            </a:xfrm>
+            <a:prstGeom prst="rect">
+              <a:avLst/>
+            </a:prstGeom>
+            <a:noFill/>
+          </p:spPr>
+          <p:txBody>
+            <a:bodyPr wrap="square" rtlCol="0" anchor="t">
+              <a:spAutoFit/>
+            </a:bodyPr>
+            <a:p>
+              <a:pPr algn="ctr"/>
+              <a:r>
+                <a:rPr lang="en-US" altLang="zh-CN"/>
+                <a:t>Overall validation performance</a:t>
+              </a:r>
+              <a:endParaRPr lang="en-US" altLang="zh-CN"/>
+            </a:p>
+          </p:txBody>
+        </p:sp>
+      </p:grpSp>
+      <p:sp>
+        <p:nvSpPr>
+          <p:cNvPr id="20" name="文本框 19"/>
+          <p:cNvSpPr txBox="1"/>
+          <p:nvPr/>
+        </p:nvSpPr>
+        <p:spPr>
+          <a:xfrm>
+            <a:off x="633730" y="1455420"/>
+            <a:ext cx="4572000" cy="1170305"/>
+          </a:xfrm>
+          <a:prstGeom prst="rect">
+            <a:avLst/>
+          </a:prstGeom>
+          <a:noFill/>
+        </p:spPr>
+        <p:txBody>
+          <a:bodyPr wrap="square" rtlCol="0" anchor="t">
+            <a:spAutoFit/>
+          </a:bodyPr>
+          <a:p>
+            <a:pPr marL="285750" indent="-285750">
+              <a:lnSpc>
+                <a:spcPct val="130000"/>
+              </a:lnSpc>
+              <a:buFont typeface="Wingdings" panose="05000000000000000000" charset="0"/>
+              <a:buChar char="l"/>
+            </a:pPr>
+            <a:r>
+              <a:rPr lang="en-US" altLang="zh-CN">
+                <a:sym typeface="+mn-ea"/>
+              </a:rPr>
+              <a:t>MAE : 3.87</a:t>
+            </a:r>
+            <a:endParaRPr lang="en-US" altLang="zh-CN">
+              <a:sym typeface="+mn-ea"/>
+            </a:endParaRPr>
+          </a:p>
+          <a:p>
+            <a:pPr marL="285750" indent="-285750">
+              <a:lnSpc>
+                <a:spcPct val="130000"/>
+              </a:lnSpc>
+              <a:buFont typeface="Wingdings" panose="05000000000000000000" charset="0"/>
+              <a:buChar char="l"/>
+            </a:pPr>
+            <a:r>
+              <a:rPr lang="en-US" altLang="zh-CN">
+                <a:sym typeface="+mn-ea"/>
+              </a:rPr>
+              <a:t>RMSE : 5.91</a:t>
+            </a:r>
+            <a:endParaRPr lang="en-US" altLang="zh-CN">
+              <a:sym typeface="+mn-ea"/>
+            </a:endParaRPr>
+          </a:p>
+          <a:p>
+            <a:pPr marL="285750" indent="-285750">
+              <a:lnSpc>
+                <a:spcPct val="130000"/>
+              </a:lnSpc>
+              <a:buFont typeface="Wingdings" panose="05000000000000000000" charset="0"/>
+              <a:buChar char="l"/>
+            </a:pPr>
+            <a:r>
+              <a:rPr lang="en-US" altLang="zh-CN">
+                <a:sym typeface="+mn-ea"/>
+              </a:rPr>
+              <a:t>R² : 0.958</a:t>
+            </a:r>
+            <a:endParaRPr lang="en-US" altLang="zh-CN">
+              <a:sym typeface="+mn-ea"/>
+            </a:endParaRPr>
+          </a:p>
+        </p:txBody>
+      </p:sp>
     </p:spTree>
   </p:cSld>
   <p:clrMapOvr>
@@ -6964,80 +8360,7 @@
   <p:timing>
     <p:tnLst>
       <p:par>
-        <p:cTn id="1" dur="indefinite" restart="never" nodeType="tmRoot">
-          <p:childTnLst>
-            <p:video fullScrn="0">
-              <p:cMediaNode>
-                <p:cTn id="2" fill="hold" display="1">
-                  <p:stCondLst>
-                    <p:cond delay="indefinite"/>
-                  </p:stCondLst>
-                </p:cTn>
-                <p:tgtEl>
-                  <p:spTgt spid="10"/>
-                </p:tgtEl>
-              </p:cMediaNode>
-            </p:video>
-            <p:seq concurrent="1" nextAc="seek">
-              <p:cTn id="3" restart="whenNotActive" fill="hold" evtFilter="cancelBubble" nodeType="interactiveSeq">
-                <p:stCondLst>
-                  <p:cond evt="onClick" delay="0">
-                    <p:tgtEl>
-                      <p:spTgt spid="10"/>
-                    </p:tgtEl>
-                  </p:cond>
-                </p:stCondLst>
-                <p:endSync evt="end" delay="0">
-                  <p:rtn val="all"/>
-                </p:endSync>
-                <p:childTnLst>
-                  <p:par>
-                    <p:cTn id="4" fill="hold">
-                      <p:stCondLst>
-                        <p:cond delay="0"/>
-                      </p:stCondLst>
-                      <p:childTnLst>
-                        <p:par>
-                          <p:cTn id="5" fill="hold">
-                            <p:stCondLst>
-                              <p:cond delay="0"/>
-                            </p:stCondLst>
-                            <p:childTnLst>
-                              <p:par>
-                                <p:cTn id="6" presetID="2" presetClass="mediacall" presetSubtype="0" fill="hold" nodeType="clickEffect">
-                                  <p:stCondLst>
-                                    <p:cond delay="0"/>
-                                  </p:stCondLst>
-                                  <p:childTnLst>
-                                    <p:cmd type="call" cmd="togglePause">
-                                      <p:cBhvr additive="base">
-                                        <p:cTn id="7" dur="1" fill="hold"/>
-                                        <p:tgtEl>
-                                          <p:spTgt spid="10"/>
-                                        </p:tgtEl>
-                                      </p:cBhvr>
-                                    </p:cmd>
-                                  </p:childTnLst>
-                                </p:cTn>
-                              </p:par>
-                            </p:childTnLst>
-                          </p:cTn>
-                        </p:par>
-                      </p:childTnLst>
-                    </p:cTn>
-                  </p:par>
-                </p:childTnLst>
-              </p:cTn>
-              <p:nextCondLst>
-                <p:cond evt="onClick" delay="0">
-                  <p:tgtEl>
-                    <p:spTgt spid="10"/>
-                  </p:tgtEl>
-                </p:cond>
-              </p:nextCondLst>
-            </p:seq>
-          </p:childTnLst>
-        </p:cTn>
+        <p:cTn id="1" dur="indefinite" restart="never" nodeType="tmRoot"/>
       </p:par>
     </p:tnLst>
   </p:timing>
@@ -7054,6 +8377,31 @@
         <p:nvPr/>
       </p:nvGrpSpPr>
       <p:grpSpPr/>
+      <p:pic>
+        <p:nvPicPr>
+          <p:cNvPr id="2" name="图片 1" descr="C:/Users/Di/Downloads/download (4).pngdownload (4)"/>
+          <p:cNvPicPr>
+            <a:picLocks noChangeAspect="1"/>
+          </p:cNvPicPr>
+          <p:nvPr/>
+        </p:nvPicPr>
+        <p:blipFill>
+          <a:blip r:embed="rId1"/>
+          <a:srcRect/>
+          <a:stretch>
+            <a:fillRect/>
+          </a:stretch>
+        </p:blipFill>
+        <p:spPr>
+          <a:xfrm>
+            <a:off x="1041400" y="1819275"/>
+            <a:ext cx="7061200" cy="4854575"/>
+          </a:xfrm>
+          <a:prstGeom prst="rect">
+            <a:avLst/>
+          </a:prstGeom>
+        </p:spPr>
+      </p:pic>
       <p:sp>
         <p:nvSpPr>
           <p:cNvPr id="6" name="文本框 5"/>
@@ -7095,78 +8443,49 @@
           </a:p>
         </p:txBody>
       </p:sp>
-      <p:pic>
-        <p:nvPicPr>
-          <p:cNvPr id="2" name="图片 1" descr="validation_metrics_chart"/>
-          <p:cNvPicPr>
-            <a:picLocks noChangeAspect="1"/>
-          </p:cNvPicPr>
+      <p:sp>
+        <p:nvSpPr>
+          <p:cNvPr id="16" name="文本框 15"/>
+          <p:cNvSpPr txBox="1"/>
           <p:nvPr/>
-        </p:nvPicPr>
-        <p:blipFill>
-          <a:blip r:embed="rId1"/>
-          <a:stretch>
-            <a:fillRect/>
-          </a:stretch>
-        </p:blipFill>
+        </p:nvSpPr>
         <p:spPr>
           <a:xfrm>
-            <a:off x="0" y="1306195"/>
-            <a:ext cx="9144000" cy="4244975"/>
+            <a:off x="275590" y="810260"/>
+            <a:ext cx="7620000" cy="1198880"/>
           </a:xfrm>
           <a:prstGeom prst="rect">
             <a:avLst/>
           </a:prstGeom>
+          <a:noFill/>
         </p:spPr>
-      </p:pic>
-      <p:pic>
-        <p:nvPicPr>
-          <p:cNvPr id="3" name="图片 2" descr="validation_model_comparison"/>
-          <p:cNvPicPr>
-            <a:picLocks noChangeAspect="1"/>
-          </p:cNvPicPr>
-          <p:nvPr/>
-        </p:nvPicPr>
-        <p:blipFill>
-          <a:blip r:embed="rId2"/>
-          <a:stretch>
-            <a:fillRect/>
-          </a:stretch>
-        </p:blipFill>
-        <p:spPr>
-          <a:xfrm>
-            <a:off x="0" y="1799590"/>
-            <a:ext cx="9144000" cy="3429000"/>
-          </a:xfrm>
-          <a:prstGeom prst="rect">
-            <a:avLst/>
-          </a:prstGeom>
-        </p:spPr>
-      </p:pic>
-      <p:pic>
-        <p:nvPicPr>
-          <p:cNvPr id="4" name="图片 3" descr="validation_phase_errors"/>
-          <p:cNvPicPr>
-            <a:picLocks noChangeAspect="1"/>
-          </p:cNvPicPr>
-          <p:nvPr/>
-        </p:nvPicPr>
-        <p:blipFill>
-          <a:blip r:embed="rId3"/>
-          <a:stretch>
-            <a:fillRect/>
-          </a:stretch>
-        </p:blipFill>
-        <p:spPr>
-          <a:xfrm>
-            <a:off x="-3129915" y="3514090"/>
-            <a:ext cx="7315200" cy="5029200"/>
-          </a:xfrm>
-          <a:prstGeom prst="rect">
-            <a:avLst/>
-          </a:prstGeom>
-        </p:spPr>
-      </p:pic>
+        <p:txBody>
+          <a:bodyPr wrap="square" rtlCol="0">
+            <a:spAutoFit/>
+          </a:bodyPr>
+          <a:p>
+            <a:r>
+              <a:rPr lang="en-US" altLang="zh-CN"/>
+              <a:t>The movement is divided into three phases, initial, grasping, and hold.</a:t>
+            </a:r>
+            <a:br>
+              <a:rPr lang="en-US" altLang="zh-CN"/>
+            </a:br>
+            <a:r>
+              <a:rPr lang="en-US" altLang="zh-CN"/>
+              <a:t>The grasping</a:t>
+            </a:r>
+            <a:r>
+              <a:rPr lang="en-US" altLang="zh-CN"/>
+              <a:t> phase is the most challenging to predict. However, the current model can reduce prediction errors during this phase.</a:t>
+            </a:r>
+            <a:br>
+              <a:rPr lang="en-US" altLang="zh-CN"/>
+            </a:br>
+            <a:endParaRPr lang="en-US" altLang="zh-CN"/>
+          </a:p>
+        </p:txBody>
+      </p:sp>
     </p:spTree>
   </p:cSld>
   <p:clrMapOvr>
@@ -7233,9 +8552,42 @@
           </a:p>
         </p:txBody>
       </p:sp>
+      <p:sp>
+        <p:nvSpPr>
+          <p:cNvPr id="2" name="文本框 1"/>
+          <p:cNvSpPr txBox="1"/>
+          <p:nvPr/>
+        </p:nvSpPr>
+        <p:spPr>
+          <a:xfrm>
+            <a:off x="275590" y="810260"/>
+            <a:ext cx="8867775" cy="645160"/>
+          </a:xfrm>
+          <a:prstGeom prst="rect">
+            <a:avLst/>
+          </a:prstGeom>
+          <a:noFill/>
+        </p:spPr>
+        <p:txBody>
+          <a:bodyPr wrap="square" rtlCol="0">
+            <a:spAutoFit/>
+          </a:bodyPr>
+          <a:p>
+            <a:r>
+              <a:rPr lang="en-US" altLang="zh-CN">
+                <a:ea typeface="SimSun" panose="02010600030101010101" pitchFamily="2" charset="-122"/>
+              </a:rPr>
+              <a:t>Three cubes of different sizes are each grasped three times in a random order. The system identifies each cube by its color and loads the corresponding model with a temporal window.</a:t>
+            </a:r>
+            <a:endParaRPr lang="en-US" altLang="zh-CN">
+              <a:ea typeface="SimSun" panose="02010600030101010101" pitchFamily="2" charset="-122"/>
+            </a:endParaRPr>
+          </a:p>
+        </p:txBody>
+      </p:sp>
       <p:pic>
         <p:nvPicPr>
-          <p:cNvPr id="5" name="图片 4" descr="02_trial_metrics"/>
+          <p:cNvPr id="3" name="图片 2" descr="overall_model_comparison"/>
           <p:cNvPicPr>
             <a:picLocks noChangeAspect="1"/>
           </p:cNvPicPr>
@@ -7249,14 +8601,141 @@
         </p:blipFill>
         <p:spPr>
           <a:xfrm>
-            <a:off x="0" y="3529330"/>
-            <a:ext cx="9144000" cy="3048000"/>
+            <a:off x="0" y="2823210"/>
+            <a:ext cx="9144000" cy="3429000"/>
           </a:xfrm>
           <a:prstGeom prst="rect">
             <a:avLst/>
           </a:prstGeom>
         </p:spPr>
       </p:pic>
+      <p:sp>
+        <p:nvSpPr>
+          <p:cNvPr id="18" name="文本框 17"/>
+          <p:cNvSpPr txBox="1"/>
+          <p:nvPr/>
+        </p:nvSpPr>
+        <p:spPr>
+          <a:xfrm>
+            <a:off x="2251075" y="6148070"/>
+            <a:ext cx="4572000" cy="368300"/>
+          </a:xfrm>
+          <a:prstGeom prst="rect">
+            <a:avLst/>
+          </a:prstGeom>
+          <a:noFill/>
+        </p:spPr>
+        <p:txBody>
+          <a:bodyPr wrap="square" rtlCol="0" anchor="t">
+            <a:spAutoFit/>
+          </a:bodyPr>
+          <a:p>
+            <a:pPr algn="ctr"/>
+            <a:r>
+              <a:rPr lang="en-US" altLang="zh-CN"/>
+              <a:t>Overall validation performance</a:t>
+            </a:r>
+            <a:endParaRPr lang="en-US" altLang="zh-CN"/>
+          </a:p>
+        </p:txBody>
+      </p:sp>
+      <p:sp>
+        <p:nvSpPr>
+          <p:cNvPr id="20" name="文本框 19"/>
+          <p:cNvSpPr txBox="1"/>
+          <p:nvPr/>
+        </p:nvSpPr>
+        <p:spPr>
+          <a:xfrm>
+            <a:off x="633730" y="1455420"/>
+            <a:ext cx="4572000" cy="1170305"/>
+          </a:xfrm>
+          <a:prstGeom prst="rect">
+            <a:avLst/>
+          </a:prstGeom>
+          <a:noFill/>
+        </p:spPr>
+        <p:txBody>
+          <a:bodyPr wrap="square" rtlCol="0" anchor="t">
+            <a:spAutoFit/>
+          </a:bodyPr>
+          <a:p>
+            <a:pPr marL="285750" indent="-285750">
+              <a:lnSpc>
+                <a:spcPct val="130000"/>
+              </a:lnSpc>
+              <a:buFont typeface="Wingdings" panose="05000000000000000000" charset="0"/>
+              <a:buChar char="l"/>
+            </a:pPr>
+            <a:r>
+              <a:rPr lang="en-US" altLang="zh-CN">
+                <a:sym typeface="+mn-ea"/>
+              </a:rPr>
+              <a:t>MAE : </a:t>
+            </a:r>
+            <a:r>
+              <a:rPr lang="en-US" altLang="zh-CN">
+                <a:ea typeface="SimSun" panose="02010600030101010101" pitchFamily="2" charset="-122"/>
+                <a:sym typeface="+mn-ea"/>
+              </a:rPr>
+              <a:t>4.18</a:t>
+            </a:r>
+            <a:endParaRPr lang="en-US" altLang="zh-CN">
+              <a:sym typeface="+mn-ea"/>
+            </a:endParaRPr>
+          </a:p>
+          <a:p>
+            <a:pPr marL="285750" indent="-285750">
+              <a:lnSpc>
+                <a:spcPct val="130000"/>
+              </a:lnSpc>
+              <a:buFont typeface="Wingdings" panose="05000000000000000000" charset="0"/>
+              <a:buChar char="l"/>
+            </a:pPr>
+            <a:r>
+              <a:rPr lang="en-US" altLang="zh-CN">
+                <a:sym typeface="+mn-ea"/>
+              </a:rPr>
+              <a:t>RMSE : </a:t>
+            </a:r>
+            <a:r>
+              <a:rPr lang="en-US" altLang="zh-CN">
+                <a:ea typeface="SimSun" panose="02010600030101010101" pitchFamily="2" charset="-122"/>
+                <a:sym typeface="+mn-ea"/>
+              </a:rPr>
+              <a:t>6.91</a:t>
+            </a:r>
+            <a:endParaRPr lang="en-US" altLang="zh-CN">
+              <a:sym typeface="+mn-ea"/>
+            </a:endParaRPr>
+          </a:p>
+          <a:p>
+            <a:pPr marL="285750" indent="-285750">
+              <a:lnSpc>
+                <a:spcPct val="130000"/>
+              </a:lnSpc>
+              <a:buFont typeface="Wingdings" panose="05000000000000000000" charset="0"/>
+              <a:buChar char="l"/>
+            </a:pPr>
+            <a:r>
+              <a:rPr lang="en-US" altLang="zh-CN">
+                <a:sym typeface="+mn-ea"/>
+              </a:rPr>
+              <a:t>R² : </a:t>
+            </a:r>
+            <a:r>
+              <a:rPr lang="en-US" altLang="zh-CN">
+                <a:ea typeface="SimSun" panose="02010600030101010101" pitchFamily="2" charset="-122"/>
+                <a:sym typeface="+mn-ea"/>
+              </a:rPr>
+              <a:t>0.929</a:t>
+            </a:r>
+            <a:endParaRPr lang="en-US" altLang="zh-CN">
+              <a:sym typeface="+mn-ea"/>
+            </a:endParaRPr>
+          </a:p>
+        </p:txBody>
+      </p:sp>
     </p:spTree>
   </p:cSld>
   <p:clrMapOvr>
@@ -7325,7 +8804,7 @@
       </p:sp>
       <p:pic>
         <p:nvPicPr>
-          <p:cNvPr id="2" name="图片 1" descr="03_phase_errors"/>
+          <p:cNvPr id="5" name="图片 4" descr="02_trial_metrics"/>
           <p:cNvPicPr>
             <a:picLocks noChangeAspect="1"/>
           </p:cNvPicPr>
@@ -7339,7 +8818,180 @@
         </p:blipFill>
         <p:spPr>
           <a:xfrm>
-            <a:off x="914400" y="1774190"/>
+            <a:off x="0" y="3101340"/>
+            <a:ext cx="9144000" cy="3048000"/>
+          </a:xfrm>
+          <a:prstGeom prst="rect">
+            <a:avLst/>
+          </a:prstGeom>
+        </p:spPr>
+      </p:pic>
+      <p:sp>
+        <p:nvSpPr>
+          <p:cNvPr id="2" name="文本框 1"/>
+          <p:cNvSpPr txBox="1"/>
+          <p:nvPr/>
+        </p:nvSpPr>
+        <p:spPr>
+          <a:xfrm>
+            <a:off x="275590" y="929005"/>
+            <a:ext cx="8523605" cy="368300"/>
+          </a:xfrm>
+          <a:prstGeom prst="rect">
+            <a:avLst/>
+          </a:prstGeom>
+          <a:noFill/>
+        </p:spPr>
+        <p:txBody>
+          <a:bodyPr wrap="square" rtlCol="0">
+            <a:spAutoFit/>
+          </a:bodyPr>
+          <a:p>
+            <a:r>
+              <a:rPr lang="en-US" altLang="zh-CN">
+                <a:ea typeface="SimSun" panose="02010600030101010101" pitchFamily="2" charset="-122"/>
+              </a:rPr>
+              <a:t>Performance </a:t>
+            </a:r>
+            <a:r>
+              <a:rPr lang="en-US" altLang="zh-CN"/>
+              <a:t>comparison </a:t>
+            </a:r>
+            <a:r>
+              <a:rPr lang="en-US" altLang="zh-CN">
+                <a:ea typeface="SimSun" panose="02010600030101010101" pitchFamily="2" charset="-122"/>
+              </a:rPr>
+              <a:t>across 9 real-time </a:t>
+            </a:r>
+            <a:r>
+              <a:rPr lang="en-US" altLang="zh-CN"/>
+              <a:t>e</a:t>
+            </a:r>
+            <a:r>
+              <a:rPr lang="en-US" altLang="zh-CN"/>
+              <a:t>xperiments</a:t>
+            </a:r>
+            <a:endParaRPr lang="en-US" altLang="zh-CN"/>
+          </a:p>
+        </p:txBody>
+      </p:sp>
+    </p:spTree>
+  </p:cSld>
+  <p:clrMapOvr>
+    <a:masterClrMapping/>
+  </p:clrMapOvr>
+  <p:timing>
+    <p:tnLst>
+      <p:par>
+        <p:cTn id="1" dur="indefinite" restart="never" nodeType="tmRoot"/>
+      </p:par>
+    </p:tnLst>
+  </p:timing>
+</p:sld>
+</file>
+
+<file path=ppt/slides/slide9.xml><?xml version="1.0" encoding="utf-8"?>
+<p:sld xmlns:a="http://schemas.openxmlformats.org/drawingml/2006/main" xmlns:r="http://schemas.openxmlformats.org/officeDocument/2006/relationships" xmlns:p="http://schemas.openxmlformats.org/presentationml/2006/main">
+  <p:cSld>
+    <p:spTree>
+      <p:nvGrpSpPr>
+        <p:cNvPr id="1" name=""/>
+        <p:cNvGrpSpPr/>
+        <p:nvPr/>
+      </p:nvGrpSpPr>
+      <p:grpSpPr/>
+      <p:sp>
+        <p:nvSpPr>
+          <p:cNvPr id="6" name="文本框 5"/>
+          <p:cNvSpPr>
+            <a:spLocks noGrp="1"/>
+          </p:cNvSpPr>
+          <p:nvPr/>
+        </p:nvSpPr>
+        <p:spPr>
+          <a:xfrm>
+            <a:off x="275590" y="226695"/>
+            <a:ext cx="8522970" cy="583565"/>
+          </a:xfrm>
+          <a:prstGeom prst="rect">
+            <a:avLst/>
+          </a:prstGeom>
+          <a:noFill/>
+        </p:spPr>
+        <p:txBody>
+          <a:bodyPr wrap="square">
+            <a:spAutoFit/>
+          </a:bodyPr>
+          <a:lstStyle/>
+          <a:p>
+            <a:r>
+              <a:rPr lang="en-US" altLang="zh-CN" sz="3200" b="1">
+                <a:latin typeface="Times New Roman" panose="02020603050405020304"/>
+                <a:ea typeface="Times New Roman" panose="02020603050405020304"/>
+                <a:cs typeface="Times New Roman" panose="02020603050405020304"/>
+                <a:sym typeface="+mn-ea"/>
+              </a:rPr>
+              <a:t>Real-Time Experiment</a:t>
+            </a:r>
+            <a:endParaRPr lang="en-US" altLang="zh-CN" sz="3200" b="1">
+              <a:latin typeface="Times New Roman" panose="02020603050405020304"/>
+              <a:ea typeface="Times New Roman" panose="02020603050405020304"/>
+              <a:cs typeface="Times New Roman" panose="02020603050405020304"/>
+            </a:endParaRPr>
+          </a:p>
+        </p:txBody>
+      </p:sp>
+      <p:sp>
+        <p:nvSpPr>
+          <p:cNvPr id="3" name="文本框 2"/>
+          <p:cNvSpPr txBox="1"/>
+          <p:nvPr/>
+        </p:nvSpPr>
+        <p:spPr>
+          <a:xfrm>
+            <a:off x="275590" y="941070"/>
+            <a:ext cx="3048000" cy="368300"/>
+          </a:xfrm>
+          <a:prstGeom prst="rect">
+            <a:avLst/>
+          </a:prstGeom>
+          <a:noFill/>
+        </p:spPr>
+        <p:txBody>
+          <a:bodyPr wrap="square" rtlCol="0">
+            <a:spAutoFit/>
+          </a:bodyPr>
+          <a:p>
+            <a:r>
+              <a:rPr lang="en-US" altLang="zh-CN">
+                <a:ea typeface="SimSun" panose="02010600030101010101" pitchFamily="2" charset="-122"/>
+              </a:rPr>
+              <a:t>Three phase comparison</a:t>
+            </a:r>
+            <a:endParaRPr lang="en-US" altLang="zh-CN">
+              <a:ea typeface="SimSun" panose="02010600030101010101" pitchFamily="2" charset="-122"/>
+            </a:endParaRPr>
+          </a:p>
+        </p:txBody>
+      </p:sp>
+      <p:pic>
+        <p:nvPicPr>
+          <p:cNvPr id="4" name="图片 3" descr="C:/Users/Di/Downloads/download (3).pngdownload (3)"/>
+          <p:cNvPicPr>
+            <a:picLocks noChangeAspect="1"/>
+          </p:cNvPicPr>
+          <p:nvPr/>
+        </p:nvPicPr>
+        <p:blipFill>
+          <a:blip r:embed="rId1"/>
+          <a:srcRect/>
+          <a:stretch>
+            <a:fillRect/>
+          </a:stretch>
+        </p:blipFill>
+        <p:spPr>
+          <a:xfrm>
+            <a:off x="879475" y="1828800"/>
             <a:ext cx="7315200" cy="5029200"/>
           </a:xfrm>
           <a:prstGeom prst="rect">
